--- a/docs/AI-Driven Test Design Tool.pptx
+++ b/docs/AI-Driven Test Design Tool.pptx
@@ -8,7 +8,7 @@
     <p:notesMasterId r:id="rId4"/>
   </p:notesMasterIdLst>
   <p:handoutMasterIdLst>
-    <p:handoutMasterId r:id="rId25"/>
+    <p:handoutMasterId r:id="rId24"/>
   </p:handoutMasterIdLst>
   <p:sldIdLst>
     <p:sldId id="553" r:id="rId3"/>
@@ -18,26 +18,25 @@
     <p:sldId id="567" r:id="rId8"/>
     <p:sldId id="577" r:id="rId9"/>
     <p:sldId id="578" r:id="rId10"/>
-    <p:sldId id="579" r:id="rId11"/>
-    <p:sldId id="580" r:id="rId12"/>
-    <p:sldId id="581" r:id="rId13"/>
-    <p:sldId id="585" r:id="rId14"/>
-    <p:sldId id="586" r:id="rId15"/>
-    <p:sldId id="587" r:id="rId16"/>
-    <p:sldId id="588" r:id="rId17"/>
-    <p:sldId id="583" r:id="rId18"/>
-    <p:sldId id="591" r:id="rId19"/>
-    <p:sldId id="592" r:id="rId20"/>
-    <p:sldId id="593" r:id="rId21"/>
-    <p:sldId id="596" r:id="rId22"/>
-    <p:sldId id="597" r:id="rId23"/>
-    <p:sldId id="563" r:id="rId24"/>
+    <p:sldId id="580" r:id="rId11"/>
+    <p:sldId id="581" r:id="rId12"/>
+    <p:sldId id="585" r:id="rId13"/>
+    <p:sldId id="586" r:id="rId14"/>
+    <p:sldId id="587" r:id="rId15"/>
+    <p:sldId id="588" r:id="rId16"/>
+    <p:sldId id="583" r:id="rId17"/>
+    <p:sldId id="591" r:id="rId18"/>
+    <p:sldId id="592" r:id="rId19"/>
+    <p:sldId id="593" r:id="rId20"/>
+    <p:sldId id="596" r:id="rId21"/>
+    <p:sldId id="597" r:id="rId22"/>
+    <p:sldId id="563" r:id="rId23"/>
   </p:sldIdLst>
   <p:sldSz cx="12192000" cy="6858000"/>
   <p:notesSz cx="6858000" cy="9144000"/>
   <p:embeddedFontLst/>
   <p:custDataLst>
-    <p:tags r:id="rId29"/>
+    <p:tags r:id="rId28"/>
   </p:custDataLst>
   <p:defaultTextStyle>
     <a:defPPr>
@@ -1219,50 +1218,6 @@
 </file>
 
 <file path=ppt/notesSlides/notesSlide20.xml><?xml version="1.0" encoding="utf-8"?>
-<p:notes xmlns:a="http://schemas.openxmlformats.org/drawingml/2006/main" xmlns:r="http://schemas.openxmlformats.org/officeDocument/2006/relationships" xmlns:p="http://schemas.openxmlformats.org/presentationml/2006/main">
-  <p:cSld>
-    <p:spTree>
-      <p:nvGrpSpPr>
-        <p:cNvPr id="1" name=""/>
-        <p:cNvGrpSpPr/>
-        <p:nvPr/>
-      </p:nvGrpSpPr>
-      <p:grpSpPr/>
-      <p:sp>
-        <p:nvSpPr>
-          <p:cNvPr id="2" name="幻灯片图像占位符 1"/>
-          <p:cNvSpPr/>
-          <p:nvPr>
-            <p:ph type="sldImg" idx="2"/>
-          </p:nvPr>
-        </p:nvSpPr>
-        <p:spPr/>
-      </p:sp>
-      <p:sp>
-        <p:nvSpPr>
-          <p:cNvPr id="3" name="文本占位符 2"/>
-          <p:cNvSpPr/>
-          <p:nvPr>
-            <p:ph type="body" idx="3"/>
-          </p:nvPr>
-        </p:nvSpPr>
-        <p:spPr/>
-        <p:txBody>
-          <a:bodyPr/>
-          <a:p>
-            <a:endParaRPr lang="zh-CN" altLang="en-US"/>
-          </a:p>
-        </p:txBody>
-      </p:sp>
-    </p:spTree>
-  </p:cSld>
-  <p:clrMapOvr>
-    <a:masterClrMapping/>
-  </p:clrMapOvr>
-</p:notes>
-</file>
-
-<file path=ppt/notesSlides/notesSlide21.xml><?xml version="1.0" encoding="utf-8"?>
 <p:notes xmlns:a="http://schemas.openxmlformats.org/drawingml/2006/main" xmlns:r="http://schemas.openxmlformats.org/officeDocument/2006/relationships" xmlns:p="http://schemas.openxmlformats.org/presentationml/2006/main">
   <p:cSld>
     <p:spTree>
@@ -3097,203 +3052,6 @@
       <p:grpSpPr/>
       <p:pic>
         <p:nvPicPr>
-          <p:cNvPr id="6" name="图片 5" descr="q."/>
-          <p:cNvPicPr>
-            <a:picLocks noChangeAspect="1"/>
-          </p:cNvPicPr>
-          <p:nvPr/>
-        </p:nvPicPr>
-        <p:blipFill>
-          <a:blip r:embed="rId1"/>
-          <a:stretch>
-            <a:fillRect/>
-          </a:stretch>
-        </p:blipFill>
-        <p:spPr>
-          <a:xfrm>
-            <a:off x="635" y="0"/>
-            <a:ext cx="12192000" cy="6858000"/>
-          </a:xfrm>
-          <a:prstGeom prst="rect">
-            <a:avLst/>
-          </a:prstGeom>
-        </p:spPr>
-      </p:pic>
-      <p:sp>
-        <p:nvSpPr>
-          <p:cNvPr id="4" name="文本框 3"/>
-          <p:cNvSpPr txBox="1"/>
-          <p:nvPr/>
-        </p:nvSpPr>
-        <p:spPr>
-          <a:xfrm>
-            <a:off x="4610735" y="2623185"/>
-            <a:ext cx="3112770" cy="1014730"/>
-          </a:xfrm>
-          <a:prstGeom prst="rect">
-            <a:avLst/>
-          </a:prstGeom>
-          <a:noFill/>
-        </p:spPr>
-        <p:txBody>
-          <a:bodyPr wrap="none" rtlCol="0">
-            <a:spAutoFit/>
-          </a:bodyPr>
-          <a:p>
-            <a:pPr algn="l"/>
-            <a:r>
-              <a:rPr lang="en-US" altLang="zh-CN" sz="6000">
-                <a:solidFill>
-                  <a:srgbClr val="846749"/>
-                </a:solidFill>
-                <a:latin typeface="思源宋体 CN Heavy" panose="02020900000000000000" charset="-122"/>
-                <a:ea typeface="思源宋体 CN Heavy" panose="02020900000000000000" charset="-122"/>
-                <a:cs typeface="HarmonyOS Sans SC Medium" panose="00000600000000000000" charset="-122"/>
-              </a:rPr>
-              <a:t>Chapter 3</a:t>
-            </a:r>
-            <a:endParaRPr lang="en-US" altLang="zh-CN" sz="6000">
-              <a:solidFill>
-                <a:srgbClr val="846749"/>
-              </a:solidFill>
-              <a:latin typeface="思源宋体 CN Heavy" panose="02020900000000000000" charset="-122"/>
-              <a:ea typeface="思源宋体 CN Heavy" panose="02020900000000000000" charset="-122"/>
-              <a:cs typeface="HarmonyOS Sans SC Medium" panose="00000600000000000000" charset="-122"/>
-            </a:endParaRPr>
-          </a:p>
-        </p:txBody>
-      </p:sp>
-      <p:sp>
-        <p:nvSpPr>
-          <p:cNvPr id="32" name="稻壳夜秋https://www.docer.com/works?userid=555357443"/>
-          <p:cNvSpPr txBox="1"/>
-          <p:nvPr/>
-        </p:nvSpPr>
-        <p:spPr>
-          <a:xfrm>
-            <a:off x="4350385" y="3803650"/>
-            <a:ext cx="3632835" cy="460375"/>
-          </a:xfrm>
-          <a:prstGeom prst="rect">
-            <a:avLst/>
-          </a:prstGeom>
-          <a:noFill/>
-        </p:spPr>
-        <p:txBody>
-          <a:bodyPr wrap="square" rtlCol="0">
-            <a:spAutoFit/>
-          </a:bodyPr>
-          <a:p>
-            <a:pPr algn="ctr"/>
-            <a:r>
-              <a:rPr lang="en-US" altLang="zh-CN" sz="2400">
-                <a:solidFill>
-                  <a:srgbClr val="846749"/>
-                </a:solidFill>
-                <a:latin typeface="HarmonyOS Sans SC Medium" panose="00000600000000000000" charset="-122"/>
-                <a:ea typeface="HarmonyOS Sans SC Medium" panose="00000600000000000000" charset="-122"/>
-                <a:cs typeface="HarmonyOS Sans SC Medium" panose="00000600000000000000" charset="-122"/>
-                <a:sym typeface="+mn-ea"/>
-              </a:rPr>
-              <a:t>Test Design</a:t>
-            </a:r>
-            <a:endParaRPr lang="en-US" altLang="zh-CN" sz="2400">
-              <a:solidFill>
-                <a:srgbClr val="846749"/>
-              </a:solidFill>
-              <a:latin typeface="HarmonyOS Sans SC Medium" panose="00000600000000000000" charset="-122"/>
-              <a:ea typeface="HarmonyOS Sans SC Medium" panose="00000600000000000000" charset="-122"/>
-              <a:cs typeface="HarmonyOS Sans SC Medium" panose="00000600000000000000" charset="-122"/>
-              <a:sym typeface="+mn-ea"/>
-            </a:endParaRPr>
-          </a:p>
-        </p:txBody>
-      </p:sp>
-      <p:sp>
-        <p:nvSpPr>
-          <p:cNvPr id="7" name="椭圆 6"/>
-          <p:cNvSpPr/>
-          <p:nvPr/>
-        </p:nvSpPr>
-        <p:spPr>
-          <a:xfrm>
-            <a:off x="3713480" y="1079500"/>
-            <a:ext cx="4826000" cy="4826000"/>
-          </a:xfrm>
-          <a:prstGeom prst="ellipse">
-            <a:avLst/>
-          </a:prstGeom>
-          <a:noFill/>
-          <a:ln>
-            <a:solidFill>
-              <a:srgbClr val="846749">
-                <a:alpha val="14000"/>
-              </a:srgbClr>
-            </a:solidFill>
-          </a:ln>
-        </p:spPr>
-        <p:style>
-          <a:lnRef idx="2">
-            <a:schemeClr val="accent1">
-              <a:shade val="50000"/>
-            </a:schemeClr>
-          </a:lnRef>
-          <a:fillRef idx="1">
-            <a:schemeClr val="accent1"/>
-          </a:fillRef>
-          <a:effectRef idx="0">
-            <a:schemeClr val="accent1"/>
-          </a:effectRef>
-          <a:fontRef idx="minor">
-            <a:schemeClr val="lt1"/>
-          </a:fontRef>
-        </p:style>
-        <p:txBody>
-          <a:bodyPr rtlCol="0" anchor="ctr"/>
-          <a:p>
-            <a:pPr algn="ctr"/>
-            <a:endParaRPr lang="zh-CN" altLang="en-US">
-              <a:cs typeface="HarmonyOS Sans SC Medium" panose="00000600000000000000" charset="-122"/>
-            </a:endParaRPr>
-          </a:p>
-        </p:txBody>
-      </p:sp>
-    </p:spTree>
-    <p:custDataLst>
-      <p:tags r:id="rId2"/>
-    </p:custDataLst>
-  </p:cSld>
-  <p:clrMapOvr>
-    <a:masterClrMapping/>
-  </p:clrMapOvr>
-  <p:timing>
-    <p:tnLst>
-      <p:par>
-        <p:cTn id="1" dur="indefinite" restart="never" nodeType="tmRoot"/>
-      </p:par>
-    </p:tnLst>
-  </p:timing>
-</p:sld>
-</file>
-
-<file path=ppt/slides/slide11.xml><?xml version="1.0" encoding="utf-8"?>
-<p:sld xmlns:a="http://schemas.openxmlformats.org/drawingml/2006/main" xmlns:r="http://schemas.openxmlformats.org/officeDocument/2006/relationships" xmlns:p="http://schemas.openxmlformats.org/presentationml/2006/main">
-  <p:cSld>
-    <p:bg>
-      <p:bgPr>
-        <a:noFill/>
-        <a:effectLst/>
-      </p:bgPr>
-    </p:bg>
-    <p:spTree>
-      <p:nvGrpSpPr>
-        <p:cNvPr id="1" name=""/>
-        <p:cNvGrpSpPr/>
-        <p:nvPr/>
-      </p:nvGrpSpPr>
-      <p:grpSpPr/>
-      <p:pic>
-        <p:nvPicPr>
           <p:cNvPr id="2" name="图片 1" descr="q2"/>
           <p:cNvPicPr>
             <a:picLocks noChangeAspect="1"/>
@@ -4516,6 +4274,423 @@
 </p:sld>
 </file>
 
+<file path=ppt/slides/slide11.xml><?xml version="1.0" encoding="utf-8"?>
+<p:sld xmlns:a="http://schemas.openxmlformats.org/drawingml/2006/main" xmlns:r="http://schemas.openxmlformats.org/officeDocument/2006/relationships" xmlns:p="http://schemas.openxmlformats.org/presentationml/2006/main">
+  <p:cSld>
+    <p:bg>
+      <p:bgPr>
+        <a:noFill/>
+        <a:effectLst/>
+      </p:bgPr>
+    </p:bg>
+    <p:spTree>
+      <p:nvGrpSpPr>
+        <p:cNvPr id="1" name=""/>
+        <p:cNvGrpSpPr/>
+        <p:nvPr/>
+      </p:nvGrpSpPr>
+      <p:grpSpPr/>
+      <p:pic>
+        <p:nvPicPr>
+          <p:cNvPr id="2" name="图片 1" descr="q2"/>
+          <p:cNvPicPr>
+            <a:picLocks noChangeAspect="1"/>
+          </p:cNvPicPr>
+          <p:nvPr/>
+        </p:nvPicPr>
+        <p:blipFill>
+          <a:blip r:embed="rId1"/>
+          <a:stretch>
+            <a:fillRect/>
+          </a:stretch>
+        </p:blipFill>
+        <p:spPr>
+          <a:xfrm>
+            <a:off x="0" y="0"/>
+            <a:ext cx="12192000" cy="6858000"/>
+          </a:xfrm>
+          <a:prstGeom prst="rect">
+            <a:avLst/>
+          </a:prstGeom>
+        </p:spPr>
+      </p:pic>
+      <p:sp>
+        <p:nvSpPr>
+          <p:cNvPr id="32" name="稻壳夜秋https://www.docer.com/works?userid=555357443"/>
+          <p:cNvSpPr txBox="1"/>
+          <p:nvPr/>
+        </p:nvSpPr>
+        <p:spPr>
+          <a:xfrm>
+            <a:off x="1485900" y="440690"/>
+            <a:ext cx="8406130" cy="583565"/>
+          </a:xfrm>
+          <a:prstGeom prst="rect">
+            <a:avLst/>
+          </a:prstGeom>
+          <a:noFill/>
+        </p:spPr>
+        <p:txBody>
+          <a:bodyPr wrap="square" rtlCol="0">
+            <a:spAutoFit/>
+          </a:bodyPr>
+          <a:p>
+            <a:pPr algn="l">
+              <a:buClrTx/>
+              <a:buSzTx/>
+              <a:buFontTx/>
+            </a:pPr>
+            <a:r>
+              <a:rPr lang="en-US" altLang="zh-CN" sz="3200">
+                <a:solidFill>
+                  <a:srgbClr val="846749"/>
+                </a:solidFill>
+                <a:latin typeface="HarmonyOS Sans SC Medium" panose="00000600000000000000" charset="-122"/>
+                <a:ea typeface="HarmonyOS Sans SC Medium" panose="00000600000000000000" charset="-122"/>
+                <a:cs typeface="HarmonyOS Sans SC Medium" panose="00000600000000000000" charset="-122"/>
+                <a:sym typeface="+mn-ea"/>
+              </a:rPr>
+              <a:t>Test Design —— </a:t>
+            </a:r>
+            <a:r>
+              <a:rPr lang="en-US" altLang="zh-CN" sz="3200">
+                <a:solidFill>
+                  <a:srgbClr val="846749"/>
+                </a:solidFill>
+                <a:latin typeface="HarmonyOS Sans SC Medium" panose="00000600000000000000" charset="-122"/>
+                <a:ea typeface="HarmonyOS Sans SC Medium" panose="00000600000000000000" charset="-122"/>
+                <a:cs typeface="HarmonyOS Sans SC Medium" panose="00000600000000000000" charset="-122"/>
+                <a:sym typeface="+mn-ea"/>
+              </a:rPr>
+              <a:t>White-Box </a:t>
+            </a:r>
+            <a:r>
+              <a:rPr lang="en-US" altLang="zh-CN" sz="3200">
+                <a:solidFill>
+                  <a:srgbClr val="846749"/>
+                </a:solidFill>
+                <a:latin typeface="HarmonyOS Sans SC Medium" panose="00000600000000000000" charset="-122"/>
+                <a:ea typeface="HarmonyOS Sans SC Medium" panose="00000600000000000000" charset="-122"/>
+                <a:cs typeface="HarmonyOS Sans SC Medium" panose="00000600000000000000" charset="-122"/>
+                <a:sym typeface="+mn-ea"/>
+              </a:rPr>
+              <a:t>Test Design</a:t>
+            </a:r>
+            <a:endParaRPr lang="en-US" altLang="zh-CN" sz="3200">
+              <a:solidFill>
+                <a:srgbClr val="846749"/>
+              </a:solidFill>
+              <a:latin typeface="HarmonyOS Sans SC Medium" panose="00000600000000000000" charset="-122"/>
+              <a:ea typeface="HarmonyOS Sans SC Medium" panose="00000600000000000000" charset="-122"/>
+              <a:cs typeface="HarmonyOS Sans SC Medium" panose="00000600000000000000" charset="-122"/>
+              <a:sym typeface="+mn-ea"/>
+            </a:endParaRPr>
+          </a:p>
+        </p:txBody>
+      </p:sp>
+      <p:sp>
+        <p:nvSpPr>
+          <p:cNvPr id="3" name="椭圆 2"/>
+          <p:cNvSpPr/>
+          <p:nvPr/>
+        </p:nvSpPr>
+        <p:spPr>
+          <a:xfrm>
+            <a:off x="704215" y="394335"/>
+            <a:ext cx="705485" cy="705485"/>
+          </a:xfrm>
+          <a:prstGeom prst="ellipse">
+            <a:avLst/>
+          </a:prstGeom>
+          <a:solidFill>
+            <a:srgbClr val="846749"/>
+          </a:solidFill>
+          <a:ln>
+            <a:noFill/>
+          </a:ln>
+        </p:spPr>
+        <p:style>
+          <a:lnRef idx="2">
+            <a:schemeClr val="accent1">
+              <a:shade val="50000"/>
+            </a:schemeClr>
+          </a:lnRef>
+          <a:fillRef idx="1">
+            <a:schemeClr val="accent1"/>
+          </a:fillRef>
+          <a:effectRef idx="0">
+            <a:schemeClr val="accent1"/>
+          </a:effectRef>
+          <a:fontRef idx="minor">
+            <a:schemeClr val="lt1"/>
+          </a:fontRef>
+        </p:style>
+        <p:txBody>
+          <a:bodyPr rtlCol="0" anchor="ctr"/>
+          <a:p>
+            <a:pPr algn="ctr"/>
+            <a:endParaRPr lang="en-US" altLang="zh-CN" sz="2000">
+              <a:latin typeface="HarmonyOS Sans SC Medium" panose="00000600000000000000" charset="-122"/>
+              <a:ea typeface="HarmonyOS Sans SC Medium" panose="00000600000000000000" charset="-122"/>
+              <a:cs typeface="HarmonyOS Sans SC Medium" panose="00000600000000000000" charset="-122"/>
+            </a:endParaRPr>
+          </a:p>
+        </p:txBody>
+      </p:sp>
+      <p:sp>
+        <p:nvSpPr>
+          <p:cNvPr id="30" name="文本框 29"/>
+          <p:cNvSpPr txBox="1"/>
+          <p:nvPr/>
+        </p:nvSpPr>
+        <p:spPr>
+          <a:xfrm>
+            <a:off x="688975" y="434975"/>
+            <a:ext cx="731520" cy="645160"/>
+          </a:xfrm>
+          <a:prstGeom prst="rect">
+            <a:avLst/>
+          </a:prstGeom>
+          <a:noFill/>
+        </p:spPr>
+        <p:txBody>
+          <a:bodyPr wrap="none" rtlCol="0">
+            <a:spAutoFit/>
+          </a:bodyPr>
+          <a:p>
+            <a:r>
+              <a:rPr lang="en-US" altLang="zh-CN" sz="3600">
+                <a:solidFill>
+                  <a:schemeClr val="bg1"/>
+                </a:solidFill>
+                <a:cs typeface="HarmonyOS Sans SC Medium" panose="00000600000000000000" charset="-122"/>
+              </a:rPr>
+              <a:t>03</a:t>
+            </a:r>
+            <a:endParaRPr lang="en-US" altLang="zh-CN" sz="3600">
+              <a:solidFill>
+                <a:schemeClr val="bg1"/>
+              </a:solidFill>
+              <a:cs typeface="HarmonyOS Sans SC Medium" panose="00000600000000000000" charset="-122"/>
+            </a:endParaRPr>
+          </a:p>
+        </p:txBody>
+      </p:sp>
+      <p:sp>
+        <p:nvSpPr>
+          <p:cNvPr id="10" name="TextBox 11"/>
+          <p:cNvSpPr/>
+          <p:nvPr/>
+        </p:nvSpPr>
+        <p:spPr>
+          <a:xfrm>
+            <a:off x="555625" y="1553845"/>
+            <a:ext cx="5399405" cy="4292600"/>
+          </a:xfrm>
+          <a:prstGeom prst="rect">
+            <a:avLst/>
+          </a:prstGeom>
+          <a:noFill/>
+          <a:ln w="9525">
+            <a:noFill/>
+          </a:ln>
+        </p:spPr>
+        <p:txBody>
+          <a:bodyPr wrap="square">
+            <a:spAutoFit/>
+          </a:bodyPr>
+          <a:p>
+            <a:pPr algn="l" fontAlgn="auto">
+              <a:lnSpc>
+                <a:spcPct val="150000"/>
+              </a:lnSpc>
+              <a:buClr>
+                <a:srgbClr val="E36C09"/>
+              </a:buClr>
+              <a:buSzTx/>
+              <a:buFontTx/>
+            </a:pPr>
+            <a:r>
+              <a:rPr lang="en-US" altLang="zh-CN" sz="1400" dirty="0">
+                <a:solidFill>
+                  <a:srgbClr val="846749"/>
+                </a:solidFill>
+                <a:latin typeface="HarmonyOS Sans SC Medium" panose="00000600000000000000" charset="-122"/>
+                <a:ea typeface="HarmonyOS Sans SC Medium" panose="00000600000000000000" charset="-122"/>
+                <a:cs typeface="HarmonyOS Sans SC Medium" panose="00000600000000000000" charset="-122"/>
+                <a:sym typeface="HarmonyOS Sans SC Medium" panose="00000600000000000000" charset="-122"/>
+              </a:rPr>
+              <a:t>White-box testing designs tests using knowledge of the system’s internal structure rather than relying only on input-output behaviour. Instead of checking whether functionality works externally, it focuses on verifying internal logic, execution paths, and state changes inside the implementation.</a:t>
+            </a:r>
+            <a:endParaRPr lang="en-US" altLang="zh-CN" sz="1400" dirty="0">
+              <a:solidFill>
+                <a:srgbClr val="846749"/>
+              </a:solidFill>
+              <a:latin typeface="HarmonyOS Sans SC Medium" panose="00000600000000000000" charset="-122"/>
+              <a:ea typeface="HarmonyOS Sans SC Medium" panose="00000600000000000000" charset="-122"/>
+              <a:cs typeface="HarmonyOS Sans SC Medium" panose="00000600000000000000" charset="-122"/>
+              <a:sym typeface="HarmonyOS Sans SC Medium" panose="00000600000000000000" charset="-122"/>
+            </a:endParaRPr>
+          </a:p>
+          <a:p>
+            <a:pPr algn="l" fontAlgn="auto">
+              <a:lnSpc>
+                <a:spcPct val="150000"/>
+              </a:lnSpc>
+              <a:buClr>
+                <a:srgbClr val="E36C09"/>
+              </a:buClr>
+              <a:buSzTx/>
+              <a:buFontTx/>
+            </a:pPr>
+            <a:endParaRPr lang="en-US" altLang="zh-CN" sz="1400" dirty="0">
+              <a:solidFill>
+                <a:srgbClr val="846749"/>
+              </a:solidFill>
+              <a:latin typeface="HarmonyOS Sans SC Medium" panose="00000600000000000000" charset="-122"/>
+              <a:ea typeface="HarmonyOS Sans SC Medium" panose="00000600000000000000" charset="-122"/>
+              <a:cs typeface="HarmonyOS Sans SC Medium" panose="00000600000000000000" charset="-122"/>
+              <a:sym typeface="HarmonyOS Sans SC Medium" panose="00000600000000000000" charset="-122"/>
+            </a:endParaRPr>
+          </a:p>
+          <a:p>
+            <a:pPr algn="l" fontAlgn="auto">
+              <a:lnSpc>
+                <a:spcPct val="150000"/>
+              </a:lnSpc>
+              <a:buClr>
+                <a:srgbClr val="E36C09"/>
+              </a:buClr>
+              <a:buSzTx/>
+              <a:buFontTx/>
+            </a:pPr>
+            <a:r>
+              <a:rPr lang="en-US" altLang="zh-CN" sz="1400" dirty="0">
+                <a:solidFill>
+                  <a:srgbClr val="846749"/>
+                </a:solidFill>
+                <a:latin typeface="HarmonyOS Sans SC Medium" panose="00000600000000000000" charset="-122"/>
+                <a:ea typeface="HarmonyOS Sans SC Medium" panose="00000600000000000000" charset="-122"/>
+                <a:cs typeface="HarmonyOS Sans SC Medium" panose="00000600000000000000" charset="-122"/>
+                <a:sym typeface="HarmonyOS Sans SC Medium" panose="00000600000000000000" charset="-122"/>
+              </a:rPr>
+              <a:t>Some behaviours cannot be validated using isolated inputs alone because correctness depends on previous operations and current system state. Order processing is one such example: the validity of an action depends on the order’s existing status. In this example,completed and cancelled are terminal states and therefore should reject further status changes. </a:t>
+            </a:r>
+            <a:endParaRPr lang="en-US" altLang="zh-CN" sz="1400" dirty="0">
+              <a:solidFill>
+                <a:srgbClr val="846749"/>
+              </a:solidFill>
+              <a:latin typeface="HarmonyOS Sans SC Medium" panose="00000600000000000000" charset="-122"/>
+              <a:ea typeface="HarmonyOS Sans SC Medium" panose="00000600000000000000" charset="-122"/>
+              <a:cs typeface="HarmonyOS Sans SC Medium" panose="00000600000000000000" charset="-122"/>
+              <a:sym typeface="HarmonyOS Sans SC Medium" panose="00000600000000000000" charset="-122"/>
+            </a:endParaRPr>
+          </a:p>
+        </p:txBody>
+      </p:sp>
+      <p:pic>
+        <p:nvPicPr>
+          <p:cNvPr id="4" name="图片 3" descr="截屏2026-05-30 15.53.58"/>
+          <p:cNvPicPr>
+            <a:picLocks noChangeAspect="1"/>
+          </p:cNvPicPr>
+          <p:nvPr/>
+        </p:nvPicPr>
+        <p:blipFill>
+          <a:blip r:embed="rId2"/>
+          <a:stretch>
+            <a:fillRect/>
+          </a:stretch>
+        </p:blipFill>
+        <p:spPr>
+          <a:xfrm>
+            <a:off x="6323965" y="2797175"/>
+            <a:ext cx="5400040" cy="1263650"/>
+          </a:xfrm>
+          <a:prstGeom prst="rect">
+            <a:avLst/>
+          </a:prstGeom>
+        </p:spPr>
+      </p:pic>
+      <p:sp>
+        <p:nvSpPr>
+          <p:cNvPr id="5" name="文本框 4"/>
+          <p:cNvSpPr txBox="1"/>
+          <p:nvPr/>
+        </p:nvSpPr>
+        <p:spPr>
+          <a:xfrm>
+            <a:off x="7774305" y="4180205"/>
+            <a:ext cx="2724150" cy="368300"/>
+          </a:xfrm>
+          <a:prstGeom prst="rect">
+            <a:avLst/>
+          </a:prstGeom>
+        </p:spPr>
+        <p:txBody>
+          <a:bodyPr wrap="square">
+            <a:spAutoFit/>
+          </a:bodyPr>
+          <a:p>
+            <a:pPr algn="ctr">
+              <a:lnSpc>
+                <a:spcPct val="100000"/>
+              </a:lnSpc>
+              <a:buClrTx/>
+              <a:buSzTx/>
+              <a:buFontTx/>
+            </a:pPr>
+            <a:r>
+              <a:rPr lang="en-US" altLang="zh-CN" b="0">
+                <a:solidFill>
+                  <a:srgbClr val="846749"/>
+                </a:solidFill>
+                <a:latin typeface="HarmonyOS Sans SC Medium" panose="00000600000000000000" charset="-122"/>
+                <a:ea typeface="HarmonyOS Sans SC Medium" panose="00000600000000000000" charset="-122"/>
+                <a:cs typeface="HarmonyOS Sans SC Medium" panose="00000600000000000000" charset="-122"/>
+              </a:rPr>
+              <a:t>Order Status Machin</a:t>
+            </a:r>
+            <a:r>
+              <a:rPr lang="en-US" altLang="zh-CN" b="0">
+                <a:solidFill>
+                  <a:srgbClr val="846749"/>
+                </a:solidFill>
+                <a:latin typeface="HarmonyOS Sans SC Medium" panose="00000600000000000000" charset="-122"/>
+                <a:ea typeface="HarmonyOS Sans SC Medium" panose="00000600000000000000" charset="-122"/>
+                <a:cs typeface="HarmonyOS Sans SC Medium" panose="00000600000000000000" charset="-122"/>
+              </a:rPr>
+              <a:t>e</a:t>
+            </a:r>
+            <a:endParaRPr lang="en-US" altLang="zh-CN" b="0">
+              <a:solidFill>
+                <a:srgbClr val="846749"/>
+              </a:solidFill>
+              <a:latin typeface="HarmonyOS Sans SC Medium" panose="00000600000000000000" charset="-122"/>
+              <a:ea typeface="HarmonyOS Sans SC Medium" panose="00000600000000000000" charset="-122"/>
+              <a:cs typeface="HarmonyOS Sans SC Medium" panose="00000600000000000000" charset="-122"/>
+            </a:endParaRPr>
+          </a:p>
+        </p:txBody>
+      </p:sp>
+    </p:spTree>
+    <p:custDataLst>
+      <p:tags r:id="rId3"/>
+    </p:custDataLst>
+  </p:cSld>
+  <p:clrMapOvr>
+    <a:masterClrMapping/>
+  </p:clrMapOvr>
+  <p:timing>
+    <p:tnLst>
+      <p:par>
+        <p:cTn id="1" dur="indefinite" restart="never" nodeType="tmRoot"/>
+      </p:par>
+    </p:tnLst>
+  </p:timing>
+</p:sld>
+</file>
+
 <file path=ppt/slides/slide12.xml><?xml version="1.0" encoding="utf-8"?>
 <p:sld xmlns:a="http://schemas.openxmlformats.org/drawingml/2006/main" xmlns:r="http://schemas.openxmlformats.org/officeDocument/2006/relationships" xmlns:p="http://schemas.openxmlformats.org/presentationml/2006/main">
   <p:cSld>
@@ -4592,423 +4767,6 @@
                 <a:cs typeface="HarmonyOS Sans SC Medium" panose="00000600000000000000" charset="-122"/>
                 <a:sym typeface="+mn-ea"/>
               </a:rPr>
-              <a:t>Test Design —— </a:t>
-            </a:r>
-            <a:r>
-              <a:rPr lang="en-US" altLang="zh-CN" sz="3200">
-                <a:solidFill>
-                  <a:srgbClr val="846749"/>
-                </a:solidFill>
-                <a:latin typeface="HarmonyOS Sans SC Medium" panose="00000600000000000000" charset="-122"/>
-                <a:ea typeface="HarmonyOS Sans SC Medium" panose="00000600000000000000" charset="-122"/>
-                <a:cs typeface="HarmonyOS Sans SC Medium" panose="00000600000000000000" charset="-122"/>
-                <a:sym typeface="+mn-ea"/>
-              </a:rPr>
-              <a:t>White-Box </a:t>
-            </a:r>
-            <a:r>
-              <a:rPr lang="en-US" altLang="zh-CN" sz="3200">
-                <a:solidFill>
-                  <a:srgbClr val="846749"/>
-                </a:solidFill>
-                <a:latin typeface="HarmonyOS Sans SC Medium" panose="00000600000000000000" charset="-122"/>
-                <a:ea typeface="HarmonyOS Sans SC Medium" panose="00000600000000000000" charset="-122"/>
-                <a:cs typeface="HarmonyOS Sans SC Medium" panose="00000600000000000000" charset="-122"/>
-                <a:sym typeface="+mn-ea"/>
-              </a:rPr>
-              <a:t>Test Design</a:t>
-            </a:r>
-            <a:endParaRPr lang="en-US" altLang="zh-CN" sz="3200">
-              <a:solidFill>
-                <a:srgbClr val="846749"/>
-              </a:solidFill>
-              <a:latin typeface="HarmonyOS Sans SC Medium" panose="00000600000000000000" charset="-122"/>
-              <a:ea typeface="HarmonyOS Sans SC Medium" panose="00000600000000000000" charset="-122"/>
-              <a:cs typeface="HarmonyOS Sans SC Medium" panose="00000600000000000000" charset="-122"/>
-              <a:sym typeface="+mn-ea"/>
-            </a:endParaRPr>
-          </a:p>
-        </p:txBody>
-      </p:sp>
-      <p:sp>
-        <p:nvSpPr>
-          <p:cNvPr id="3" name="椭圆 2"/>
-          <p:cNvSpPr/>
-          <p:nvPr/>
-        </p:nvSpPr>
-        <p:spPr>
-          <a:xfrm>
-            <a:off x="704215" y="394335"/>
-            <a:ext cx="705485" cy="705485"/>
-          </a:xfrm>
-          <a:prstGeom prst="ellipse">
-            <a:avLst/>
-          </a:prstGeom>
-          <a:solidFill>
-            <a:srgbClr val="846749"/>
-          </a:solidFill>
-          <a:ln>
-            <a:noFill/>
-          </a:ln>
-        </p:spPr>
-        <p:style>
-          <a:lnRef idx="2">
-            <a:schemeClr val="accent1">
-              <a:shade val="50000"/>
-            </a:schemeClr>
-          </a:lnRef>
-          <a:fillRef idx="1">
-            <a:schemeClr val="accent1"/>
-          </a:fillRef>
-          <a:effectRef idx="0">
-            <a:schemeClr val="accent1"/>
-          </a:effectRef>
-          <a:fontRef idx="minor">
-            <a:schemeClr val="lt1"/>
-          </a:fontRef>
-        </p:style>
-        <p:txBody>
-          <a:bodyPr rtlCol="0" anchor="ctr"/>
-          <a:p>
-            <a:pPr algn="ctr"/>
-            <a:endParaRPr lang="en-US" altLang="zh-CN" sz="2000">
-              <a:latin typeface="HarmonyOS Sans SC Medium" panose="00000600000000000000" charset="-122"/>
-              <a:ea typeface="HarmonyOS Sans SC Medium" panose="00000600000000000000" charset="-122"/>
-              <a:cs typeface="HarmonyOS Sans SC Medium" panose="00000600000000000000" charset="-122"/>
-            </a:endParaRPr>
-          </a:p>
-        </p:txBody>
-      </p:sp>
-      <p:sp>
-        <p:nvSpPr>
-          <p:cNvPr id="30" name="文本框 29"/>
-          <p:cNvSpPr txBox="1"/>
-          <p:nvPr/>
-        </p:nvSpPr>
-        <p:spPr>
-          <a:xfrm>
-            <a:off x="688975" y="434975"/>
-            <a:ext cx="731520" cy="645160"/>
-          </a:xfrm>
-          <a:prstGeom prst="rect">
-            <a:avLst/>
-          </a:prstGeom>
-          <a:noFill/>
-        </p:spPr>
-        <p:txBody>
-          <a:bodyPr wrap="none" rtlCol="0">
-            <a:spAutoFit/>
-          </a:bodyPr>
-          <a:p>
-            <a:r>
-              <a:rPr lang="en-US" altLang="zh-CN" sz="3600">
-                <a:solidFill>
-                  <a:schemeClr val="bg1"/>
-                </a:solidFill>
-                <a:cs typeface="HarmonyOS Sans SC Medium" panose="00000600000000000000" charset="-122"/>
-              </a:rPr>
-              <a:t>03</a:t>
-            </a:r>
-            <a:endParaRPr lang="en-US" altLang="zh-CN" sz="3600">
-              <a:solidFill>
-                <a:schemeClr val="bg1"/>
-              </a:solidFill>
-              <a:cs typeface="HarmonyOS Sans SC Medium" panose="00000600000000000000" charset="-122"/>
-            </a:endParaRPr>
-          </a:p>
-        </p:txBody>
-      </p:sp>
-      <p:sp>
-        <p:nvSpPr>
-          <p:cNvPr id="10" name="TextBox 11"/>
-          <p:cNvSpPr/>
-          <p:nvPr/>
-        </p:nvSpPr>
-        <p:spPr>
-          <a:xfrm>
-            <a:off x="555625" y="1553845"/>
-            <a:ext cx="5399405" cy="4292600"/>
-          </a:xfrm>
-          <a:prstGeom prst="rect">
-            <a:avLst/>
-          </a:prstGeom>
-          <a:noFill/>
-          <a:ln w="9525">
-            <a:noFill/>
-          </a:ln>
-        </p:spPr>
-        <p:txBody>
-          <a:bodyPr wrap="square">
-            <a:spAutoFit/>
-          </a:bodyPr>
-          <a:p>
-            <a:pPr algn="l" fontAlgn="auto">
-              <a:lnSpc>
-                <a:spcPct val="150000"/>
-              </a:lnSpc>
-              <a:buClr>
-                <a:srgbClr val="E36C09"/>
-              </a:buClr>
-              <a:buSzTx/>
-              <a:buFontTx/>
-            </a:pPr>
-            <a:r>
-              <a:rPr lang="en-US" altLang="zh-CN" sz="1400" dirty="0">
-                <a:solidFill>
-                  <a:srgbClr val="846749"/>
-                </a:solidFill>
-                <a:latin typeface="HarmonyOS Sans SC Medium" panose="00000600000000000000" charset="-122"/>
-                <a:ea typeface="HarmonyOS Sans SC Medium" panose="00000600000000000000" charset="-122"/>
-                <a:cs typeface="HarmonyOS Sans SC Medium" panose="00000600000000000000" charset="-122"/>
-                <a:sym typeface="HarmonyOS Sans SC Medium" panose="00000600000000000000" charset="-122"/>
-              </a:rPr>
-              <a:t>White-box testing designs tests using knowledge of the system’s internal structure rather than relying only on input-output behaviour. Instead of checking whether functionality works externally, it focuses on verifying internal logic, execution paths, and state changes inside the implementation.</a:t>
-            </a:r>
-            <a:endParaRPr lang="en-US" altLang="zh-CN" sz="1400" dirty="0">
-              <a:solidFill>
-                <a:srgbClr val="846749"/>
-              </a:solidFill>
-              <a:latin typeface="HarmonyOS Sans SC Medium" panose="00000600000000000000" charset="-122"/>
-              <a:ea typeface="HarmonyOS Sans SC Medium" panose="00000600000000000000" charset="-122"/>
-              <a:cs typeface="HarmonyOS Sans SC Medium" panose="00000600000000000000" charset="-122"/>
-              <a:sym typeface="HarmonyOS Sans SC Medium" panose="00000600000000000000" charset="-122"/>
-            </a:endParaRPr>
-          </a:p>
-          <a:p>
-            <a:pPr algn="l" fontAlgn="auto">
-              <a:lnSpc>
-                <a:spcPct val="150000"/>
-              </a:lnSpc>
-              <a:buClr>
-                <a:srgbClr val="E36C09"/>
-              </a:buClr>
-              <a:buSzTx/>
-              <a:buFontTx/>
-            </a:pPr>
-            <a:endParaRPr lang="en-US" altLang="zh-CN" sz="1400" dirty="0">
-              <a:solidFill>
-                <a:srgbClr val="846749"/>
-              </a:solidFill>
-              <a:latin typeface="HarmonyOS Sans SC Medium" panose="00000600000000000000" charset="-122"/>
-              <a:ea typeface="HarmonyOS Sans SC Medium" panose="00000600000000000000" charset="-122"/>
-              <a:cs typeface="HarmonyOS Sans SC Medium" panose="00000600000000000000" charset="-122"/>
-              <a:sym typeface="HarmonyOS Sans SC Medium" panose="00000600000000000000" charset="-122"/>
-            </a:endParaRPr>
-          </a:p>
-          <a:p>
-            <a:pPr algn="l" fontAlgn="auto">
-              <a:lnSpc>
-                <a:spcPct val="150000"/>
-              </a:lnSpc>
-              <a:buClr>
-                <a:srgbClr val="E36C09"/>
-              </a:buClr>
-              <a:buSzTx/>
-              <a:buFontTx/>
-            </a:pPr>
-            <a:r>
-              <a:rPr lang="en-US" altLang="zh-CN" sz="1400" dirty="0">
-                <a:solidFill>
-                  <a:srgbClr val="846749"/>
-                </a:solidFill>
-                <a:latin typeface="HarmonyOS Sans SC Medium" panose="00000600000000000000" charset="-122"/>
-                <a:ea typeface="HarmonyOS Sans SC Medium" panose="00000600000000000000" charset="-122"/>
-                <a:cs typeface="HarmonyOS Sans SC Medium" panose="00000600000000000000" charset="-122"/>
-                <a:sym typeface="HarmonyOS Sans SC Medium" panose="00000600000000000000" charset="-122"/>
-              </a:rPr>
-              <a:t>Some behaviours cannot be validated using isolated inputs alone because correctness depends on previous operations and current system state. Order processing is one such example: the validity of an action depends on the order’s existing status. In this example,completed and cancelled are terminal states and therefore should reject further status changes. </a:t>
-            </a:r>
-            <a:endParaRPr lang="en-US" altLang="zh-CN" sz="1400" dirty="0">
-              <a:solidFill>
-                <a:srgbClr val="846749"/>
-              </a:solidFill>
-              <a:latin typeface="HarmonyOS Sans SC Medium" panose="00000600000000000000" charset="-122"/>
-              <a:ea typeface="HarmonyOS Sans SC Medium" panose="00000600000000000000" charset="-122"/>
-              <a:cs typeface="HarmonyOS Sans SC Medium" panose="00000600000000000000" charset="-122"/>
-              <a:sym typeface="HarmonyOS Sans SC Medium" panose="00000600000000000000" charset="-122"/>
-            </a:endParaRPr>
-          </a:p>
-        </p:txBody>
-      </p:sp>
-      <p:pic>
-        <p:nvPicPr>
-          <p:cNvPr id="4" name="图片 3" descr="截屏2026-05-30 15.53.58"/>
-          <p:cNvPicPr>
-            <a:picLocks noChangeAspect="1"/>
-          </p:cNvPicPr>
-          <p:nvPr/>
-        </p:nvPicPr>
-        <p:blipFill>
-          <a:blip r:embed="rId2"/>
-          <a:stretch>
-            <a:fillRect/>
-          </a:stretch>
-        </p:blipFill>
-        <p:spPr>
-          <a:xfrm>
-            <a:off x="6323965" y="2797175"/>
-            <a:ext cx="5400040" cy="1263650"/>
-          </a:xfrm>
-          <a:prstGeom prst="rect">
-            <a:avLst/>
-          </a:prstGeom>
-        </p:spPr>
-      </p:pic>
-      <p:sp>
-        <p:nvSpPr>
-          <p:cNvPr id="5" name="文本框 4"/>
-          <p:cNvSpPr txBox="1"/>
-          <p:nvPr/>
-        </p:nvSpPr>
-        <p:spPr>
-          <a:xfrm>
-            <a:off x="7774305" y="4180205"/>
-            <a:ext cx="2724150" cy="368300"/>
-          </a:xfrm>
-          <a:prstGeom prst="rect">
-            <a:avLst/>
-          </a:prstGeom>
-        </p:spPr>
-        <p:txBody>
-          <a:bodyPr wrap="square">
-            <a:spAutoFit/>
-          </a:bodyPr>
-          <a:p>
-            <a:pPr algn="ctr">
-              <a:lnSpc>
-                <a:spcPct val="100000"/>
-              </a:lnSpc>
-              <a:buClrTx/>
-              <a:buSzTx/>
-              <a:buFontTx/>
-            </a:pPr>
-            <a:r>
-              <a:rPr lang="en-US" altLang="zh-CN" b="0">
-                <a:solidFill>
-                  <a:srgbClr val="846749"/>
-                </a:solidFill>
-                <a:latin typeface="HarmonyOS Sans SC Medium" panose="00000600000000000000" charset="-122"/>
-                <a:ea typeface="HarmonyOS Sans SC Medium" panose="00000600000000000000" charset="-122"/>
-                <a:cs typeface="HarmonyOS Sans SC Medium" panose="00000600000000000000" charset="-122"/>
-              </a:rPr>
-              <a:t>Order Status Machin</a:t>
-            </a:r>
-            <a:r>
-              <a:rPr lang="en-US" altLang="zh-CN" b="0">
-                <a:solidFill>
-                  <a:srgbClr val="846749"/>
-                </a:solidFill>
-                <a:latin typeface="HarmonyOS Sans SC Medium" panose="00000600000000000000" charset="-122"/>
-                <a:ea typeface="HarmonyOS Sans SC Medium" panose="00000600000000000000" charset="-122"/>
-                <a:cs typeface="HarmonyOS Sans SC Medium" panose="00000600000000000000" charset="-122"/>
-              </a:rPr>
-              <a:t>e</a:t>
-            </a:r>
-            <a:endParaRPr lang="en-US" altLang="zh-CN" b="0">
-              <a:solidFill>
-                <a:srgbClr val="846749"/>
-              </a:solidFill>
-              <a:latin typeface="HarmonyOS Sans SC Medium" panose="00000600000000000000" charset="-122"/>
-              <a:ea typeface="HarmonyOS Sans SC Medium" panose="00000600000000000000" charset="-122"/>
-              <a:cs typeface="HarmonyOS Sans SC Medium" panose="00000600000000000000" charset="-122"/>
-            </a:endParaRPr>
-          </a:p>
-        </p:txBody>
-      </p:sp>
-    </p:spTree>
-    <p:custDataLst>
-      <p:tags r:id="rId3"/>
-    </p:custDataLst>
-  </p:cSld>
-  <p:clrMapOvr>
-    <a:masterClrMapping/>
-  </p:clrMapOvr>
-  <p:timing>
-    <p:tnLst>
-      <p:par>
-        <p:cTn id="1" dur="indefinite" restart="never" nodeType="tmRoot"/>
-      </p:par>
-    </p:tnLst>
-  </p:timing>
-</p:sld>
-</file>
-
-<file path=ppt/slides/slide13.xml><?xml version="1.0" encoding="utf-8"?>
-<p:sld xmlns:a="http://schemas.openxmlformats.org/drawingml/2006/main" xmlns:r="http://schemas.openxmlformats.org/officeDocument/2006/relationships" xmlns:p="http://schemas.openxmlformats.org/presentationml/2006/main">
-  <p:cSld>
-    <p:bg>
-      <p:bgPr>
-        <a:noFill/>
-        <a:effectLst/>
-      </p:bgPr>
-    </p:bg>
-    <p:spTree>
-      <p:nvGrpSpPr>
-        <p:cNvPr id="1" name=""/>
-        <p:cNvGrpSpPr/>
-        <p:nvPr/>
-      </p:nvGrpSpPr>
-      <p:grpSpPr/>
-      <p:pic>
-        <p:nvPicPr>
-          <p:cNvPr id="2" name="图片 1" descr="q2"/>
-          <p:cNvPicPr>
-            <a:picLocks noChangeAspect="1"/>
-          </p:cNvPicPr>
-          <p:nvPr/>
-        </p:nvPicPr>
-        <p:blipFill>
-          <a:blip r:embed="rId1"/>
-          <a:stretch>
-            <a:fillRect/>
-          </a:stretch>
-        </p:blipFill>
-        <p:spPr>
-          <a:xfrm>
-            <a:off x="0" y="0"/>
-            <a:ext cx="12192000" cy="6858000"/>
-          </a:xfrm>
-          <a:prstGeom prst="rect">
-            <a:avLst/>
-          </a:prstGeom>
-        </p:spPr>
-      </p:pic>
-      <p:sp>
-        <p:nvSpPr>
-          <p:cNvPr id="32" name="稻壳夜秋https://www.docer.com/works?userid=555357443"/>
-          <p:cNvSpPr txBox="1"/>
-          <p:nvPr/>
-        </p:nvSpPr>
-        <p:spPr>
-          <a:xfrm>
-            <a:off x="1485900" y="440690"/>
-            <a:ext cx="8406130" cy="583565"/>
-          </a:xfrm>
-          <a:prstGeom prst="rect">
-            <a:avLst/>
-          </a:prstGeom>
-          <a:noFill/>
-        </p:spPr>
-        <p:txBody>
-          <a:bodyPr wrap="square" rtlCol="0">
-            <a:spAutoFit/>
-          </a:bodyPr>
-          <a:p>
-            <a:pPr algn="l">
-              <a:buClrTx/>
-              <a:buSzTx/>
-              <a:buFontTx/>
-            </a:pPr>
-            <a:r>
-              <a:rPr lang="en-US" altLang="zh-CN" sz="3200">
-                <a:solidFill>
-                  <a:srgbClr val="846749"/>
-                </a:solidFill>
-                <a:latin typeface="HarmonyOS Sans SC Medium" panose="00000600000000000000" charset="-122"/>
-                <a:ea typeface="HarmonyOS Sans SC Medium" panose="00000600000000000000" charset="-122"/>
-                <a:cs typeface="HarmonyOS Sans SC Medium" panose="00000600000000000000" charset="-122"/>
-                <a:sym typeface="+mn-ea"/>
-              </a:rPr>
               <a:t>Test Design —— Oracle</a:t>
             </a:r>
             <a:endParaRPr lang="en-US" altLang="zh-CN" sz="3200">
@@ -5655,7 +5413,7 @@
 </p:sld>
 </file>
 
-<file path=ppt/slides/slide14.xml><?xml version="1.0" encoding="utf-8"?>
+<file path=ppt/slides/slide13.xml><?xml version="1.0" encoding="utf-8"?>
 <p:sld xmlns:a="http://schemas.openxmlformats.org/drawingml/2006/main" xmlns:r="http://schemas.openxmlformats.org/officeDocument/2006/relationships" xmlns:p="http://schemas.openxmlformats.org/presentationml/2006/main">
   <p:cSld>
     <p:bg>
@@ -6234,7 +5992,7 @@
                 <a:ea typeface="HarmonyOS Sans SC Medium" panose="00000600000000000000" charset="-122"/>
                 <a:cs typeface="HarmonyOS Sans SC Medium" panose="00000600000000000000" charset="-122"/>
               </a:rPr>
-              <a:t>Low: 1–3，</a:t>
+              <a:t>Low: 1–3,</a:t>
             </a:r>
             <a:endParaRPr lang="en-US" altLang="zh-CN" sz="1200" dirty="0">
               <a:solidFill>
@@ -6264,7 +6022,7 @@
                 <a:ea typeface="HarmonyOS Sans SC Medium" panose="00000600000000000000" charset="-122"/>
                 <a:cs typeface="HarmonyOS Sans SC Medium" panose="00000600000000000000" charset="-122"/>
               </a:rPr>
-              <a:t>Medium: 4–7，</a:t>
+              <a:t>Medium: 4–7,</a:t>
             </a:r>
             <a:endParaRPr lang="en-US" altLang="zh-CN" sz="1200" dirty="0">
               <a:solidFill>
@@ -6294,7 +6052,7 @@
                 <a:ea typeface="HarmonyOS Sans SC Medium" panose="00000600000000000000" charset="-122"/>
                 <a:cs typeface="HarmonyOS Sans SC Medium" panose="00000600000000000000" charset="-122"/>
               </a:rPr>
-              <a:t>High: 8–10.</a:t>
+              <a:t>High: 8–10..</a:t>
             </a:r>
             <a:endParaRPr lang="en-US" altLang="zh-CN" sz="1200" dirty="0">
               <a:solidFill>
@@ -6478,6 +6236,1038 @@
     </p:spTree>
     <p:custDataLst>
       <p:tags r:id="rId4"/>
+    </p:custDataLst>
+  </p:cSld>
+  <p:clrMapOvr>
+    <a:masterClrMapping/>
+  </p:clrMapOvr>
+  <p:timing>
+    <p:tnLst>
+      <p:par>
+        <p:cTn id="1" dur="indefinite" restart="never" nodeType="tmRoot"/>
+      </p:par>
+    </p:tnLst>
+  </p:timing>
+</p:sld>
+</file>
+
+<file path=ppt/slides/slide14.xml><?xml version="1.0" encoding="utf-8"?>
+<p:sld xmlns:a="http://schemas.openxmlformats.org/drawingml/2006/main" xmlns:r="http://schemas.openxmlformats.org/officeDocument/2006/relationships" xmlns:p="http://schemas.openxmlformats.org/presentationml/2006/main">
+  <p:cSld>
+    <p:bg>
+      <p:bgPr>
+        <a:noFill/>
+        <a:effectLst/>
+      </p:bgPr>
+    </p:bg>
+    <p:spTree>
+      <p:nvGrpSpPr>
+        <p:cNvPr id="1" name=""/>
+        <p:cNvGrpSpPr/>
+        <p:nvPr/>
+      </p:nvGrpSpPr>
+      <p:grpSpPr/>
+      <p:pic>
+        <p:nvPicPr>
+          <p:cNvPr id="2" name="图片 1" descr="q2"/>
+          <p:cNvPicPr>
+            <a:picLocks noChangeAspect="1"/>
+          </p:cNvPicPr>
+          <p:nvPr/>
+        </p:nvPicPr>
+        <p:blipFill>
+          <a:blip r:embed="rId1"/>
+          <a:stretch>
+            <a:fillRect/>
+          </a:stretch>
+        </p:blipFill>
+        <p:spPr>
+          <a:xfrm>
+            <a:off x="0" y="0"/>
+            <a:ext cx="12192000" cy="6858000"/>
+          </a:xfrm>
+          <a:prstGeom prst="rect">
+            <a:avLst/>
+          </a:prstGeom>
+        </p:spPr>
+      </p:pic>
+      <p:sp>
+        <p:nvSpPr>
+          <p:cNvPr id="32" name="稻壳夜秋https://www.docer.com/works?userid=555357443"/>
+          <p:cNvSpPr txBox="1"/>
+          <p:nvPr/>
+        </p:nvSpPr>
+        <p:spPr>
+          <a:xfrm>
+            <a:off x="1485900" y="434340"/>
+            <a:ext cx="6769100" cy="583565"/>
+          </a:xfrm>
+          <a:prstGeom prst="rect">
+            <a:avLst/>
+          </a:prstGeom>
+          <a:noFill/>
+        </p:spPr>
+        <p:txBody>
+          <a:bodyPr wrap="square" rtlCol="0">
+            <a:spAutoFit/>
+          </a:bodyPr>
+          <a:p>
+            <a:r>
+              <a:rPr lang="en-US" altLang="zh-CN" sz="3200">
+                <a:solidFill>
+                  <a:srgbClr val="846749"/>
+                </a:solidFill>
+                <a:latin typeface="HarmonyOS Sans SC Medium" panose="00000600000000000000" charset="-122"/>
+                <a:ea typeface="HarmonyOS Sans SC Medium" panose="00000600000000000000" charset="-122"/>
+                <a:cs typeface="HarmonyOS Sans SC Medium" panose="00000600000000000000" charset="-122"/>
+                <a:sym typeface="+mn-ea"/>
+              </a:rPr>
+              <a:t>Test Design —— Optimisation</a:t>
+            </a:r>
+            <a:endParaRPr lang="en-US" altLang="zh-CN" sz="3200">
+              <a:solidFill>
+                <a:srgbClr val="846749"/>
+              </a:solidFill>
+              <a:latin typeface="HarmonyOS Sans SC Medium" panose="00000600000000000000" charset="-122"/>
+              <a:ea typeface="HarmonyOS Sans SC Medium" panose="00000600000000000000" charset="-122"/>
+              <a:cs typeface="HarmonyOS Sans SC Medium" panose="00000600000000000000" charset="-122"/>
+              <a:sym typeface="+mn-ea"/>
+            </a:endParaRPr>
+          </a:p>
+        </p:txBody>
+      </p:sp>
+      <p:sp>
+        <p:nvSpPr>
+          <p:cNvPr id="3" name="椭圆 2"/>
+          <p:cNvSpPr/>
+          <p:nvPr/>
+        </p:nvSpPr>
+        <p:spPr>
+          <a:xfrm>
+            <a:off x="704215" y="394335"/>
+            <a:ext cx="705485" cy="705485"/>
+          </a:xfrm>
+          <a:prstGeom prst="ellipse">
+            <a:avLst/>
+          </a:prstGeom>
+          <a:solidFill>
+            <a:srgbClr val="846749"/>
+          </a:solidFill>
+          <a:ln>
+            <a:noFill/>
+          </a:ln>
+        </p:spPr>
+        <p:style>
+          <a:lnRef idx="2">
+            <a:schemeClr val="accent1">
+              <a:shade val="50000"/>
+            </a:schemeClr>
+          </a:lnRef>
+          <a:fillRef idx="1">
+            <a:schemeClr val="accent1"/>
+          </a:fillRef>
+          <a:effectRef idx="0">
+            <a:schemeClr val="accent1"/>
+          </a:effectRef>
+          <a:fontRef idx="minor">
+            <a:schemeClr val="lt1"/>
+          </a:fontRef>
+        </p:style>
+        <p:txBody>
+          <a:bodyPr rtlCol="0" anchor="ctr"/>
+          <a:p>
+            <a:pPr algn="ctr"/>
+            <a:endParaRPr lang="en-US" altLang="zh-CN" sz="2000">
+              <a:latin typeface="HarmonyOS Sans SC Medium" panose="00000600000000000000" charset="-122"/>
+              <a:ea typeface="HarmonyOS Sans SC Medium" panose="00000600000000000000" charset="-122"/>
+              <a:cs typeface="HarmonyOS Sans SC Medium" panose="00000600000000000000" charset="-122"/>
+            </a:endParaRPr>
+          </a:p>
+        </p:txBody>
+      </p:sp>
+      <p:sp>
+        <p:nvSpPr>
+          <p:cNvPr id="30" name="文本框 29"/>
+          <p:cNvSpPr txBox="1"/>
+          <p:nvPr/>
+        </p:nvSpPr>
+        <p:spPr>
+          <a:xfrm>
+            <a:off x="692785" y="434340"/>
+            <a:ext cx="731520" cy="645160"/>
+          </a:xfrm>
+          <a:prstGeom prst="rect">
+            <a:avLst/>
+          </a:prstGeom>
+          <a:noFill/>
+        </p:spPr>
+        <p:txBody>
+          <a:bodyPr wrap="none" rtlCol="0">
+            <a:spAutoFit/>
+          </a:bodyPr>
+          <a:p>
+            <a:r>
+              <a:rPr lang="en-US" altLang="zh-CN" sz="3600">
+                <a:solidFill>
+                  <a:schemeClr val="bg1"/>
+                </a:solidFill>
+                <a:cs typeface="HarmonyOS Sans SC Medium" panose="00000600000000000000" charset="-122"/>
+              </a:rPr>
+              <a:t>03</a:t>
+            </a:r>
+            <a:endParaRPr lang="en-US" altLang="zh-CN" sz="3600">
+              <a:solidFill>
+                <a:schemeClr val="bg1"/>
+              </a:solidFill>
+              <a:cs typeface="HarmonyOS Sans SC Medium" panose="00000600000000000000" charset="-122"/>
+            </a:endParaRPr>
+          </a:p>
+        </p:txBody>
+      </p:sp>
+      <p:sp>
+        <p:nvSpPr>
+          <p:cNvPr id="5" name="文本框 4"/>
+          <p:cNvSpPr txBox="1"/>
+          <p:nvPr/>
+        </p:nvSpPr>
+        <p:spPr>
+          <a:xfrm>
+            <a:off x="624840" y="1412875"/>
+            <a:ext cx="2147570" cy="460375"/>
+          </a:xfrm>
+          <a:prstGeom prst="rect">
+            <a:avLst/>
+          </a:prstGeom>
+          <a:noFill/>
+        </p:spPr>
+        <p:txBody>
+          <a:bodyPr wrap="none" rtlCol="0" anchor="t">
+            <a:spAutoFit/>
+          </a:bodyPr>
+          <a:p>
+            <a:pPr algn="ctr"/>
+            <a:r>
+              <a:rPr lang="en-US" altLang="zh-CN" sz="2400">
+                <a:solidFill>
+                  <a:srgbClr val="846749"/>
+                </a:solidFill>
+                <a:latin typeface="HarmonyOS Sans SC Medium" panose="00000600000000000000" charset="-122"/>
+                <a:ea typeface="HarmonyOS Sans SC Medium" panose="00000600000000000000" charset="-122"/>
+                <a:cs typeface="HarmonyOS Sans SC Medium" panose="00000600000000000000" charset="-122"/>
+                <a:sym typeface="+mn-ea"/>
+              </a:rPr>
+              <a:t>Why Optimise</a:t>
+            </a:r>
+            <a:endParaRPr lang="en-US" altLang="zh-CN" sz="2400">
+              <a:solidFill>
+                <a:srgbClr val="846749"/>
+              </a:solidFill>
+              <a:latin typeface="HarmonyOS Sans SC Medium" panose="00000600000000000000" charset="-122"/>
+              <a:ea typeface="HarmonyOS Sans SC Medium" panose="00000600000000000000" charset="-122"/>
+              <a:cs typeface="HarmonyOS Sans SC Medium" panose="00000600000000000000" charset="-122"/>
+              <a:sym typeface="+mn-ea"/>
+            </a:endParaRPr>
+          </a:p>
+        </p:txBody>
+      </p:sp>
+      <p:sp>
+        <p:nvSpPr>
+          <p:cNvPr id="8206" name="TextBox 11"/>
+          <p:cNvSpPr/>
+          <p:nvPr/>
+        </p:nvSpPr>
+        <p:spPr>
+          <a:xfrm>
+            <a:off x="692785" y="1979930"/>
+            <a:ext cx="6584315" cy="975995"/>
+          </a:xfrm>
+          <a:prstGeom prst="rect">
+            <a:avLst/>
+          </a:prstGeom>
+          <a:noFill/>
+          <a:ln w="9525">
+            <a:noFill/>
+          </a:ln>
+        </p:spPr>
+        <p:txBody>
+          <a:bodyPr wrap="square">
+            <a:spAutoFit/>
+          </a:bodyPr>
+          <a:p>
+            <a:pPr>
+              <a:lnSpc>
+                <a:spcPct val="160000"/>
+              </a:lnSpc>
+            </a:pPr>
+            <a:r>
+              <a:rPr lang="en-US" altLang="zh-CN" sz="1200" dirty="0">
+                <a:solidFill>
+                  <a:srgbClr val="846749"/>
+                </a:solidFill>
+                <a:latin typeface="HarmonyOS Sans SC Medium" panose="00000600000000000000" charset="-122"/>
+                <a:ea typeface="HarmonyOS Sans SC Medium" panose="00000600000000000000" charset="-122"/>
+                <a:cs typeface="HarmonyOS Sans SC Medium" panose="00000600000000000000" charset="-122"/>
+                <a:sym typeface="HarmonyOS Sans SC Medium" panose="00000600000000000000" charset="-122"/>
+              </a:rPr>
+              <a:t>Generated test suites may contain redundant cases that increase execution cost without improving coverage. Optimisation reduces unnecessary cases while preserving risk coverage and fault-detection capability.</a:t>
+            </a:r>
+            <a:endParaRPr lang="en-US" altLang="zh-CN" sz="1200" dirty="0">
+              <a:solidFill>
+                <a:srgbClr val="846749"/>
+              </a:solidFill>
+              <a:latin typeface="HarmonyOS Sans SC Medium" panose="00000600000000000000" charset="-122"/>
+              <a:ea typeface="HarmonyOS Sans SC Medium" panose="00000600000000000000" charset="-122"/>
+              <a:cs typeface="HarmonyOS Sans SC Medium" panose="00000600000000000000" charset="-122"/>
+              <a:sym typeface="HarmonyOS Sans SC Medium" panose="00000600000000000000" charset="-122"/>
+            </a:endParaRPr>
+          </a:p>
+        </p:txBody>
+      </p:sp>
+      <p:sp>
+        <p:nvSpPr>
+          <p:cNvPr id="9" name="文本框 8"/>
+          <p:cNvSpPr txBox="1"/>
+          <p:nvPr/>
+        </p:nvSpPr>
+        <p:spPr>
+          <a:xfrm>
+            <a:off x="624840" y="3137853"/>
+            <a:ext cx="5080000" cy="460375"/>
+          </a:xfrm>
+          <a:prstGeom prst="rect">
+            <a:avLst/>
+          </a:prstGeom>
+        </p:spPr>
+        <p:txBody>
+          <a:bodyPr>
+            <a:spAutoFit/>
+          </a:bodyPr>
+          <a:p>
+            <a:pPr>
+              <a:spcAft>
+                <a:spcPct val="60000"/>
+              </a:spcAft>
+            </a:pPr>
+            <a:r>
+              <a:rPr lang="en-US" altLang="zh-CN" sz="2400">
+                <a:solidFill>
+                  <a:srgbClr val="846749"/>
+                </a:solidFill>
+                <a:latin typeface="HarmonyOS Sans SC Medium" panose="00000600000000000000" charset="-122"/>
+                <a:ea typeface="HarmonyOS Sans SC Medium" panose="00000600000000000000" charset="-122"/>
+                <a:cs typeface="HarmonyOS Sans SC Medium" panose="00000600000000000000" charset="-122"/>
+              </a:rPr>
+              <a:t>Two-Stage Optimisation Strategy</a:t>
+            </a:r>
+            <a:endParaRPr lang="en-US" altLang="zh-CN" sz="2400">
+              <a:solidFill>
+                <a:srgbClr val="846749"/>
+              </a:solidFill>
+              <a:latin typeface="HarmonyOS Sans SC Medium" panose="00000600000000000000" charset="-122"/>
+              <a:ea typeface="HarmonyOS Sans SC Medium" panose="00000600000000000000" charset="-122"/>
+              <a:cs typeface="HarmonyOS Sans SC Medium" panose="00000600000000000000" charset="-122"/>
+            </a:endParaRPr>
+          </a:p>
+        </p:txBody>
+      </p:sp>
+      <p:sp>
+        <p:nvSpPr>
+          <p:cNvPr id="25" name="TextBox 11"/>
+          <p:cNvSpPr/>
+          <p:nvPr/>
+        </p:nvSpPr>
+        <p:spPr>
+          <a:xfrm>
+            <a:off x="704215" y="3780790"/>
+            <a:ext cx="6573520" cy="2656205"/>
+          </a:xfrm>
+          <a:prstGeom prst="rect">
+            <a:avLst/>
+          </a:prstGeom>
+          <a:noFill/>
+          <a:ln w="9525">
+            <a:noFill/>
+          </a:ln>
+        </p:spPr>
+        <p:txBody>
+          <a:bodyPr wrap="square">
+            <a:spAutoFit/>
+          </a:bodyPr>
+          <a:p>
+            <a:pPr algn="l" fontAlgn="auto">
+              <a:lnSpc>
+                <a:spcPts val="2000"/>
+              </a:lnSpc>
+              <a:buClrTx/>
+              <a:buSzTx/>
+              <a:buFontTx/>
+            </a:pPr>
+            <a:r>
+              <a:rPr lang="en-US" altLang="zh-CN" sz="1200" b="1" dirty="0">
+                <a:solidFill>
+                  <a:srgbClr val="846749"/>
+                </a:solidFill>
+                <a:latin typeface="HarmonyOS Sans SC Medium" panose="00000600000000000000" charset="-122"/>
+                <a:ea typeface="HarmonyOS Sans SC Medium" panose="00000600000000000000" charset="-122"/>
+                <a:cs typeface="HarmonyOS Sans SC Medium" panose="00000600000000000000" charset="-122"/>
+                <a:sym typeface="HarmonyOS Sans SC Medium" panose="00000600000000000000" charset="-122"/>
+              </a:rPr>
+              <a:t>Stage 1 — Prioritisation</a:t>
+            </a:r>
+            <a:endParaRPr lang="en-US" altLang="zh-CN" sz="1200" b="1" dirty="0">
+              <a:solidFill>
+                <a:srgbClr val="846749"/>
+              </a:solidFill>
+              <a:latin typeface="HarmonyOS Sans SC Medium" panose="00000600000000000000" charset="-122"/>
+              <a:ea typeface="HarmonyOS Sans SC Medium" panose="00000600000000000000" charset="-122"/>
+              <a:cs typeface="HarmonyOS Sans SC Medium" panose="00000600000000000000" charset="-122"/>
+              <a:sym typeface="HarmonyOS Sans SC Medium" panose="00000600000000000000" charset="-122"/>
+            </a:endParaRPr>
+          </a:p>
+          <a:p>
+            <a:pPr indent="0" fontAlgn="auto">
+              <a:lnSpc>
+                <a:spcPts val="1600"/>
+              </a:lnSpc>
+            </a:pPr>
+            <a:r>
+              <a:rPr lang="en-US" altLang="zh-CN" sz="1200" dirty="0">
+                <a:solidFill>
+                  <a:srgbClr val="846749"/>
+                </a:solidFill>
+                <a:latin typeface="HarmonyOS Sans SC Medium" panose="00000600000000000000" charset="-122"/>
+                <a:ea typeface="HarmonyOS Sans SC Medium" panose="00000600000000000000" charset="-122"/>
+                <a:cs typeface="HarmonyOS Sans SC Medium" panose="00000600000000000000" charset="-122"/>
+                <a:sym typeface="HarmonyOS Sans SC Medium" panose="00000600000000000000" charset="-122"/>
+              </a:rPr>
+              <a:t>Generated cases are first prioritised according to:</a:t>
+            </a:r>
+            <a:endParaRPr lang="en-US" altLang="zh-CN" sz="1200" dirty="0">
+              <a:solidFill>
+                <a:srgbClr val="846749"/>
+              </a:solidFill>
+              <a:latin typeface="HarmonyOS Sans SC Medium" panose="00000600000000000000" charset="-122"/>
+              <a:ea typeface="HarmonyOS Sans SC Medium" panose="00000600000000000000" charset="-122"/>
+              <a:cs typeface="HarmonyOS Sans SC Medium" panose="00000600000000000000" charset="-122"/>
+              <a:sym typeface="HarmonyOS Sans SC Medium" panose="00000600000000000000" charset="-122"/>
+            </a:endParaRPr>
+          </a:p>
+          <a:p>
+            <a:pPr marL="171450" indent="-171450" fontAlgn="auto">
+              <a:lnSpc>
+                <a:spcPts val="1600"/>
+              </a:lnSpc>
+              <a:buFont typeface="Arial" panose="020B0604020202090204" pitchFamily="34" charset="0"/>
+              <a:buChar char="•"/>
+            </a:pPr>
+            <a:r>
+              <a:rPr lang="en-US" altLang="zh-CN" sz="1200" dirty="0">
+                <a:solidFill>
+                  <a:srgbClr val="846749"/>
+                </a:solidFill>
+                <a:latin typeface="HarmonyOS Sans SC Medium" panose="00000600000000000000" charset="-122"/>
+                <a:ea typeface="HarmonyOS Sans SC Medium" panose="00000600000000000000" charset="-122"/>
+                <a:cs typeface="HarmonyOS Sans SC Medium" panose="00000600000000000000" charset="-122"/>
+                <a:sym typeface="HarmonyOS Sans SC Medium" panose="00000600000000000000" charset="-122"/>
+              </a:rPr>
+              <a:t>Risk level and risk score</a:t>
+            </a:r>
+            <a:endParaRPr lang="en-US" altLang="zh-CN" sz="1200" dirty="0">
+              <a:solidFill>
+                <a:srgbClr val="846749"/>
+              </a:solidFill>
+              <a:latin typeface="HarmonyOS Sans SC Medium" panose="00000600000000000000" charset="-122"/>
+              <a:ea typeface="HarmonyOS Sans SC Medium" panose="00000600000000000000" charset="-122"/>
+              <a:cs typeface="HarmonyOS Sans SC Medium" panose="00000600000000000000" charset="-122"/>
+              <a:sym typeface="HarmonyOS Sans SC Medium" panose="00000600000000000000" charset="-122"/>
+            </a:endParaRPr>
+          </a:p>
+          <a:p>
+            <a:pPr marL="171450" indent="-171450" fontAlgn="auto">
+              <a:lnSpc>
+                <a:spcPts val="1600"/>
+              </a:lnSpc>
+              <a:buFont typeface="Arial" panose="020B0604020202090204" pitchFamily="34" charset="0"/>
+              <a:buChar char="•"/>
+            </a:pPr>
+            <a:r>
+              <a:rPr lang="en-US" altLang="zh-CN" sz="1200" dirty="0">
+                <a:solidFill>
+                  <a:srgbClr val="846749"/>
+                </a:solidFill>
+                <a:latin typeface="HarmonyOS Sans SC Medium" panose="00000600000000000000" charset="-122"/>
+                <a:ea typeface="HarmonyOS Sans SC Medium" panose="00000600000000000000" charset="-122"/>
+                <a:cs typeface="HarmonyOS Sans SC Medium" panose="00000600000000000000" charset="-122"/>
+                <a:sym typeface="HarmonyOS Sans SC Medium" panose="00000600000000000000" charset="-122"/>
+              </a:rPr>
+              <a:t>Test design technique priority</a:t>
+            </a:r>
+            <a:endParaRPr lang="en-US" altLang="zh-CN" sz="1200" dirty="0">
+              <a:solidFill>
+                <a:srgbClr val="846749"/>
+              </a:solidFill>
+              <a:latin typeface="HarmonyOS Sans SC Medium" panose="00000600000000000000" charset="-122"/>
+              <a:ea typeface="HarmonyOS Sans SC Medium" panose="00000600000000000000" charset="-122"/>
+              <a:cs typeface="HarmonyOS Sans SC Medium" panose="00000600000000000000" charset="-122"/>
+              <a:sym typeface="HarmonyOS Sans SC Medium" panose="00000600000000000000" charset="-122"/>
+            </a:endParaRPr>
+          </a:p>
+          <a:p>
+            <a:pPr marL="171450" indent="-171450" fontAlgn="auto">
+              <a:lnSpc>
+                <a:spcPts val="1600"/>
+              </a:lnSpc>
+              <a:buFont typeface="Arial" panose="020B0604020202090204" pitchFamily="34" charset="0"/>
+              <a:buChar char="•"/>
+            </a:pPr>
+            <a:r>
+              <a:rPr lang="en-US" altLang="zh-CN" sz="1200" dirty="0">
+                <a:solidFill>
+                  <a:srgbClr val="846749"/>
+                </a:solidFill>
+                <a:latin typeface="HarmonyOS Sans SC Medium" panose="00000600000000000000" charset="-122"/>
+                <a:ea typeface="HarmonyOS Sans SC Medium" panose="00000600000000000000" charset="-122"/>
+                <a:cs typeface="HarmonyOS Sans SC Medium" panose="00000600000000000000" charset="-122"/>
+                <a:sym typeface="HarmonyOS Sans SC Medium" panose="00000600000000000000" charset="-122"/>
+              </a:rPr>
+              <a:t>Coverage category</a:t>
+            </a:r>
+            <a:endParaRPr lang="en-US" altLang="zh-CN" sz="1200" dirty="0">
+              <a:solidFill>
+                <a:srgbClr val="846749"/>
+              </a:solidFill>
+              <a:latin typeface="HarmonyOS Sans SC Medium" panose="00000600000000000000" charset="-122"/>
+              <a:ea typeface="HarmonyOS Sans SC Medium" panose="00000600000000000000" charset="-122"/>
+              <a:cs typeface="HarmonyOS Sans SC Medium" panose="00000600000000000000" charset="-122"/>
+              <a:sym typeface="HarmonyOS Sans SC Medium" panose="00000600000000000000" charset="-122"/>
+            </a:endParaRPr>
+          </a:p>
+          <a:p>
+            <a:pPr indent="0" fontAlgn="auto">
+              <a:lnSpc>
+                <a:spcPts val="1600"/>
+              </a:lnSpc>
+            </a:pPr>
+            <a:r>
+              <a:rPr lang="en-US" altLang="zh-CN" sz="1200" dirty="0">
+                <a:solidFill>
+                  <a:srgbClr val="846749"/>
+                </a:solidFill>
+                <a:latin typeface="HarmonyOS Sans SC Medium" panose="00000600000000000000" charset="-122"/>
+                <a:ea typeface="HarmonyOS Sans SC Medium" panose="00000600000000000000" charset="-122"/>
+                <a:cs typeface="HarmonyOS Sans SC Medium" panose="00000600000000000000" charset="-122"/>
+                <a:sym typeface="HarmonyOS Sans SC Medium" panose="00000600000000000000" charset="-122"/>
+              </a:rPr>
+              <a:t>Higher-risk requirements and stronger techniques are processed first.</a:t>
+            </a:r>
+            <a:endParaRPr lang="en-US" altLang="zh-CN" sz="1200" dirty="0">
+              <a:solidFill>
+                <a:srgbClr val="846749"/>
+              </a:solidFill>
+              <a:latin typeface="HarmonyOS Sans SC Medium" panose="00000600000000000000" charset="-122"/>
+              <a:ea typeface="HarmonyOS Sans SC Medium" panose="00000600000000000000" charset="-122"/>
+              <a:cs typeface="HarmonyOS Sans SC Medium" panose="00000600000000000000" charset="-122"/>
+              <a:sym typeface="HarmonyOS Sans SC Medium" panose="00000600000000000000" charset="-122"/>
+            </a:endParaRPr>
+          </a:p>
+          <a:p>
+            <a:pPr indent="0" fontAlgn="auto">
+              <a:lnSpc>
+                <a:spcPts val="2000"/>
+              </a:lnSpc>
+            </a:pPr>
+            <a:r>
+              <a:rPr lang="en-US" altLang="zh-CN" sz="1200" b="1" dirty="0">
+                <a:solidFill>
+                  <a:srgbClr val="846749"/>
+                </a:solidFill>
+                <a:latin typeface="HarmonyOS Sans SC Medium" panose="00000600000000000000" charset="-122"/>
+                <a:ea typeface="HarmonyOS Sans SC Medium" panose="00000600000000000000" charset="-122"/>
+                <a:cs typeface="HarmonyOS Sans SC Medium" panose="00000600000000000000" charset="-122"/>
+                <a:sym typeface="HarmonyOS Sans SC Medium" panose="00000600000000000000" charset="-122"/>
+              </a:rPr>
+              <a:t>Stage 2 — Risk-Based Reduction</a:t>
+            </a:r>
+            <a:endParaRPr lang="en-US" altLang="zh-CN" sz="1200" b="1" dirty="0">
+              <a:solidFill>
+                <a:srgbClr val="846749"/>
+              </a:solidFill>
+              <a:latin typeface="HarmonyOS Sans SC Medium" panose="00000600000000000000" charset="-122"/>
+              <a:ea typeface="HarmonyOS Sans SC Medium" panose="00000600000000000000" charset="-122"/>
+              <a:cs typeface="HarmonyOS Sans SC Medium" panose="00000600000000000000" charset="-122"/>
+              <a:sym typeface="HarmonyOS Sans SC Medium" panose="00000600000000000000" charset="-122"/>
+            </a:endParaRPr>
+          </a:p>
+          <a:p>
+            <a:pPr indent="0" fontAlgn="auto">
+              <a:lnSpc>
+                <a:spcPts val="1600"/>
+              </a:lnSpc>
+            </a:pPr>
+            <a:r>
+              <a:rPr lang="en-US" altLang="zh-CN" sz="1200" dirty="0">
+                <a:solidFill>
+                  <a:srgbClr val="846749"/>
+                </a:solidFill>
+                <a:latin typeface="HarmonyOS Sans SC Medium" panose="00000600000000000000" charset="-122"/>
+                <a:ea typeface="HarmonyOS Sans SC Medium" panose="00000600000000000000" charset="-122"/>
+                <a:cs typeface="HarmonyOS Sans SC Medium" panose="00000600000000000000" charset="-122"/>
+                <a:sym typeface="HarmonyOS Sans SC Medium" panose="00000600000000000000" charset="-122"/>
+              </a:rPr>
+              <a:t>Different reduction policies are applied according to requirement risk:</a:t>
+            </a:r>
+            <a:endParaRPr lang="en-US" altLang="zh-CN" sz="1200" dirty="0">
+              <a:solidFill>
+                <a:srgbClr val="846749"/>
+              </a:solidFill>
+              <a:latin typeface="HarmonyOS Sans SC Medium" panose="00000600000000000000" charset="-122"/>
+              <a:ea typeface="HarmonyOS Sans SC Medium" panose="00000600000000000000" charset="-122"/>
+              <a:cs typeface="HarmonyOS Sans SC Medium" panose="00000600000000000000" charset="-122"/>
+              <a:sym typeface="HarmonyOS Sans SC Medium" panose="00000600000000000000" charset="-122"/>
+            </a:endParaRPr>
+          </a:p>
+          <a:p>
+            <a:pPr marL="171450" indent="-171450" fontAlgn="auto">
+              <a:lnSpc>
+                <a:spcPts val="1600"/>
+              </a:lnSpc>
+              <a:buFont typeface="Arial" panose="020B0604020202090204" pitchFamily="34" charset="0"/>
+              <a:buChar char="•"/>
+            </a:pPr>
+            <a:r>
+              <a:rPr lang="en-US" altLang="zh-CN" sz="1200" dirty="0">
+                <a:solidFill>
+                  <a:srgbClr val="846749"/>
+                </a:solidFill>
+                <a:latin typeface="HarmonyOS Sans SC Medium" panose="00000600000000000000" charset="-122"/>
+                <a:ea typeface="HarmonyOS Sans SC Medium" panose="00000600000000000000" charset="-122"/>
+                <a:cs typeface="HarmonyOS Sans SC Medium" panose="00000600000000000000" charset="-122"/>
+                <a:sym typeface="HarmonyOS Sans SC Medium" panose="00000600000000000000" charset="-122"/>
+              </a:rPr>
+              <a:t>High Risk: retain all generated cases</a:t>
+            </a:r>
+            <a:endParaRPr lang="en-US" altLang="zh-CN" sz="1200" dirty="0">
+              <a:solidFill>
+                <a:srgbClr val="846749"/>
+              </a:solidFill>
+              <a:latin typeface="HarmonyOS Sans SC Medium" panose="00000600000000000000" charset="-122"/>
+              <a:ea typeface="HarmonyOS Sans SC Medium" panose="00000600000000000000" charset="-122"/>
+              <a:cs typeface="HarmonyOS Sans SC Medium" panose="00000600000000000000" charset="-122"/>
+              <a:sym typeface="HarmonyOS Sans SC Medium" panose="00000600000000000000" charset="-122"/>
+            </a:endParaRPr>
+          </a:p>
+          <a:p>
+            <a:pPr marL="171450" indent="-171450" fontAlgn="auto">
+              <a:lnSpc>
+                <a:spcPts val="1600"/>
+              </a:lnSpc>
+              <a:buFont typeface="Arial" panose="020B0604020202090204" pitchFamily="34" charset="0"/>
+              <a:buChar char="•"/>
+            </a:pPr>
+            <a:r>
+              <a:rPr lang="en-US" altLang="zh-CN" sz="1200" dirty="0">
+                <a:solidFill>
+                  <a:srgbClr val="846749"/>
+                </a:solidFill>
+                <a:latin typeface="HarmonyOS Sans SC Medium" panose="00000600000000000000" charset="-122"/>
+                <a:ea typeface="HarmonyOS Sans SC Medium" panose="00000600000000000000" charset="-122"/>
+                <a:cs typeface="HarmonyOS Sans SC Medium" panose="00000600000000000000" charset="-122"/>
+                <a:sym typeface="HarmonyOS Sans SC Medium" panose="00000600000000000000" charset="-122"/>
+              </a:rPr>
+              <a:t>Medium Risk: keep one representative per coverage type and retain all Decision Table and State-Transition cases</a:t>
+            </a:r>
+            <a:endParaRPr lang="en-US" altLang="zh-CN" sz="1200" dirty="0">
+              <a:solidFill>
+                <a:srgbClr val="846749"/>
+              </a:solidFill>
+              <a:latin typeface="HarmonyOS Sans SC Medium" panose="00000600000000000000" charset="-122"/>
+              <a:ea typeface="HarmonyOS Sans SC Medium" panose="00000600000000000000" charset="-122"/>
+              <a:cs typeface="HarmonyOS Sans SC Medium" panose="00000600000000000000" charset="-122"/>
+              <a:sym typeface="HarmonyOS Sans SC Medium" panose="00000600000000000000" charset="-122"/>
+            </a:endParaRPr>
+          </a:p>
+          <a:p>
+            <a:pPr marL="171450" indent="-171450" fontAlgn="auto">
+              <a:lnSpc>
+                <a:spcPts val="1600"/>
+              </a:lnSpc>
+              <a:buFont typeface="Arial" panose="020B0604020202090204" pitchFamily="34" charset="0"/>
+              <a:buChar char="•"/>
+            </a:pPr>
+            <a:r>
+              <a:rPr lang="en-US" altLang="zh-CN" sz="1200" dirty="0">
+                <a:solidFill>
+                  <a:srgbClr val="846749"/>
+                </a:solidFill>
+                <a:latin typeface="HarmonyOS Sans SC Medium" panose="00000600000000000000" charset="-122"/>
+                <a:ea typeface="HarmonyOS Sans SC Medium" panose="00000600000000000000" charset="-122"/>
+                <a:cs typeface="HarmonyOS Sans SC Medium" panose="00000600000000000000" charset="-122"/>
+                <a:sym typeface="HarmonyOS Sans SC Medium" panose="00000600000000000000" charset="-122"/>
+              </a:rPr>
+              <a:t>Low Risk: remove redundant cases while ensuring minimum coverage remains</a:t>
+            </a:r>
+            <a:endParaRPr lang="en-US" altLang="zh-CN" sz="1200" dirty="0">
+              <a:solidFill>
+                <a:srgbClr val="846749"/>
+              </a:solidFill>
+              <a:latin typeface="HarmonyOS Sans SC Medium" panose="00000600000000000000" charset="-122"/>
+              <a:ea typeface="HarmonyOS Sans SC Medium" panose="00000600000000000000" charset="-122"/>
+              <a:cs typeface="HarmonyOS Sans SC Medium" panose="00000600000000000000" charset="-122"/>
+              <a:sym typeface="HarmonyOS Sans SC Medium" panose="00000600000000000000" charset="-122"/>
+            </a:endParaRPr>
+          </a:p>
+        </p:txBody>
+      </p:sp>
+      <p:sp>
+        <p:nvSpPr>
+          <p:cNvPr id="26" name="文本框 25"/>
+          <p:cNvSpPr txBox="1"/>
+          <p:nvPr/>
+        </p:nvSpPr>
+        <p:spPr>
+          <a:xfrm>
+            <a:off x="7520940" y="1457960"/>
+            <a:ext cx="3058795" cy="460375"/>
+          </a:xfrm>
+          <a:prstGeom prst="rect">
+            <a:avLst/>
+          </a:prstGeom>
+        </p:spPr>
+        <p:txBody>
+          <a:bodyPr wrap="square">
+            <a:spAutoFit/>
+          </a:bodyPr>
+          <a:p>
+            <a:pPr algn="ctr">
+              <a:buClrTx/>
+              <a:buSzTx/>
+              <a:buFontTx/>
+            </a:pPr>
+            <a:r>
+              <a:rPr lang="en-US" altLang="zh-CN" sz="2400">
+                <a:solidFill>
+                  <a:srgbClr val="846749"/>
+                </a:solidFill>
+                <a:latin typeface="HarmonyOS Sans SC Medium" panose="00000600000000000000" charset="-122"/>
+                <a:ea typeface="HarmonyOS Sans SC Medium" panose="00000600000000000000" charset="-122"/>
+                <a:cs typeface="HarmonyOS Sans SC Medium" panose="00000600000000000000" charset="-122"/>
+              </a:rPr>
+              <a:t>Optimisation Result</a:t>
+            </a:r>
+            <a:endParaRPr lang="en-US" altLang="zh-CN" sz="2400">
+              <a:solidFill>
+                <a:srgbClr val="846749"/>
+              </a:solidFill>
+              <a:latin typeface="HarmonyOS Sans SC Medium" panose="00000600000000000000" charset="-122"/>
+              <a:ea typeface="HarmonyOS Sans SC Medium" panose="00000600000000000000" charset="-122"/>
+              <a:cs typeface="HarmonyOS Sans SC Medium" panose="00000600000000000000" charset="-122"/>
+            </a:endParaRPr>
+          </a:p>
+        </p:txBody>
+      </p:sp>
+      <p:sp>
+        <p:nvSpPr>
+          <p:cNvPr id="27" name="文本框 26"/>
+          <p:cNvSpPr txBox="1"/>
+          <p:nvPr/>
+        </p:nvSpPr>
+        <p:spPr>
+          <a:xfrm>
+            <a:off x="7520940" y="2056130"/>
+            <a:ext cx="4671060" cy="2745740"/>
+          </a:xfrm>
+          <a:prstGeom prst="rect">
+            <a:avLst/>
+          </a:prstGeom>
+          <a:noFill/>
+        </p:spPr>
+        <p:txBody>
+          <a:bodyPr wrap="square" rtlCol="0" anchor="t">
+            <a:spAutoFit/>
+          </a:bodyPr>
+          <a:p>
+            <a:pPr marL="171450" indent="-171450">
+              <a:lnSpc>
+                <a:spcPct val="160000"/>
+              </a:lnSpc>
+              <a:buFont typeface="Arial" panose="020B0604020202090204" pitchFamily="34" charset="0"/>
+              <a:buChar char="•"/>
+            </a:pPr>
+            <a:r>
+              <a:rPr lang="en-US" altLang="zh-CN" sz="1200" b="1" dirty="0">
+                <a:solidFill>
+                  <a:srgbClr val="846749"/>
+                </a:solidFill>
+                <a:latin typeface="HarmonyOS Sans SC Medium" panose="00000600000000000000" charset="-122"/>
+                <a:ea typeface="HarmonyOS Sans SC Medium" panose="00000600000000000000" charset="-122"/>
+                <a:cs typeface="HarmonyOS Sans SC Medium" panose="00000600000000000000" charset="-122"/>
+                <a:sym typeface="HarmonyOS Sans SC Medium" panose="00000600000000000000" charset="-122"/>
+              </a:rPr>
+              <a:t>Black-box Cases</a:t>
+            </a:r>
+            <a:endParaRPr lang="en-US" altLang="zh-CN" sz="1200" b="1" dirty="0">
+              <a:solidFill>
+                <a:srgbClr val="846749"/>
+              </a:solidFill>
+              <a:latin typeface="HarmonyOS Sans SC Medium" panose="00000600000000000000" charset="-122"/>
+              <a:ea typeface="HarmonyOS Sans SC Medium" panose="00000600000000000000" charset="-122"/>
+              <a:cs typeface="HarmonyOS Sans SC Medium" panose="00000600000000000000" charset="-122"/>
+              <a:sym typeface="HarmonyOS Sans SC Medium" panose="00000600000000000000" charset="-122"/>
+            </a:endParaRPr>
+          </a:p>
+          <a:p>
+            <a:pPr>
+              <a:lnSpc>
+                <a:spcPct val="160000"/>
+              </a:lnSpc>
+            </a:pPr>
+            <a:r>
+              <a:rPr lang="en-US" altLang="zh-CN" sz="1200" dirty="0">
+                <a:solidFill>
+                  <a:srgbClr val="846749"/>
+                </a:solidFill>
+                <a:latin typeface="HarmonyOS Sans SC Medium" panose="00000600000000000000" charset="-122"/>
+                <a:ea typeface="HarmonyOS Sans SC Medium" panose="00000600000000000000" charset="-122"/>
+                <a:cs typeface="HarmonyOS Sans SC Medium" panose="00000600000000000000" charset="-122"/>
+                <a:sym typeface="HarmonyOS Sans SC Medium" panose="00000600000000000000" charset="-122"/>
+              </a:rPr>
+              <a:t>   61 generated cases </a:t>
+            </a:r>
+            <a:r>
+              <a:rPr lang="en-US" altLang="en-US" sz="1200" dirty="0">
+                <a:solidFill>
+                  <a:srgbClr val="846749"/>
+                </a:solidFill>
+                <a:latin typeface="HarmonyOS Sans SC Medium" panose="00000600000000000000" charset="-122"/>
+                <a:ea typeface="HarmonyOS Sans SC Medium" panose="00000600000000000000" charset="-122"/>
+                <a:cs typeface="HarmonyOS Sans SC Medium" panose="00000600000000000000" charset="-122"/>
+                <a:sym typeface="HarmonyOS Sans SC Medium" panose="00000600000000000000" charset="-122"/>
+              </a:rPr>
+              <a:t>→</a:t>
+            </a:r>
+            <a:r>
+              <a:rPr lang="en-US" altLang="zh-CN" sz="1200" dirty="0">
+                <a:solidFill>
+                  <a:srgbClr val="846749"/>
+                </a:solidFill>
+                <a:latin typeface="HarmonyOS Sans SC Medium" panose="00000600000000000000" charset="-122"/>
+                <a:ea typeface="HarmonyOS Sans SC Medium" panose="00000600000000000000" charset="-122"/>
+                <a:cs typeface="HarmonyOS Sans SC Medium" panose="00000600000000000000" charset="-122"/>
+                <a:sym typeface="HarmonyOS Sans SC Medium" panose="00000600000000000000" charset="-122"/>
+              </a:rPr>
+              <a:t> 57 retained cases</a:t>
+            </a:r>
+            <a:endParaRPr lang="en-US" altLang="zh-CN" sz="1200" dirty="0">
+              <a:solidFill>
+                <a:srgbClr val="846749"/>
+              </a:solidFill>
+              <a:latin typeface="HarmonyOS Sans SC Medium" panose="00000600000000000000" charset="-122"/>
+              <a:ea typeface="HarmonyOS Sans SC Medium" panose="00000600000000000000" charset="-122"/>
+              <a:cs typeface="HarmonyOS Sans SC Medium" panose="00000600000000000000" charset="-122"/>
+              <a:sym typeface="HarmonyOS Sans SC Medium" panose="00000600000000000000" charset="-122"/>
+            </a:endParaRPr>
+          </a:p>
+          <a:p>
+            <a:pPr marL="171450" indent="-171450">
+              <a:lnSpc>
+                <a:spcPct val="160000"/>
+              </a:lnSpc>
+              <a:buFont typeface="Arial" panose="020B0604020202090204" pitchFamily="34" charset="0"/>
+              <a:buChar char="•"/>
+            </a:pPr>
+            <a:r>
+              <a:rPr lang="en-US" altLang="zh-CN" sz="1200" b="1" dirty="0">
+                <a:solidFill>
+                  <a:srgbClr val="846749"/>
+                </a:solidFill>
+                <a:latin typeface="HarmonyOS Sans SC Medium" panose="00000600000000000000" charset="-122"/>
+                <a:ea typeface="HarmonyOS Sans SC Medium" panose="00000600000000000000" charset="-122"/>
+                <a:cs typeface="HarmonyOS Sans SC Medium" panose="00000600000000000000" charset="-122"/>
+                <a:sym typeface="HarmonyOS Sans SC Medium" panose="00000600000000000000" charset="-122"/>
+              </a:rPr>
+              <a:t>White-box State Cases</a:t>
+            </a:r>
+            <a:endParaRPr lang="en-US" altLang="zh-CN" sz="1200" b="1" dirty="0">
+              <a:solidFill>
+                <a:srgbClr val="846749"/>
+              </a:solidFill>
+              <a:latin typeface="HarmonyOS Sans SC Medium" panose="00000600000000000000" charset="-122"/>
+              <a:ea typeface="HarmonyOS Sans SC Medium" panose="00000600000000000000" charset="-122"/>
+              <a:cs typeface="HarmonyOS Sans SC Medium" panose="00000600000000000000" charset="-122"/>
+              <a:sym typeface="HarmonyOS Sans SC Medium" panose="00000600000000000000" charset="-122"/>
+            </a:endParaRPr>
+          </a:p>
+          <a:p>
+            <a:pPr>
+              <a:lnSpc>
+                <a:spcPct val="160000"/>
+              </a:lnSpc>
+            </a:pPr>
+            <a:r>
+              <a:rPr lang="en-US" altLang="zh-CN" sz="1200" dirty="0">
+                <a:solidFill>
+                  <a:srgbClr val="846749"/>
+                </a:solidFill>
+                <a:latin typeface="HarmonyOS Sans SC Medium" panose="00000600000000000000" charset="-122"/>
+                <a:ea typeface="HarmonyOS Sans SC Medium" panose="00000600000000000000" charset="-122"/>
+                <a:cs typeface="HarmonyOS Sans SC Medium" panose="00000600000000000000" charset="-122"/>
+                <a:sym typeface="HarmonyOS Sans SC Medium" panose="00000600000000000000" charset="-122"/>
+              </a:rPr>
+              <a:t>   4 state-transition cases retained completely because each    </a:t>
+            </a:r>
+            <a:endParaRPr lang="en-US" altLang="zh-CN" sz="1200" dirty="0">
+              <a:solidFill>
+                <a:srgbClr val="846749"/>
+              </a:solidFill>
+              <a:latin typeface="HarmonyOS Sans SC Medium" panose="00000600000000000000" charset="-122"/>
+              <a:ea typeface="HarmonyOS Sans SC Medium" panose="00000600000000000000" charset="-122"/>
+              <a:cs typeface="HarmonyOS Sans SC Medium" panose="00000600000000000000" charset="-122"/>
+              <a:sym typeface="HarmonyOS Sans SC Medium" panose="00000600000000000000" charset="-122"/>
+            </a:endParaRPr>
+          </a:p>
+          <a:p>
+            <a:pPr>
+              <a:lnSpc>
+                <a:spcPct val="160000"/>
+              </a:lnSpc>
+            </a:pPr>
+            <a:r>
+              <a:rPr lang="en-US" altLang="zh-CN" sz="1200" dirty="0">
+                <a:solidFill>
+                  <a:srgbClr val="846749"/>
+                </a:solidFill>
+                <a:latin typeface="HarmonyOS Sans SC Medium" panose="00000600000000000000" charset="-122"/>
+                <a:ea typeface="HarmonyOS Sans SC Medium" panose="00000600000000000000" charset="-122"/>
+                <a:cs typeface="HarmonyOS Sans SC Medium" panose="00000600000000000000" charset="-122"/>
+                <a:sym typeface="HarmonyOS Sans SC Medium" panose="00000600000000000000" charset="-122"/>
+              </a:rPr>
+              <a:t>   case represents a unique workflow edge</a:t>
+            </a:r>
+            <a:endParaRPr lang="en-US" altLang="zh-CN" sz="1200" dirty="0">
+              <a:solidFill>
+                <a:srgbClr val="846749"/>
+              </a:solidFill>
+              <a:latin typeface="HarmonyOS Sans SC Medium" panose="00000600000000000000" charset="-122"/>
+              <a:ea typeface="HarmonyOS Sans SC Medium" panose="00000600000000000000" charset="-122"/>
+              <a:cs typeface="HarmonyOS Sans SC Medium" panose="00000600000000000000" charset="-122"/>
+              <a:sym typeface="HarmonyOS Sans SC Medium" panose="00000600000000000000" charset="-122"/>
+            </a:endParaRPr>
+          </a:p>
+          <a:p>
+            <a:pPr marL="171450" indent="-171450">
+              <a:lnSpc>
+                <a:spcPct val="160000"/>
+              </a:lnSpc>
+              <a:buFont typeface="Arial" panose="020B0604020202090204" pitchFamily="34" charset="0"/>
+              <a:buChar char="•"/>
+            </a:pPr>
+            <a:r>
+              <a:rPr lang="en-US" altLang="zh-CN" sz="1200" b="1" dirty="0">
+                <a:solidFill>
+                  <a:srgbClr val="846749"/>
+                </a:solidFill>
+                <a:latin typeface="HarmonyOS Sans SC Medium" panose="00000600000000000000" charset="-122"/>
+                <a:ea typeface="HarmonyOS Sans SC Medium" panose="00000600000000000000" charset="-122"/>
+                <a:cs typeface="HarmonyOS Sans SC Medium" panose="00000600000000000000" charset="-122"/>
+                <a:sym typeface="HarmonyOS Sans SC Medium" panose="00000600000000000000" charset="-122"/>
+              </a:rPr>
+              <a:t>Final Optimised Suite</a:t>
+            </a:r>
+            <a:endParaRPr lang="en-US" altLang="zh-CN" sz="1200" b="1" dirty="0">
+              <a:solidFill>
+                <a:srgbClr val="846749"/>
+              </a:solidFill>
+              <a:latin typeface="HarmonyOS Sans SC Medium" panose="00000600000000000000" charset="-122"/>
+              <a:ea typeface="HarmonyOS Sans SC Medium" panose="00000600000000000000" charset="-122"/>
+              <a:cs typeface="HarmonyOS Sans SC Medium" panose="00000600000000000000" charset="-122"/>
+              <a:sym typeface="HarmonyOS Sans SC Medium" panose="00000600000000000000" charset="-122"/>
+            </a:endParaRPr>
+          </a:p>
+          <a:p>
+            <a:pPr>
+              <a:lnSpc>
+                <a:spcPct val="160000"/>
+              </a:lnSpc>
+            </a:pPr>
+            <a:r>
+              <a:rPr lang="en-US" altLang="zh-CN" sz="1200" dirty="0">
+                <a:solidFill>
+                  <a:srgbClr val="846749"/>
+                </a:solidFill>
+                <a:latin typeface="HarmonyOS Sans SC Medium" panose="00000600000000000000" charset="-122"/>
+                <a:ea typeface="HarmonyOS Sans SC Medium" panose="00000600000000000000" charset="-122"/>
+                <a:cs typeface="HarmonyOS Sans SC Medium" panose="00000600000000000000" charset="-122"/>
+                <a:sym typeface="HarmonyOS Sans SC Medium" panose="00000600000000000000" charset="-122"/>
+              </a:rPr>
+              <a:t>   65 total cases </a:t>
+            </a:r>
+            <a:r>
+              <a:rPr lang="en-US" altLang="en-US" sz="1200" dirty="0">
+                <a:solidFill>
+                  <a:srgbClr val="846749"/>
+                </a:solidFill>
+                <a:latin typeface="HarmonyOS Sans SC Medium" panose="00000600000000000000" charset="-122"/>
+                <a:ea typeface="HarmonyOS Sans SC Medium" panose="00000600000000000000" charset="-122"/>
+                <a:cs typeface="HarmonyOS Sans SC Medium" panose="00000600000000000000" charset="-122"/>
+                <a:sym typeface="HarmonyOS Sans SC Medium" panose="00000600000000000000" charset="-122"/>
+              </a:rPr>
+              <a:t>→</a:t>
+            </a:r>
+            <a:r>
+              <a:rPr lang="en-US" altLang="zh-CN" sz="1200" dirty="0">
+                <a:solidFill>
+                  <a:srgbClr val="846749"/>
+                </a:solidFill>
+                <a:latin typeface="HarmonyOS Sans SC Medium" panose="00000600000000000000" charset="-122"/>
+                <a:ea typeface="HarmonyOS Sans SC Medium" panose="00000600000000000000" charset="-122"/>
+                <a:cs typeface="HarmonyOS Sans SC Medium" panose="00000600000000000000" charset="-122"/>
+                <a:sym typeface="HarmonyOS Sans SC Medium" panose="00000600000000000000" charset="-122"/>
+              </a:rPr>
+              <a:t> 61 retained cases</a:t>
+            </a:r>
+            <a:endParaRPr lang="en-US" altLang="zh-CN" sz="1200" dirty="0">
+              <a:solidFill>
+                <a:srgbClr val="846749"/>
+              </a:solidFill>
+              <a:latin typeface="HarmonyOS Sans SC Medium" panose="00000600000000000000" charset="-122"/>
+              <a:ea typeface="HarmonyOS Sans SC Medium" panose="00000600000000000000" charset="-122"/>
+              <a:cs typeface="HarmonyOS Sans SC Medium" panose="00000600000000000000" charset="-122"/>
+              <a:sym typeface="HarmonyOS Sans SC Medium" panose="00000600000000000000" charset="-122"/>
+            </a:endParaRPr>
+          </a:p>
+          <a:p>
+            <a:pPr>
+              <a:lnSpc>
+                <a:spcPct val="160000"/>
+              </a:lnSpc>
+            </a:pPr>
+            <a:r>
+              <a:rPr lang="en-US" altLang="zh-CN" sz="1200" dirty="0">
+                <a:solidFill>
+                  <a:srgbClr val="846749"/>
+                </a:solidFill>
+                <a:latin typeface="HarmonyOS Sans SC Medium" panose="00000600000000000000" charset="-122"/>
+                <a:ea typeface="HarmonyOS Sans SC Medium" panose="00000600000000000000" charset="-122"/>
+                <a:cs typeface="HarmonyOS Sans SC Medium" panose="00000600000000000000" charset="-122"/>
+                <a:sym typeface="HarmonyOS Sans SC Medium" panose="00000600000000000000" charset="-122"/>
+              </a:rPr>
+              <a:t>No requirements or coverage categories were removed during optimisation.</a:t>
+            </a:r>
+            <a:endParaRPr lang="en-US" altLang="zh-CN" sz="1200" dirty="0">
+              <a:solidFill>
+                <a:srgbClr val="846749"/>
+              </a:solidFill>
+              <a:latin typeface="HarmonyOS Sans SC Medium" panose="00000600000000000000" charset="-122"/>
+              <a:ea typeface="HarmonyOS Sans SC Medium" panose="00000600000000000000" charset="-122"/>
+              <a:cs typeface="HarmonyOS Sans SC Medium" panose="00000600000000000000" charset="-122"/>
+              <a:sym typeface="HarmonyOS Sans SC Medium" panose="00000600000000000000" charset="-122"/>
+            </a:endParaRPr>
+          </a:p>
+        </p:txBody>
+      </p:sp>
+    </p:spTree>
+    <p:custDataLst>
+      <p:tags r:id="rId2"/>
     </p:custDataLst>
   </p:cSld>
   <p:clrMapOvr>
@@ -6542,7 +7332,7 @@
         <p:spPr>
           <a:xfrm>
             <a:off x="1485900" y="434340"/>
-            <a:ext cx="6769100" cy="583565"/>
+            <a:ext cx="7701915" cy="583565"/>
           </a:xfrm>
           <a:prstGeom prst="rect">
             <a:avLst/>
@@ -6564,7 +7354,7 @@
                 <a:cs typeface="HarmonyOS Sans SC Medium" panose="00000600000000000000" charset="-122"/>
                 <a:sym typeface="+mn-ea"/>
               </a:rPr>
-              <a:t>Test Design —— Optimisation</a:t>
+              <a:t>Test Design —— Interactive Review </a:t>
             </a:r>
             <a:endParaRPr lang="en-US" altLang="zh-CN" sz="3200">
               <a:solidFill>
@@ -6674,8 +7464,8 @@
         </p:nvSpPr>
         <p:spPr>
           <a:xfrm>
-            <a:off x="624840" y="1412875"/>
-            <a:ext cx="2147570" cy="460375"/>
+            <a:off x="1863408" y="1388110"/>
+            <a:ext cx="3841115" cy="460375"/>
           </a:xfrm>
           <a:prstGeom prst="rect">
             <a:avLst/>
@@ -6698,7 +7488,7 @@
                 <a:cs typeface="HarmonyOS Sans SC Medium" panose="00000600000000000000" charset="-122"/>
                 <a:sym typeface="+mn-ea"/>
               </a:rPr>
-              <a:t>Why Optimise</a:t>
+              <a:t>Why Human-in-the-Loop</a:t>
             </a:r>
             <a:endParaRPr lang="en-US" altLang="zh-CN" sz="2400">
               <a:solidFill>
@@ -6720,8 +7510,8 @@
         </p:nvSpPr>
         <p:spPr>
           <a:xfrm>
-            <a:off x="692785" y="1979930"/>
-            <a:ext cx="6584315" cy="975995"/>
+            <a:off x="1860550" y="1987550"/>
+            <a:ext cx="4582795" cy="1565910"/>
           </a:xfrm>
           <a:prstGeom prst="rect">
             <a:avLst/>
@@ -6751,7 +7541,35 @@
                 <a:cs typeface="HarmonyOS Sans SC Medium" panose="00000600000000000000" charset="-122"/>
                 <a:sym typeface="HarmonyOS Sans SC Medium" panose="00000600000000000000" charset="-122"/>
               </a:rPr>
-              <a:t>Generated test suites may contain redundant cases that increase execution cost without improving coverage. Optimisation reduces unnecessary cases while preserving risk coverage and fault-detection capability.</a:t>
+              <a:t>Automatically generated artefacts should remain editable because test design still requires human judgement and domain knowledge.</a:t>
+            </a:r>
+            <a:endParaRPr lang="en-US" altLang="zh-CN" sz="1200" dirty="0">
+              <a:solidFill>
+                <a:srgbClr val="846749"/>
+              </a:solidFill>
+              <a:latin typeface="HarmonyOS Sans SC Medium" panose="00000600000000000000" charset="-122"/>
+              <a:ea typeface="HarmonyOS Sans SC Medium" panose="00000600000000000000" charset="-122"/>
+              <a:cs typeface="HarmonyOS Sans SC Medium" panose="00000600000000000000" charset="-122"/>
+              <a:sym typeface="HarmonyOS Sans SC Medium" panose="00000600000000000000" charset="-122"/>
+            </a:endParaRPr>
+          </a:p>
+          <a:p>
+            <a:pPr>
+              <a:lnSpc>
+                <a:spcPct val="160000"/>
+              </a:lnSpc>
+            </a:pPr>
+            <a:r>
+              <a:rPr lang="en-US" altLang="zh-CN" sz="1200" dirty="0">
+                <a:solidFill>
+                  <a:srgbClr val="846749"/>
+                </a:solidFill>
+                <a:latin typeface="HarmonyOS Sans SC Medium" panose="00000600000000000000" charset="-122"/>
+                <a:ea typeface="HarmonyOS Sans SC Medium" panose="00000600000000000000" charset="-122"/>
+                <a:cs typeface="HarmonyOS Sans SC Medium" panose="00000600000000000000" charset="-122"/>
+                <a:sym typeface="HarmonyOS Sans SC Medium" panose="00000600000000000000" charset="-122"/>
+              </a:rPr>
+              <a:t>The system therefore allows users to review and modify intermediate outputs before continuing the workflow.</a:t>
             </a:r>
             <a:endParaRPr lang="en-US" altLang="zh-CN" sz="1200" dirty="0">
               <a:solidFill>
@@ -6773,15 +7591,15 @@
         </p:nvSpPr>
         <p:spPr>
           <a:xfrm>
-            <a:off x="624840" y="3137853"/>
-            <a:ext cx="5080000" cy="460375"/>
+            <a:off x="1854200" y="3692525"/>
+            <a:ext cx="3851275" cy="460375"/>
           </a:xfrm>
           <a:prstGeom prst="rect">
             <a:avLst/>
           </a:prstGeom>
         </p:spPr>
         <p:txBody>
-          <a:bodyPr>
+          <a:bodyPr wrap="square">
             <a:spAutoFit/>
           </a:bodyPr>
           <a:p>
@@ -6799,7 +7617,7 @@
                 <a:ea typeface="HarmonyOS Sans SC Medium" panose="00000600000000000000" charset="-122"/>
                 <a:cs typeface="HarmonyOS Sans SC Medium" panose="00000600000000000000" charset="-122"/>
               </a:rPr>
-              <a:t>Two-Stage Optimisation Strategy</a:t>
+              <a:t>Editable Artefacts</a:t>
             </a:r>
             <a:endParaRPr lang="en-US" altLang="zh-CN" sz="2400">
               <a:solidFill>
@@ -6820,8 +7638,8 @@
         </p:nvSpPr>
         <p:spPr>
           <a:xfrm>
-            <a:off x="704215" y="3780790"/>
-            <a:ext cx="6573520" cy="2656205"/>
+            <a:off x="1854200" y="4291965"/>
+            <a:ext cx="4580255" cy="1861185"/>
           </a:xfrm>
           <a:prstGeom prst="rect">
             <a:avLst/>
@@ -6838,14 +7656,15 @@
           <a:p>
             <a:pPr algn="l" fontAlgn="auto">
               <a:lnSpc>
-                <a:spcPts val="2000"/>
+                <a:spcPct val="160000"/>
               </a:lnSpc>
               <a:buClrTx/>
               <a:buSzTx/>
               <a:buFontTx/>
+              <a:buNone/>
             </a:pPr>
             <a:r>
-              <a:rPr lang="en-US" altLang="zh-CN" sz="1200" b="1" dirty="0">
+              <a:rPr lang="en-US" altLang="zh-CN" sz="1200" dirty="0">
                 <a:solidFill>
                   <a:srgbClr val="846749"/>
                 </a:solidFill>
@@ -6854,9 +7673,9 @@
                 <a:cs typeface="HarmonyOS Sans SC Medium" panose="00000600000000000000" charset="-122"/>
                 <a:sym typeface="HarmonyOS Sans SC Medium" panose="00000600000000000000" charset="-122"/>
               </a:rPr>
-              <a:t>Stage 1 — Prioritisation</a:t>
-            </a:r>
-            <a:endParaRPr lang="en-US" altLang="zh-CN" sz="1200" b="1" dirty="0">
+              <a:t>All generated artefacts support direct editing inside the interface:</a:t>
+            </a:r>
+            <a:endParaRPr lang="en-US" altLang="zh-CN" sz="1200" dirty="0">
               <a:solidFill>
                 <a:srgbClr val="846749"/>
               </a:solidFill>
@@ -6867,38 +7686,12 @@
             </a:endParaRPr>
           </a:p>
           <a:p>
-            <a:pPr indent="0" fontAlgn="auto">
+            <a:pPr marL="171450" indent="-171450" algn="l" fontAlgn="auto">
               <a:lnSpc>
-                <a:spcPts val="1600"/>
+                <a:spcPct val="160000"/>
               </a:lnSpc>
-            </a:pPr>
-            <a:r>
-              <a:rPr lang="en-US" altLang="zh-CN" sz="1200" dirty="0">
-                <a:solidFill>
-                  <a:srgbClr val="846749"/>
-                </a:solidFill>
-                <a:latin typeface="HarmonyOS Sans SC Medium" panose="00000600000000000000" charset="-122"/>
-                <a:ea typeface="HarmonyOS Sans SC Medium" panose="00000600000000000000" charset="-122"/>
-                <a:cs typeface="HarmonyOS Sans SC Medium" panose="00000600000000000000" charset="-122"/>
-                <a:sym typeface="HarmonyOS Sans SC Medium" panose="00000600000000000000" charset="-122"/>
-              </a:rPr>
-              <a:t>Generated cases are first prioritised according to:</a:t>
-            </a:r>
-            <a:endParaRPr lang="en-US" altLang="zh-CN" sz="1200" dirty="0">
-              <a:solidFill>
-                <a:srgbClr val="846749"/>
-              </a:solidFill>
-              <a:latin typeface="HarmonyOS Sans SC Medium" panose="00000600000000000000" charset="-122"/>
-              <a:ea typeface="HarmonyOS Sans SC Medium" panose="00000600000000000000" charset="-122"/>
-              <a:cs typeface="HarmonyOS Sans SC Medium" panose="00000600000000000000" charset="-122"/>
-              <a:sym typeface="HarmonyOS Sans SC Medium" panose="00000600000000000000" charset="-122"/>
-            </a:endParaRPr>
-          </a:p>
-          <a:p>
-            <a:pPr marL="171450" indent="-171450" fontAlgn="auto">
-              <a:lnSpc>
-                <a:spcPts val="1600"/>
-              </a:lnSpc>
+              <a:buClrTx/>
+              <a:buSzTx/>
               <a:buFont typeface="Arial" panose="020B0604020202090204" pitchFamily="34" charset="0"/>
               <a:buChar char="•"/>
             </a:pPr>
@@ -6912,7 +7705,7 @@
                 <a:cs typeface="HarmonyOS Sans SC Medium" panose="00000600000000000000" charset="-122"/>
                 <a:sym typeface="HarmonyOS Sans SC Medium" panose="00000600000000000000" charset="-122"/>
               </a:rPr>
-              <a:t>Risk level and risk score</a:t>
+              <a:t>Add new rows</a:t>
             </a:r>
             <a:endParaRPr lang="en-US" altLang="zh-CN" sz="1200" dirty="0">
               <a:solidFill>
@@ -6925,10 +7718,12 @@
             </a:endParaRPr>
           </a:p>
           <a:p>
-            <a:pPr marL="171450" indent="-171450" fontAlgn="auto">
+            <a:pPr marL="171450" indent="-171450" algn="l" fontAlgn="auto">
               <a:lnSpc>
-                <a:spcPts val="1600"/>
+                <a:spcPct val="160000"/>
               </a:lnSpc>
+              <a:buClrTx/>
+              <a:buSzTx/>
               <a:buFont typeface="Arial" panose="020B0604020202090204" pitchFamily="34" charset="0"/>
               <a:buChar char="•"/>
             </a:pPr>
@@ -6942,7 +7737,7 @@
                 <a:cs typeface="HarmonyOS Sans SC Medium" panose="00000600000000000000" charset="-122"/>
                 <a:sym typeface="HarmonyOS Sans SC Medium" panose="00000600000000000000" charset="-122"/>
               </a:rPr>
-              <a:t>Test design technique priority</a:t>
+              <a:t>Modify generated values</a:t>
             </a:r>
             <a:endParaRPr lang="en-US" altLang="zh-CN" sz="1200" dirty="0">
               <a:solidFill>
@@ -6955,10 +7750,12 @@
             </a:endParaRPr>
           </a:p>
           <a:p>
-            <a:pPr marL="171450" indent="-171450" fontAlgn="auto">
+            <a:pPr marL="171450" indent="-171450" algn="l" fontAlgn="auto">
               <a:lnSpc>
-                <a:spcPts val="1600"/>
+                <a:spcPct val="160000"/>
               </a:lnSpc>
+              <a:buClrTx/>
+              <a:buSzTx/>
               <a:buFont typeface="Arial" panose="020B0604020202090204" pitchFamily="34" charset="0"/>
               <a:buChar char="•"/>
             </a:pPr>
@@ -6972,7 +7769,7 @@
                 <a:cs typeface="HarmonyOS Sans SC Medium" panose="00000600000000000000" charset="-122"/>
                 <a:sym typeface="HarmonyOS Sans SC Medium" panose="00000600000000000000" charset="-122"/>
               </a:rPr>
-              <a:t>Coverage category</a:t>
+              <a:t>Delete unnecessary entries</a:t>
             </a:r>
             <a:endParaRPr lang="en-US" altLang="zh-CN" sz="1200" dirty="0">
               <a:solidFill>
@@ -6985,94 +7782,12 @@
             </a:endParaRPr>
           </a:p>
           <a:p>
-            <a:pPr indent="0" fontAlgn="auto">
+            <a:pPr marL="171450" indent="-171450" algn="l" fontAlgn="auto">
               <a:lnSpc>
-                <a:spcPts val="1600"/>
+                <a:spcPct val="160000"/>
               </a:lnSpc>
-            </a:pPr>
-            <a:r>
-              <a:rPr lang="en-US" altLang="zh-CN" sz="1200" dirty="0">
-                <a:solidFill>
-                  <a:srgbClr val="846749"/>
-                </a:solidFill>
-                <a:latin typeface="HarmonyOS Sans SC Medium" panose="00000600000000000000" charset="-122"/>
-                <a:ea typeface="HarmonyOS Sans SC Medium" panose="00000600000000000000" charset="-122"/>
-                <a:cs typeface="HarmonyOS Sans SC Medium" panose="00000600000000000000" charset="-122"/>
-                <a:sym typeface="HarmonyOS Sans SC Medium" panose="00000600000000000000" charset="-122"/>
-              </a:rPr>
-              <a:t>Higher-risk requirements and stronger techniques are processed first.</a:t>
-            </a:r>
-            <a:endParaRPr lang="en-US" altLang="zh-CN" sz="1200" dirty="0">
-              <a:solidFill>
-                <a:srgbClr val="846749"/>
-              </a:solidFill>
-              <a:latin typeface="HarmonyOS Sans SC Medium" panose="00000600000000000000" charset="-122"/>
-              <a:ea typeface="HarmonyOS Sans SC Medium" panose="00000600000000000000" charset="-122"/>
-              <a:cs typeface="HarmonyOS Sans SC Medium" panose="00000600000000000000" charset="-122"/>
-              <a:sym typeface="HarmonyOS Sans SC Medium" panose="00000600000000000000" charset="-122"/>
-            </a:endParaRPr>
-          </a:p>
-          <a:p>
-            <a:pPr indent="0" fontAlgn="auto">
-              <a:lnSpc>
-                <a:spcPts val="2000"/>
-              </a:lnSpc>
-            </a:pPr>
-            <a:r>
-              <a:rPr lang="en-US" altLang="zh-CN" sz="1200" b="1" dirty="0">
-                <a:solidFill>
-                  <a:srgbClr val="846749"/>
-                </a:solidFill>
-                <a:latin typeface="HarmonyOS Sans SC Medium" panose="00000600000000000000" charset="-122"/>
-                <a:ea typeface="HarmonyOS Sans SC Medium" panose="00000600000000000000" charset="-122"/>
-                <a:cs typeface="HarmonyOS Sans SC Medium" panose="00000600000000000000" charset="-122"/>
-                <a:sym typeface="HarmonyOS Sans SC Medium" panose="00000600000000000000" charset="-122"/>
-              </a:rPr>
-              <a:t>Stage 2 — Risk-Based Reduction</a:t>
-            </a:r>
-            <a:endParaRPr lang="en-US" altLang="zh-CN" sz="1200" b="1" dirty="0">
-              <a:solidFill>
-                <a:srgbClr val="846749"/>
-              </a:solidFill>
-              <a:latin typeface="HarmonyOS Sans SC Medium" panose="00000600000000000000" charset="-122"/>
-              <a:ea typeface="HarmonyOS Sans SC Medium" panose="00000600000000000000" charset="-122"/>
-              <a:cs typeface="HarmonyOS Sans SC Medium" panose="00000600000000000000" charset="-122"/>
-              <a:sym typeface="HarmonyOS Sans SC Medium" panose="00000600000000000000" charset="-122"/>
-            </a:endParaRPr>
-          </a:p>
-          <a:p>
-            <a:pPr indent="0" fontAlgn="auto">
-              <a:lnSpc>
-                <a:spcPts val="1600"/>
-              </a:lnSpc>
-            </a:pPr>
-            <a:r>
-              <a:rPr lang="en-US" altLang="zh-CN" sz="1200" dirty="0">
-                <a:solidFill>
-                  <a:srgbClr val="846749"/>
-                </a:solidFill>
-                <a:latin typeface="HarmonyOS Sans SC Medium" panose="00000600000000000000" charset="-122"/>
-                <a:ea typeface="HarmonyOS Sans SC Medium" panose="00000600000000000000" charset="-122"/>
-                <a:cs typeface="HarmonyOS Sans SC Medium" panose="00000600000000000000" charset="-122"/>
-                <a:sym typeface="HarmonyOS Sans SC Medium" panose="00000600000000000000" charset="-122"/>
-              </a:rPr>
-              <a:t>Different reduction policies are applied according to requirement risk:</a:t>
-            </a:r>
-            <a:endParaRPr lang="en-US" altLang="zh-CN" sz="1200" dirty="0">
-              <a:solidFill>
-                <a:srgbClr val="846749"/>
-              </a:solidFill>
-              <a:latin typeface="HarmonyOS Sans SC Medium" panose="00000600000000000000" charset="-122"/>
-              <a:ea typeface="HarmonyOS Sans SC Medium" panose="00000600000000000000" charset="-122"/>
-              <a:cs typeface="HarmonyOS Sans SC Medium" panose="00000600000000000000" charset="-122"/>
-              <a:sym typeface="HarmonyOS Sans SC Medium" panose="00000600000000000000" charset="-122"/>
-            </a:endParaRPr>
-          </a:p>
-          <a:p>
-            <a:pPr marL="171450" indent="-171450" fontAlgn="auto">
-              <a:lnSpc>
-                <a:spcPts val="1600"/>
-              </a:lnSpc>
+              <a:buClrTx/>
+              <a:buSzTx/>
               <a:buFont typeface="Arial" panose="020B0604020202090204" pitchFamily="34" charset="0"/>
               <a:buChar char="•"/>
             </a:pPr>
@@ -7086,67 +7801,7 @@
                 <a:cs typeface="HarmonyOS Sans SC Medium" panose="00000600000000000000" charset="-122"/>
                 <a:sym typeface="HarmonyOS Sans SC Medium" panose="00000600000000000000" charset="-122"/>
               </a:rPr>
-              <a:t>High Risk: retain all generated cases</a:t>
-            </a:r>
-            <a:endParaRPr lang="en-US" altLang="zh-CN" sz="1200" dirty="0">
-              <a:solidFill>
-                <a:srgbClr val="846749"/>
-              </a:solidFill>
-              <a:latin typeface="HarmonyOS Sans SC Medium" panose="00000600000000000000" charset="-122"/>
-              <a:ea typeface="HarmonyOS Sans SC Medium" panose="00000600000000000000" charset="-122"/>
-              <a:cs typeface="HarmonyOS Sans SC Medium" panose="00000600000000000000" charset="-122"/>
-              <a:sym typeface="HarmonyOS Sans SC Medium" panose="00000600000000000000" charset="-122"/>
-            </a:endParaRPr>
-          </a:p>
-          <a:p>
-            <a:pPr marL="171450" indent="-171450" fontAlgn="auto">
-              <a:lnSpc>
-                <a:spcPts val="1600"/>
-              </a:lnSpc>
-              <a:buFont typeface="Arial" panose="020B0604020202090204" pitchFamily="34" charset="0"/>
-              <a:buChar char="•"/>
-            </a:pPr>
-            <a:r>
-              <a:rPr lang="en-US" altLang="zh-CN" sz="1200" dirty="0">
-                <a:solidFill>
-                  <a:srgbClr val="846749"/>
-                </a:solidFill>
-                <a:latin typeface="HarmonyOS Sans SC Medium" panose="00000600000000000000" charset="-122"/>
-                <a:ea typeface="HarmonyOS Sans SC Medium" panose="00000600000000000000" charset="-122"/>
-                <a:cs typeface="HarmonyOS Sans SC Medium" panose="00000600000000000000" charset="-122"/>
-                <a:sym typeface="HarmonyOS Sans SC Medium" panose="00000600000000000000" charset="-122"/>
-              </a:rPr>
-              <a:t>Medium Risk: keep one representative per coverage type and retain all Decision Table and State-Transition cases</a:t>
-            </a:r>
-            <a:endParaRPr lang="en-US" altLang="zh-CN" sz="1200" dirty="0">
-              <a:solidFill>
-                <a:srgbClr val="846749"/>
-              </a:solidFill>
-              <a:latin typeface="HarmonyOS Sans SC Medium" panose="00000600000000000000" charset="-122"/>
-              <a:ea typeface="HarmonyOS Sans SC Medium" panose="00000600000000000000" charset="-122"/>
-              <a:cs typeface="HarmonyOS Sans SC Medium" panose="00000600000000000000" charset="-122"/>
-              <a:sym typeface="HarmonyOS Sans SC Medium" panose="00000600000000000000" charset="-122"/>
-            </a:endParaRPr>
-          </a:p>
-          <a:p>
-            <a:pPr marL="171450" indent="-171450" fontAlgn="auto">
-              <a:lnSpc>
-                <a:spcPts val="1600"/>
-              </a:lnSpc>
-              <a:buFont typeface="Arial" panose="020B0604020202090204" pitchFamily="34" charset="0"/>
-              <a:buChar char="•"/>
-            </a:pPr>
-            <a:r>
-              <a:rPr lang="en-US" altLang="zh-CN" sz="1200" dirty="0">
-                <a:solidFill>
-                  <a:srgbClr val="846749"/>
-                </a:solidFill>
-                <a:latin typeface="HarmonyOS Sans SC Medium" panose="00000600000000000000" charset="-122"/>
-                <a:ea typeface="HarmonyOS Sans SC Medium" panose="00000600000000000000" charset="-122"/>
-                <a:cs typeface="HarmonyOS Sans SC Medium" panose="00000600000000000000" charset="-122"/>
-                <a:sym typeface="HarmonyOS Sans SC Medium" panose="00000600000000000000" charset="-122"/>
-              </a:rPr>
-              <a:t>Low Risk: remove redundant cases while ensuring minimum coverage remains</a:t>
+              <a:t>Adjust coverage decisions manually</a:t>
             </a:r>
             <a:endParaRPr lang="en-US" altLang="zh-CN" sz="1200" dirty="0">
               <a:solidFill>
@@ -7169,7 +7824,7 @@
         <p:spPr>
           <a:xfrm>
             <a:off x="7520940" y="1457960"/>
-            <a:ext cx="3058795" cy="460375"/>
+            <a:ext cx="3951605" cy="460375"/>
           </a:xfrm>
           <a:prstGeom prst="rect">
             <a:avLst/>
@@ -7194,7 +7849,7 @@
                 <a:ea typeface="HarmonyOS Sans SC Medium" panose="00000600000000000000" charset="-122"/>
                 <a:cs typeface="HarmonyOS Sans SC Medium" panose="00000600000000000000" charset="-122"/>
               </a:rPr>
-              <a:t>Optimisation Result</a:t>
+              <a:t>Automatic Re-Generation</a:t>
             </a:r>
             <a:endParaRPr lang="en-US" altLang="zh-CN" sz="2400">
               <a:solidFill>
@@ -7216,7 +7871,7 @@
         <p:spPr>
           <a:xfrm>
             <a:off x="7520940" y="2056130"/>
-            <a:ext cx="4671060" cy="2745740"/>
+            <a:ext cx="4173220" cy="1861185"/>
           </a:xfrm>
           <a:prstGeom prst="rect">
             <a:avLst/>
@@ -7228,15 +7883,15 @@
             <a:spAutoFit/>
           </a:bodyPr>
           <a:p>
-            <a:pPr marL="171450" indent="-171450">
+            <a:pPr indent="0">
               <a:lnSpc>
                 <a:spcPct val="160000"/>
               </a:lnSpc>
               <a:buFont typeface="Arial" panose="020B0604020202090204" pitchFamily="34" charset="0"/>
-              <a:buChar char="•"/>
+              <a:buNone/>
             </a:pPr>
             <a:r>
-              <a:rPr lang="en-US" altLang="zh-CN" sz="1200" b="1" dirty="0">
+              <a:rPr lang="en-US" altLang="zh-CN" sz="1200" dirty="0">
                 <a:solidFill>
                   <a:srgbClr val="846749"/>
                 </a:solidFill>
@@ -7245,9 +7900,9 @@
                 <a:cs typeface="HarmonyOS Sans SC Medium" panose="00000600000000000000" charset="-122"/>
                 <a:sym typeface="HarmonyOS Sans SC Medium" panose="00000600000000000000" charset="-122"/>
               </a:rPr>
-              <a:t>Black-box Cases</a:t>
-            </a:r>
-            <a:endParaRPr lang="en-US" altLang="zh-CN" sz="1200" b="1" dirty="0">
+              <a:t>Changes propagate automatically through downstream stages:</a:t>
+            </a:r>
+            <a:endParaRPr lang="en-US" altLang="zh-CN" sz="1200" dirty="0">
               <a:solidFill>
                 <a:srgbClr val="846749"/>
               </a:solidFill>
@@ -7258,10 +7913,14 @@
             </a:endParaRPr>
           </a:p>
           <a:p>
-            <a:pPr>
+            <a:pPr marL="171450" indent="-171450" algn="l">
               <a:lnSpc>
                 <a:spcPct val="160000"/>
               </a:lnSpc>
+              <a:buClrTx/>
+              <a:buSzTx/>
+              <a:buFont typeface="Arial" panose="020B0604020202090204" pitchFamily="34" charset="0"/>
+              <a:buChar char="•"/>
             </a:pPr>
             <a:r>
               <a:rPr lang="en-US" altLang="zh-CN" sz="1200" dirty="0">
@@ -7273,10 +7932,30 @@
                 <a:cs typeface="HarmonyOS Sans SC Medium" panose="00000600000000000000" charset="-122"/>
                 <a:sym typeface="HarmonyOS Sans SC Medium" panose="00000600000000000000" charset="-122"/>
               </a:rPr>
-              <a:t>   61 generated cases </a:t>
-            </a:r>
-            <a:r>
-              <a:rPr lang="en-US" altLang="en-US" sz="1200" dirty="0">
+              <a:t>Editing invalidates dependent artefacts</a:t>
+            </a:r>
+            <a:endParaRPr lang="en-US" altLang="zh-CN" sz="1200" dirty="0">
+              <a:solidFill>
+                <a:srgbClr val="846749"/>
+              </a:solidFill>
+              <a:latin typeface="HarmonyOS Sans SC Medium" panose="00000600000000000000" charset="-122"/>
+              <a:ea typeface="HarmonyOS Sans SC Medium" panose="00000600000000000000" charset="-122"/>
+              <a:cs typeface="HarmonyOS Sans SC Medium" panose="00000600000000000000" charset="-122"/>
+              <a:sym typeface="HarmonyOS Sans SC Medium" panose="00000600000000000000" charset="-122"/>
+            </a:endParaRPr>
+          </a:p>
+          <a:p>
+            <a:pPr marL="171450" indent="-171450" algn="l">
+              <a:lnSpc>
+                <a:spcPct val="160000"/>
+              </a:lnSpc>
+              <a:buClrTx/>
+              <a:buSzTx/>
+              <a:buFont typeface="Arial" panose="020B0604020202090204" pitchFamily="34" charset="0"/>
+              <a:buChar char="•"/>
+            </a:pPr>
+            <a:r>
+              <a:rPr lang="en-US" altLang="zh-CN" sz="1200" dirty="0">
                 <a:solidFill>
                   <a:srgbClr val="846749"/>
                 </a:solidFill>
@@ -7285,8 +7964,28 @@
                 <a:cs typeface="HarmonyOS Sans SC Medium" panose="00000600000000000000" charset="-122"/>
                 <a:sym typeface="HarmonyOS Sans SC Medium" panose="00000600000000000000" charset="-122"/>
               </a:rPr>
-              <a:t>→</a:t>
-            </a:r>
+              <a:t>Later workflow steps are automatically recomputed</a:t>
+            </a:r>
+            <a:endParaRPr lang="en-US" altLang="zh-CN" sz="1200" dirty="0">
+              <a:solidFill>
+                <a:srgbClr val="846749"/>
+              </a:solidFill>
+              <a:latin typeface="HarmonyOS Sans SC Medium" panose="00000600000000000000" charset="-122"/>
+              <a:ea typeface="HarmonyOS Sans SC Medium" panose="00000600000000000000" charset="-122"/>
+              <a:cs typeface="HarmonyOS Sans SC Medium" panose="00000600000000000000" charset="-122"/>
+              <a:sym typeface="HarmonyOS Sans SC Medium" panose="00000600000000000000" charset="-122"/>
+            </a:endParaRPr>
+          </a:p>
+          <a:p>
+            <a:pPr marL="171450" indent="-171450" algn="l">
+              <a:lnSpc>
+                <a:spcPct val="160000"/>
+              </a:lnSpc>
+              <a:buClrTx/>
+              <a:buSzTx/>
+              <a:buFont typeface="Arial" panose="020B0604020202090204" pitchFamily="34" charset="0"/>
+              <a:buChar char="•"/>
+            </a:pPr>
             <a:r>
               <a:rPr lang="en-US" altLang="zh-CN" sz="1200" dirty="0">
                 <a:solidFill>
@@ -7297,7 +7996,7 @@
                 <a:cs typeface="HarmonyOS Sans SC Medium" panose="00000600000000000000" charset="-122"/>
                 <a:sym typeface="HarmonyOS Sans SC Medium" panose="00000600000000000000" charset="-122"/>
               </a:rPr>
-              <a:t> 57 retained cases</a:t>
+              <a:t>Users receive visual feedback when regeneration is required</a:t>
             </a:r>
             <a:endParaRPr lang="en-US" altLang="zh-CN" sz="1200" dirty="0">
               <a:solidFill>
@@ -7309,16 +8008,325 @@
               <a:sym typeface="HarmonyOS Sans SC Medium" panose="00000600000000000000" charset="-122"/>
             </a:endParaRPr>
           </a:p>
-          <a:p>
-            <a:pPr marL="171450" indent="-171450">
+        </p:txBody>
+      </p:sp>
+      <p:sp>
+        <p:nvSpPr>
+          <p:cNvPr id="7" name="椭圆 6"/>
+          <p:cNvSpPr/>
+          <p:nvPr/>
+        </p:nvSpPr>
+        <p:spPr>
+          <a:xfrm>
+            <a:off x="956310" y="1852295"/>
+            <a:ext cx="824230" cy="824230"/>
+          </a:xfrm>
+          <a:prstGeom prst="ellipse">
+            <a:avLst/>
+          </a:prstGeom>
+          <a:solidFill>
+            <a:srgbClr val="D36B0B"/>
+          </a:solidFill>
+          <a:ln>
+            <a:noFill/>
+          </a:ln>
+        </p:spPr>
+        <p:style>
+          <a:lnRef idx="2">
+            <a:schemeClr val="accent1">
+              <a:shade val="50000"/>
+            </a:schemeClr>
+          </a:lnRef>
+          <a:fillRef idx="1">
+            <a:schemeClr val="accent1"/>
+          </a:fillRef>
+          <a:effectRef idx="0">
+            <a:schemeClr val="accent1"/>
+          </a:effectRef>
+          <a:fontRef idx="minor">
+            <a:schemeClr val="lt1"/>
+          </a:fontRef>
+        </p:style>
+        <p:txBody>
+          <a:bodyPr rtlCol="0" anchor="ctr"/>
+          <a:p>
+            <a:pPr algn="ctr"/>
+            <a:endParaRPr lang="zh-CN" altLang="en-US">
+              <a:solidFill>
+                <a:srgbClr val="846749"/>
+              </a:solidFill>
+              <a:latin typeface="HarmonyOS Sans SC Medium" panose="00000600000000000000" charset="-122"/>
+              <a:ea typeface="HarmonyOS Sans SC Medium" panose="00000600000000000000" charset="-122"/>
+              <a:cs typeface="HarmonyOS Sans SC Medium" panose="00000600000000000000" charset="-122"/>
+            </a:endParaRPr>
+          </a:p>
+        </p:txBody>
+      </p:sp>
+      <p:pic>
+        <p:nvPicPr>
+          <p:cNvPr id="42" name="图片 41" descr="tongjiziliaoICO"/>
+          <p:cNvPicPr>
+            <a:picLocks noChangeAspect="1"/>
+          </p:cNvPicPr>
+          <p:nvPr/>
+        </p:nvPicPr>
+        <p:blipFill>
+          <a:blip r:embed="rId2">
+            <a:extLst>
+              <a:ext uri="{96DAC541-7B7A-43D3-8B79-37D633B846F1}">
+                <asvg:svgBlip xmlns:asvg="http://schemas.microsoft.com/office/drawing/2016/SVG/main" r:embed="rId3"/>
+              </a:ext>
+            </a:extLst>
+          </a:blip>
+          <a:stretch>
+            <a:fillRect/>
+          </a:stretch>
+        </p:blipFill>
+        <p:spPr>
+          <a:xfrm>
+            <a:off x="1050925" y="1959610"/>
+            <a:ext cx="609600" cy="609600"/>
+          </a:xfrm>
+          <a:prstGeom prst="rect">
+            <a:avLst/>
+          </a:prstGeom>
+        </p:spPr>
+      </p:pic>
+      <p:sp>
+        <p:nvSpPr>
+          <p:cNvPr id="37" name="椭圆 36"/>
+          <p:cNvSpPr/>
+          <p:nvPr/>
+        </p:nvSpPr>
+        <p:spPr>
+          <a:xfrm>
+            <a:off x="956310" y="4183380"/>
+            <a:ext cx="824230" cy="824230"/>
+          </a:xfrm>
+          <a:prstGeom prst="ellipse">
+            <a:avLst/>
+          </a:prstGeom>
+          <a:solidFill>
+            <a:srgbClr val="D36B0B"/>
+          </a:solidFill>
+          <a:ln>
+            <a:noFill/>
+          </a:ln>
+        </p:spPr>
+        <p:style>
+          <a:lnRef idx="2">
+            <a:schemeClr val="accent1">
+              <a:shade val="50000"/>
+            </a:schemeClr>
+          </a:lnRef>
+          <a:fillRef idx="1">
+            <a:schemeClr val="accent1"/>
+          </a:fillRef>
+          <a:effectRef idx="0">
+            <a:schemeClr val="accent1"/>
+          </a:effectRef>
+          <a:fontRef idx="minor">
+            <a:schemeClr val="lt1"/>
+          </a:fontRef>
+        </p:style>
+        <p:txBody>
+          <a:bodyPr rtlCol="0" anchor="ctr"/>
+          <a:p>
+            <a:pPr algn="ctr"/>
+            <a:endParaRPr lang="zh-CN" altLang="en-US">
+              <a:solidFill>
+                <a:srgbClr val="846749"/>
+              </a:solidFill>
+              <a:latin typeface="HarmonyOS Sans SC Medium" panose="00000600000000000000" charset="-122"/>
+              <a:ea typeface="HarmonyOS Sans SC Medium" panose="00000600000000000000" charset="-122"/>
+              <a:cs typeface="HarmonyOS Sans SC Medium" panose="00000600000000000000" charset="-122"/>
+            </a:endParaRPr>
+          </a:p>
+        </p:txBody>
+      </p:sp>
+      <p:pic>
+        <p:nvPicPr>
+          <p:cNvPr id="38" name="图片 37" descr="shujubaobiaoICO"/>
+          <p:cNvPicPr>
+            <a:picLocks noChangeAspect="1"/>
+          </p:cNvPicPr>
+          <p:nvPr/>
+        </p:nvPicPr>
+        <p:blipFill>
+          <a:blip r:embed="rId4"/>
+          <a:stretch>
+            <a:fillRect/>
+          </a:stretch>
+        </p:blipFill>
+        <p:spPr>
+          <a:xfrm>
+            <a:off x="1063625" y="4291965"/>
+            <a:ext cx="609600" cy="609600"/>
+          </a:xfrm>
+          <a:prstGeom prst="rect">
+            <a:avLst/>
+          </a:prstGeom>
+        </p:spPr>
+      </p:pic>
+      <p:sp>
+        <p:nvSpPr>
+          <p:cNvPr id="8" name="椭圆 7"/>
+          <p:cNvSpPr/>
+          <p:nvPr/>
+        </p:nvSpPr>
+        <p:spPr>
+          <a:xfrm>
+            <a:off x="6643370" y="1852295"/>
+            <a:ext cx="824230" cy="824230"/>
+          </a:xfrm>
+          <a:prstGeom prst="ellipse">
+            <a:avLst/>
+          </a:prstGeom>
+          <a:solidFill>
+            <a:srgbClr val="846749"/>
+          </a:solidFill>
+          <a:ln>
+            <a:noFill/>
+          </a:ln>
+        </p:spPr>
+        <p:style>
+          <a:lnRef idx="2">
+            <a:schemeClr val="accent1">
+              <a:shade val="50000"/>
+            </a:schemeClr>
+          </a:lnRef>
+          <a:fillRef idx="1">
+            <a:schemeClr val="accent1"/>
+          </a:fillRef>
+          <a:effectRef idx="0">
+            <a:schemeClr val="accent1"/>
+          </a:effectRef>
+          <a:fontRef idx="minor">
+            <a:schemeClr val="lt1"/>
+          </a:fontRef>
+        </p:style>
+        <p:txBody>
+          <a:bodyPr rtlCol="0" anchor="ctr"/>
+          <a:p>
+            <a:pPr algn="ctr"/>
+            <a:endParaRPr lang="zh-CN" altLang="en-US">
+              <a:solidFill>
+                <a:srgbClr val="846749"/>
+              </a:solidFill>
+              <a:latin typeface="HarmonyOS Sans SC Medium" panose="00000600000000000000" charset="-122"/>
+              <a:ea typeface="HarmonyOS Sans SC Medium" panose="00000600000000000000" charset="-122"/>
+              <a:cs typeface="HarmonyOS Sans SC Medium" panose="00000600000000000000" charset="-122"/>
+            </a:endParaRPr>
+          </a:p>
+        </p:txBody>
+      </p:sp>
+      <p:pic>
+        <p:nvPicPr>
+          <p:cNvPr id="36" name="图片 35" descr="shurumimazhuangtaiICO"/>
+          <p:cNvPicPr>
+            <a:picLocks noChangeAspect="1"/>
+          </p:cNvPicPr>
+          <p:nvPr/>
+        </p:nvPicPr>
+        <p:blipFill>
+          <a:blip r:embed="rId5">
+            <a:extLst>
+              <a:ext uri="{96DAC541-7B7A-43D3-8B79-37D633B846F1}">
+                <asvg:svgBlip xmlns:asvg="http://schemas.microsoft.com/office/drawing/2016/SVG/main" r:embed="rId6"/>
+              </a:ext>
+            </a:extLst>
+          </a:blip>
+          <a:stretch>
+            <a:fillRect/>
+          </a:stretch>
+        </p:blipFill>
+        <p:spPr>
+          <a:xfrm>
+            <a:off x="6750685" y="1928495"/>
+            <a:ext cx="609600" cy="609600"/>
+          </a:xfrm>
+          <a:prstGeom prst="rect">
+            <a:avLst/>
+          </a:prstGeom>
+        </p:spPr>
+      </p:pic>
+      <p:sp>
+        <p:nvSpPr>
+          <p:cNvPr id="11" name="文本框 10"/>
+          <p:cNvSpPr txBox="1"/>
+          <p:nvPr/>
+        </p:nvSpPr>
+        <p:spPr>
+          <a:xfrm>
+            <a:off x="7520940" y="4055110"/>
+            <a:ext cx="3951605" cy="460375"/>
+          </a:xfrm>
+          <a:prstGeom prst="rect">
+            <a:avLst/>
+          </a:prstGeom>
+        </p:spPr>
+        <p:txBody>
+          <a:bodyPr wrap="square">
+            <a:spAutoFit/>
+          </a:bodyPr>
+          <a:p>
+            <a:pPr algn="l">
+              <a:buClrTx/>
+              <a:buSzTx/>
+              <a:buFontTx/>
+            </a:pPr>
+            <a:r>
+              <a:rPr lang="en-US" altLang="zh-CN" sz="2400">
+                <a:solidFill>
+                  <a:srgbClr val="846749"/>
+                </a:solidFill>
+                <a:latin typeface="HarmonyOS Sans SC Medium" panose="00000600000000000000" charset="-122"/>
+                <a:ea typeface="HarmonyOS Sans SC Medium" panose="00000600000000000000" charset="-122"/>
+                <a:cs typeface="HarmonyOS Sans SC Medium" panose="00000600000000000000" charset="-122"/>
+              </a:rPr>
+              <a:t>Why It Matters</a:t>
+            </a:r>
+            <a:endParaRPr lang="en-US" altLang="zh-CN" sz="2400">
+              <a:solidFill>
+                <a:srgbClr val="846749"/>
+              </a:solidFill>
+              <a:latin typeface="HarmonyOS Sans SC Medium" panose="00000600000000000000" charset="-122"/>
+              <a:ea typeface="HarmonyOS Sans SC Medium" panose="00000600000000000000" charset="-122"/>
+              <a:cs typeface="HarmonyOS Sans SC Medium" panose="00000600000000000000" charset="-122"/>
+            </a:endParaRPr>
+          </a:p>
+        </p:txBody>
+      </p:sp>
+      <p:sp>
+        <p:nvSpPr>
+          <p:cNvPr id="12" name="文本框 11"/>
+          <p:cNvSpPr txBox="1"/>
+          <p:nvPr/>
+        </p:nvSpPr>
+        <p:spPr>
+          <a:xfrm>
+            <a:off x="7520940" y="4653280"/>
+            <a:ext cx="4173220" cy="681355"/>
+          </a:xfrm>
+          <a:prstGeom prst="rect">
+            <a:avLst/>
+          </a:prstGeom>
+          <a:noFill/>
+        </p:spPr>
+        <p:txBody>
+          <a:bodyPr wrap="square" rtlCol="0" anchor="t">
+            <a:spAutoFit/>
+          </a:bodyPr>
+          <a:p>
+            <a:pPr indent="0">
               <a:lnSpc>
                 <a:spcPct val="160000"/>
               </a:lnSpc>
               <a:buFont typeface="Arial" panose="020B0604020202090204" pitchFamily="34" charset="0"/>
-              <a:buChar char="•"/>
+              <a:buNone/>
             </a:pPr>
             <a:r>
-              <a:rPr lang="en-US" altLang="zh-CN" sz="1200" b="1" dirty="0">
+              <a:rPr lang="en-US" altLang="zh-CN" sz="1200" dirty="0">
                 <a:solidFill>
                   <a:srgbClr val="846749"/>
                 </a:solidFill>
@@ -7327,9 +8335,9 @@
                 <a:cs typeface="HarmonyOS Sans SC Medium" panose="00000600000000000000" charset="-122"/>
                 <a:sym typeface="HarmonyOS Sans SC Medium" panose="00000600000000000000" charset="-122"/>
               </a:rPr>
-              <a:t>White-box State Cases</a:t>
-            </a:r>
-            <a:endParaRPr lang="en-US" altLang="zh-CN" sz="1200" b="1" dirty="0">
+              <a:t>This design keeps the user in control while preserving automation.</a:t>
+            </a:r>
+            <a:endParaRPr lang="en-US" altLang="zh-CN" sz="1200" dirty="0">
               <a:solidFill>
                 <a:srgbClr val="846749"/>
               </a:solidFill>
@@ -7339,177 +8347,93 @@
               <a:sym typeface="HarmonyOS Sans SC Medium" panose="00000600000000000000" charset="-122"/>
             </a:endParaRPr>
           </a:p>
-          <a:p>
-            <a:pPr>
-              <a:lnSpc>
-                <a:spcPct val="160000"/>
-              </a:lnSpc>
-            </a:pPr>
-            <a:r>
-              <a:rPr lang="en-US" altLang="zh-CN" sz="1200" dirty="0">
-                <a:solidFill>
-                  <a:srgbClr val="846749"/>
-                </a:solidFill>
-                <a:latin typeface="HarmonyOS Sans SC Medium" panose="00000600000000000000" charset="-122"/>
-                <a:ea typeface="HarmonyOS Sans SC Medium" panose="00000600000000000000" charset="-122"/>
-                <a:cs typeface="HarmonyOS Sans SC Medium" panose="00000600000000000000" charset="-122"/>
-                <a:sym typeface="HarmonyOS Sans SC Medium" panose="00000600000000000000" charset="-122"/>
-              </a:rPr>
-              <a:t>   4 state-transition cases retained completely because each    </a:t>
-            </a:r>
-            <a:endParaRPr lang="en-US" altLang="zh-CN" sz="1200" dirty="0">
+        </p:txBody>
+      </p:sp>
+      <p:sp>
+        <p:nvSpPr>
+          <p:cNvPr id="14" name="椭圆 13"/>
+          <p:cNvSpPr/>
+          <p:nvPr/>
+        </p:nvSpPr>
+        <p:spPr>
+          <a:xfrm>
+            <a:off x="6615430" y="4152900"/>
+            <a:ext cx="824230" cy="824230"/>
+          </a:xfrm>
+          <a:prstGeom prst="ellipse">
+            <a:avLst/>
+          </a:prstGeom>
+          <a:solidFill>
+            <a:srgbClr val="846749"/>
+          </a:solidFill>
+          <a:ln>
+            <a:noFill/>
+          </a:ln>
+        </p:spPr>
+        <p:style>
+          <a:lnRef idx="2">
+            <a:schemeClr val="accent1">
+              <a:shade val="50000"/>
+            </a:schemeClr>
+          </a:lnRef>
+          <a:fillRef idx="1">
+            <a:schemeClr val="accent1"/>
+          </a:fillRef>
+          <a:effectRef idx="0">
+            <a:schemeClr val="accent1"/>
+          </a:effectRef>
+          <a:fontRef idx="minor">
+            <a:schemeClr val="lt1"/>
+          </a:fontRef>
+        </p:style>
+        <p:txBody>
+          <a:bodyPr rtlCol="0" anchor="ctr"/>
+          <a:p>
+            <a:pPr algn="ctr"/>
+            <a:endParaRPr lang="zh-CN" altLang="en-US">
               <a:solidFill>
                 <a:srgbClr val="846749"/>
               </a:solidFill>
               <a:latin typeface="HarmonyOS Sans SC Medium" panose="00000600000000000000" charset="-122"/>
               <a:ea typeface="HarmonyOS Sans SC Medium" panose="00000600000000000000" charset="-122"/>
               <a:cs typeface="HarmonyOS Sans SC Medium" panose="00000600000000000000" charset="-122"/>
-              <a:sym typeface="HarmonyOS Sans SC Medium" panose="00000600000000000000" charset="-122"/>
-            </a:endParaRPr>
-          </a:p>
-          <a:p>
-            <a:pPr>
-              <a:lnSpc>
-                <a:spcPct val="160000"/>
-              </a:lnSpc>
-            </a:pPr>
-            <a:r>
-              <a:rPr lang="en-US" altLang="zh-CN" sz="1200" dirty="0">
-                <a:solidFill>
-                  <a:srgbClr val="846749"/>
-                </a:solidFill>
-                <a:latin typeface="HarmonyOS Sans SC Medium" panose="00000600000000000000" charset="-122"/>
-                <a:ea typeface="HarmonyOS Sans SC Medium" panose="00000600000000000000" charset="-122"/>
-                <a:cs typeface="HarmonyOS Sans SC Medium" panose="00000600000000000000" charset="-122"/>
-                <a:sym typeface="HarmonyOS Sans SC Medium" panose="00000600000000000000" charset="-122"/>
-              </a:rPr>
-              <a:t>   case represents a unique workflow edge</a:t>
-            </a:r>
-            <a:endParaRPr lang="en-US" altLang="zh-CN" sz="1200" dirty="0">
-              <a:solidFill>
-                <a:srgbClr val="846749"/>
-              </a:solidFill>
-              <a:latin typeface="HarmonyOS Sans SC Medium" panose="00000600000000000000" charset="-122"/>
-              <a:ea typeface="HarmonyOS Sans SC Medium" panose="00000600000000000000" charset="-122"/>
-              <a:cs typeface="HarmonyOS Sans SC Medium" panose="00000600000000000000" charset="-122"/>
-              <a:sym typeface="HarmonyOS Sans SC Medium" panose="00000600000000000000" charset="-122"/>
-            </a:endParaRPr>
-          </a:p>
-          <a:p>
-            <a:pPr marL="171450" indent="-171450">
-              <a:lnSpc>
-                <a:spcPct val="160000"/>
-              </a:lnSpc>
-              <a:buFont typeface="Arial" panose="020B0604020202090204" pitchFamily="34" charset="0"/>
-              <a:buChar char="•"/>
-            </a:pPr>
-            <a:r>
-              <a:rPr lang="en-US" altLang="zh-CN" sz="1200" b="1" dirty="0">
-                <a:solidFill>
-                  <a:srgbClr val="846749"/>
-                </a:solidFill>
-                <a:latin typeface="HarmonyOS Sans SC Medium" panose="00000600000000000000" charset="-122"/>
-                <a:ea typeface="HarmonyOS Sans SC Medium" panose="00000600000000000000" charset="-122"/>
-                <a:cs typeface="HarmonyOS Sans SC Medium" panose="00000600000000000000" charset="-122"/>
-                <a:sym typeface="HarmonyOS Sans SC Medium" panose="00000600000000000000" charset="-122"/>
-              </a:rPr>
-              <a:t>Final Optimised Suite</a:t>
-            </a:r>
-            <a:endParaRPr lang="en-US" altLang="zh-CN" sz="1200" b="1" dirty="0">
-              <a:solidFill>
-                <a:srgbClr val="846749"/>
-              </a:solidFill>
-              <a:latin typeface="HarmonyOS Sans SC Medium" panose="00000600000000000000" charset="-122"/>
-              <a:ea typeface="HarmonyOS Sans SC Medium" panose="00000600000000000000" charset="-122"/>
-              <a:cs typeface="HarmonyOS Sans SC Medium" panose="00000600000000000000" charset="-122"/>
-              <a:sym typeface="HarmonyOS Sans SC Medium" panose="00000600000000000000" charset="-122"/>
-            </a:endParaRPr>
-          </a:p>
-          <a:p>
-            <a:pPr>
-              <a:lnSpc>
-                <a:spcPct val="160000"/>
-              </a:lnSpc>
-            </a:pPr>
-            <a:r>
-              <a:rPr lang="en-US" altLang="zh-CN" sz="1200" dirty="0">
-                <a:solidFill>
-                  <a:srgbClr val="846749"/>
-                </a:solidFill>
-                <a:latin typeface="HarmonyOS Sans SC Medium" panose="00000600000000000000" charset="-122"/>
-                <a:ea typeface="HarmonyOS Sans SC Medium" panose="00000600000000000000" charset="-122"/>
-                <a:cs typeface="HarmonyOS Sans SC Medium" panose="00000600000000000000" charset="-122"/>
-                <a:sym typeface="HarmonyOS Sans SC Medium" panose="00000600000000000000" charset="-122"/>
-              </a:rPr>
-              <a:t>   65 total cases </a:t>
-            </a:r>
-            <a:r>
-              <a:rPr lang="en-US" altLang="en-US" sz="1200" dirty="0">
-                <a:solidFill>
-                  <a:srgbClr val="846749"/>
-                </a:solidFill>
-                <a:latin typeface="HarmonyOS Sans SC Medium" panose="00000600000000000000" charset="-122"/>
-                <a:ea typeface="HarmonyOS Sans SC Medium" panose="00000600000000000000" charset="-122"/>
-                <a:cs typeface="HarmonyOS Sans SC Medium" panose="00000600000000000000" charset="-122"/>
-                <a:sym typeface="HarmonyOS Sans SC Medium" panose="00000600000000000000" charset="-122"/>
-              </a:rPr>
-              <a:t>→</a:t>
-            </a:r>
-            <a:r>
-              <a:rPr lang="en-US" altLang="zh-CN" sz="1200" dirty="0">
-                <a:solidFill>
-                  <a:srgbClr val="846749"/>
-                </a:solidFill>
-                <a:latin typeface="HarmonyOS Sans SC Medium" panose="00000600000000000000" charset="-122"/>
-                <a:ea typeface="HarmonyOS Sans SC Medium" panose="00000600000000000000" charset="-122"/>
-                <a:cs typeface="HarmonyOS Sans SC Medium" panose="00000600000000000000" charset="-122"/>
-                <a:sym typeface="HarmonyOS Sans SC Medium" panose="00000600000000000000" charset="-122"/>
-              </a:rPr>
-              <a:t> 61 retained cases</a:t>
-            </a:r>
-            <a:endParaRPr lang="en-US" altLang="zh-CN" sz="1200" dirty="0">
-              <a:solidFill>
-                <a:srgbClr val="846749"/>
-              </a:solidFill>
-              <a:latin typeface="HarmonyOS Sans SC Medium" panose="00000600000000000000" charset="-122"/>
-              <a:ea typeface="HarmonyOS Sans SC Medium" panose="00000600000000000000" charset="-122"/>
-              <a:cs typeface="HarmonyOS Sans SC Medium" panose="00000600000000000000" charset="-122"/>
-              <a:sym typeface="HarmonyOS Sans SC Medium" panose="00000600000000000000" charset="-122"/>
-            </a:endParaRPr>
-          </a:p>
-          <a:p>
-            <a:pPr>
-              <a:lnSpc>
-                <a:spcPct val="160000"/>
-              </a:lnSpc>
-            </a:pPr>
-            <a:r>
-              <a:rPr lang="en-US" altLang="zh-CN" sz="1200" dirty="0">
-                <a:solidFill>
-                  <a:srgbClr val="846749"/>
-                </a:solidFill>
-                <a:latin typeface="HarmonyOS Sans SC Medium" panose="00000600000000000000" charset="-122"/>
-                <a:ea typeface="HarmonyOS Sans SC Medium" panose="00000600000000000000" charset="-122"/>
-                <a:cs typeface="HarmonyOS Sans SC Medium" panose="00000600000000000000" charset="-122"/>
-                <a:sym typeface="HarmonyOS Sans SC Medium" panose="00000600000000000000" charset="-122"/>
-              </a:rPr>
-              <a:t>No requirements or coverage categories were removed during optimisation.</a:t>
-            </a:r>
-            <a:endParaRPr lang="en-US" altLang="zh-CN" sz="1200" dirty="0">
-              <a:solidFill>
-                <a:srgbClr val="846749"/>
-              </a:solidFill>
-              <a:latin typeface="HarmonyOS Sans SC Medium" panose="00000600000000000000" charset="-122"/>
-              <a:ea typeface="HarmonyOS Sans SC Medium" panose="00000600000000000000" charset="-122"/>
-              <a:cs typeface="HarmonyOS Sans SC Medium" panose="00000600000000000000" charset="-122"/>
-              <a:sym typeface="HarmonyOS Sans SC Medium" panose="00000600000000000000" charset="-122"/>
-            </a:endParaRPr>
-          </a:p>
-        </p:txBody>
-      </p:sp>
+            </a:endParaRPr>
+          </a:p>
+        </p:txBody>
+      </p:sp>
+      <p:pic>
+        <p:nvPicPr>
+          <p:cNvPr id="15" name="图片 14" descr="huodongguanliICO"/>
+          <p:cNvPicPr>
+            <a:picLocks noChangeAspect="1"/>
+          </p:cNvPicPr>
+          <p:nvPr/>
+        </p:nvPicPr>
+        <p:blipFill>
+          <a:blip r:embed="rId7">
+            <a:extLst>
+              <a:ext uri="{96DAC541-7B7A-43D3-8B79-37D633B846F1}">
+                <asvg:svgBlip xmlns:asvg="http://schemas.microsoft.com/office/drawing/2016/SVG/main" r:embed="rId8"/>
+              </a:ext>
+            </a:extLst>
+          </a:blip>
+          <a:stretch>
+            <a:fillRect/>
+          </a:stretch>
+        </p:blipFill>
+        <p:spPr>
+          <a:xfrm>
+            <a:off x="6722745" y="4260215"/>
+            <a:ext cx="609600" cy="609600"/>
+          </a:xfrm>
+          <a:prstGeom prst="rect">
+            <a:avLst/>
+          </a:prstGeom>
+        </p:spPr>
+      </p:pic>
     </p:spTree>
     <p:custDataLst>
-      <p:tags r:id="rId2"/>
+      <p:tags r:id="rId9"/>
     </p:custDataLst>
   </p:cSld>
   <p:clrMapOvr>
@@ -7573,8 +8497,8 @@
         </p:nvSpPr>
         <p:spPr>
           <a:xfrm>
-            <a:off x="1485900" y="434340"/>
-            <a:ext cx="7701915" cy="583565"/>
+            <a:off x="1485900" y="516890"/>
+            <a:ext cx="7666990" cy="583565"/>
           </a:xfrm>
           <a:prstGeom prst="rect">
             <a:avLst/>
@@ -7596,7 +8520,19 @@
                 <a:cs typeface="HarmonyOS Sans SC Medium" panose="00000600000000000000" charset="-122"/>
                 <a:sym typeface="+mn-ea"/>
               </a:rPr>
-              <a:t>Test Design —— Interactive Review </a:t>
+              <a:t>Test Design —— </a:t>
+            </a:r>
+            <a:r>
+              <a:rPr lang="en-US" altLang="zh-CN" sz="3200">
+                <a:solidFill>
+                  <a:srgbClr val="846749"/>
+                </a:solidFill>
+                <a:latin typeface="HarmonyOS Sans SC Medium" panose="00000600000000000000" charset="-122"/>
+                <a:ea typeface="HarmonyOS Sans SC Medium" panose="00000600000000000000" charset="-122"/>
+                <a:cs typeface="HarmonyOS Sans SC Medium" panose="00000600000000000000" charset="-122"/>
+                <a:sym typeface="+mn-ea"/>
+              </a:rPr>
+              <a:t>Traceability</a:t>
             </a:r>
             <a:endParaRPr lang="en-US" altLang="zh-CN" sz="3200">
               <a:solidFill>
@@ -7667,7 +8603,7 @@
         </p:nvSpPr>
         <p:spPr>
           <a:xfrm>
-            <a:off x="692785" y="434340"/>
+            <a:off x="704215" y="419735"/>
             <a:ext cx="731520" cy="645160"/>
           </a:xfrm>
           <a:prstGeom prst="rect">
@@ -7700,14 +8636,14 @@
       </p:sp>
       <p:sp>
         <p:nvSpPr>
-          <p:cNvPr id="5" name="文本框 4"/>
+          <p:cNvPr id="7" name="文本框 6"/>
           <p:cNvSpPr txBox="1"/>
           <p:nvPr/>
         </p:nvSpPr>
         <p:spPr>
           <a:xfrm>
-            <a:off x="1863408" y="1388110"/>
-            <a:ext cx="3841115" cy="460375"/>
+            <a:off x="4707255" y="1769745"/>
+            <a:ext cx="4768850" cy="583565"/>
           </a:xfrm>
           <a:prstGeom prst="rect">
             <a:avLst/>
@@ -7715,31 +8651,28 @@
           <a:noFill/>
         </p:spPr>
         <p:txBody>
-          <a:bodyPr wrap="none" rtlCol="0" anchor="t">
+          <a:bodyPr wrap="square" rtlCol="0">
             <a:spAutoFit/>
           </a:bodyPr>
           <a:p>
-            <a:pPr algn="ctr"/>
-            <a:r>
-              <a:rPr lang="en-US" altLang="zh-CN" sz="2400">
-                <a:solidFill>
-                  <a:srgbClr val="846749"/>
-                </a:solidFill>
-                <a:latin typeface="HarmonyOS Sans SC Medium" panose="00000600000000000000" charset="-122"/>
-                <a:ea typeface="HarmonyOS Sans SC Medium" panose="00000600000000000000" charset="-122"/>
-                <a:cs typeface="HarmonyOS Sans SC Medium" panose="00000600000000000000" charset="-122"/>
-                <a:sym typeface="+mn-ea"/>
-              </a:rPr>
-              <a:t>Why Human-in-the-Loop</a:t>
-            </a:r>
-            <a:endParaRPr lang="en-US" altLang="zh-CN" sz="2400">
+            <a:r>
+              <a:rPr lang="en-US" altLang="zh-CN" sz="3200">
+                <a:solidFill>
+                  <a:srgbClr val="846749"/>
+                </a:solidFill>
+                <a:latin typeface="HarmonyOS Sans SC Medium" panose="00000600000000000000" charset="-122"/>
+                <a:ea typeface="HarmonyOS Sans SC Medium" panose="00000600000000000000" charset="-122"/>
+                <a:cs typeface="HarmonyOS Sans SC Medium" panose="00000600000000000000" charset="-122"/>
+              </a:rPr>
+              <a:t>Traceability Design</a:t>
+            </a:r>
+            <a:endParaRPr lang="en-US" altLang="zh-CN" sz="3200">
               <a:solidFill>
                 <a:srgbClr val="846749"/>
               </a:solidFill>
               <a:latin typeface="HarmonyOS Sans SC Medium" panose="00000600000000000000" charset="-122"/>
               <a:ea typeface="HarmonyOS Sans SC Medium" panose="00000600000000000000" charset="-122"/>
               <a:cs typeface="HarmonyOS Sans SC Medium" panose="00000600000000000000" charset="-122"/>
-              <a:sym typeface="+mn-ea"/>
             </a:endParaRPr>
           </a:p>
         </p:txBody>
@@ -7752,8 +8685,8 @@
         </p:nvSpPr>
         <p:spPr>
           <a:xfrm>
-            <a:off x="1860550" y="1987550"/>
-            <a:ext cx="4582795" cy="1565910"/>
+            <a:off x="4707255" y="2353310"/>
+            <a:ext cx="7484745" cy="3386455"/>
           </a:xfrm>
           <a:prstGeom prst="rect">
             <a:avLst/>
@@ -7770,11 +8703,11 @@
           <a:p>
             <a:pPr>
               <a:lnSpc>
-                <a:spcPct val="160000"/>
+                <a:spcPct val="170000"/>
               </a:lnSpc>
             </a:pPr>
             <a:r>
-              <a:rPr lang="en-US" altLang="zh-CN" sz="1200" dirty="0">
+              <a:rPr lang="en-US" altLang="zh-CN" sz="1400" b="1" dirty="0">
                 <a:solidFill>
                   <a:srgbClr val="846749"/>
                 </a:solidFill>
@@ -7783,9 +8716,93 @@
                 <a:cs typeface="HarmonyOS Sans SC Medium" panose="00000600000000000000" charset="-122"/>
                 <a:sym typeface="HarmonyOS Sans SC Medium" panose="00000600000000000000" charset="-122"/>
               </a:rPr>
-              <a:t>Automatically generated artefacts should remain editable because test design still requires human judgement and domain knowledge.</a:t>
-            </a:r>
-            <a:endParaRPr lang="en-US" altLang="zh-CN" sz="1200" dirty="0">
+              <a:t>Trace chain:</a:t>
+            </a:r>
+            <a:r>
+              <a:rPr lang="en-US" altLang="zh-CN" sz="1400" dirty="0">
+                <a:solidFill>
+                  <a:srgbClr val="846749"/>
+                </a:solidFill>
+                <a:latin typeface="HarmonyOS Sans SC Medium" panose="00000600000000000000" charset="-122"/>
+                <a:ea typeface="HarmonyOS Sans SC Medium" panose="00000600000000000000" charset="-122"/>
+                <a:cs typeface="HarmonyOS Sans SC Medium" panose="00000600000000000000" charset="-122"/>
+                <a:sym typeface="HarmonyOS Sans SC Medium" panose="00000600000000000000" charset="-122"/>
+              </a:rPr>
+              <a:t> requirement </a:t>
+            </a:r>
+            <a:r>
+              <a:rPr lang="en-US" altLang="en-US" sz="1400" dirty="0">
+                <a:solidFill>
+                  <a:srgbClr val="846749"/>
+                </a:solidFill>
+                <a:latin typeface="HarmonyOS Sans SC Medium" panose="00000600000000000000" charset="-122"/>
+                <a:ea typeface="HarmonyOS Sans SC Medium" panose="00000600000000000000" charset="-122"/>
+                <a:cs typeface="HarmonyOS Sans SC Medium" panose="00000600000000000000" charset="-122"/>
+                <a:sym typeface="HarmonyOS Sans SC Medium" panose="00000600000000000000" charset="-122"/>
+              </a:rPr>
+              <a:t>→</a:t>
+            </a:r>
+            <a:r>
+              <a:rPr lang="en-US" altLang="zh-CN" sz="1400" dirty="0">
+                <a:solidFill>
+                  <a:srgbClr val="846749"/>
+                </a:solidFill>
+                <a:latin typeface="HarmonyOS Sans SC Medium" panose="00000600000000000000" charset="-122"/>
+                <a:ea typeface="HarmonyOS Sans SC Medium" panose="00000600000000000000" charset="-122"/>
+                <a:cs typeface="HarmonyOS Sans SC Medium" panose="00000600000000000000" charset="-122"/>
+                <a:sym typeface="HarmonyOS Sans SC Medium" panose="00000600000000000000" charset="-122"/>
+              </a:rPr>
+              <a:t> coverage item </a:t>
+            </a:r>
+            <a:r>
+              <a:rPr lang="en-US" altLang="en-US" sz="1400" dirty="0">
+                <a:solidFill>
+                  <a:srgbClr val="846749"/>
+                </a:solidFill>
+                <a:latin typeface="HarmonyOS Sans SC Medium" panose="00000600000000000000" charset="-122"/>
+                <a:ea typeface="HarmonyOS Sans SC Medium" panose="00000600000000000000" charset="-122"/>
+                <a:cs typeface="HarmonyOS Sans SC Medium" panose="00000600000000000000" charset="-122"/>
+                <a:sym typeface="HarmonyOS Sans SC Medium" panose="00000600000000000000" charset="-122"/>
+              </a:rPr>
+              <a:t>→</a:t>
+            </a:r>
+            <a:r>
+              <a:rPr lang="en-US" altLang="zh-CN" sz="1400" dirty="0">
+                <a:solidFill>
+                  <a:srgbClr val="846749"/>
+                </a:solidFill>
+                <a:latin typeface="HarmonyOS Sans SC Medium" panose="00000600000000000000" charset="-122"/>
+                <a:ea typeface="HarmonyOS Sans SC Medium" panose="00000600000000000000" charset="-122"/>
+                <a:cs typeface="HarmonyOS Sans SC Medium" panose="00000600000000000000" charset="-122"/>
+                <a:sym typeface="HarmonyOS Sans SC Medium" panose="00000600000000000000" charset="-122"/>
+              </a:rPr>
+              <a:t> generated test case </a:t>
+            </a:r>
+            <a:r>
+              <a:rPr lang="en-US" altLang="en-US" sz="1400" dirty="0">
+                <a:solidFill>
+                  <a:srgbClr val="846749"/>
+                </a:solidFill>
+                <a:latin typeface="HarmonyOS Sans SC Medium" panose="00000600000000000000" charset="-122"/>
+                <a:ea typeface="HarmonyOS Sans SC Medium" panose="00000600000000000000" charset="-122"/>
+                <a:cs typeface="HarmonyOS Sans SC Medium" panose="00000600000000000000" charset="-122"/>
+                <a:sym typeface="HarmonyOS Sans SC Medium" panose="00000600000000000000" charset="-122"/>
+              </a:rPr>
+              <a:t>→ </a:t>
+            </a:r>
+            <a:r>
+              <a:rPr lang="en-US" altLang="zh-CN" sz="1400" dirty="0">
+                <a:solidFill>
+                  <a:srgbClr val="846749"/>
+                </a:solidFill>
+                <a:latin typeface="HarmonyOS Sans SC Medium" panose="00000600000000000000" charset="-122"/>
+                <a:ea typeface="HarmonyOS Sans SC Medium" panose="00000600000000000000" charset="-122"/>
+                <a:cs typeface="HarmonyOS Sans SC Medium" panose="00000600000000000000" charset="-122"/>
+                <a:sym typeface="HarmonyOS Sans SC Medium" panose="00000600000000000000" charset="-122"/>
+              </a:rPr>
+              <a:t>PyTest function.</a:t>
+            </a:r>
+            <a:endParaRPr lang="en-US" altLang="zh-CN" sz="1400" dirty="0">
               <a:solidFill>
                 <a:srgbClr val="846749"/>
               </a:solidFill>
@@ -7798,11 +8815,11 @@
           <a:p>
             <a:pPr>
               <a:lnSpc>
-                <a:spcPct val="160000"/>
+                <a:spcPct val="170000"/>
               </a:lnSpc>
             </a:pPr>
             <a:r>
-              <a:rPr lang="en-US" altLang="zh-CN" sz="1200" dirty="0">
+              <a:rPr lang="en-US" altLang="zh-CN" sz="1400" b="1" dirty="0">
                 <a:solidFill>
                   <a:srgbClr val="846749"/>
                 </a:solidFill>
@@ -7811,9 +8828,9 @@
                 <a:cs typeface="HarmonyOS Sans SC Medium" panose="00000600000000000000" charset="-122"/>
                 <a:sym typeface="HarmonyOS Sans SC Medium" panose="00000600000000000000" charset="-122"/>
               </a:rPr>
-              <a:t>The system therefore allows users to review and modify intermediate outputs before continuing the workflow.</a:t>
-            </a:r>
-            <a:endParaRPr lang="en-US" altLang="zh-CN" sz="1200" dirty="0">
+              <a:t>Counts on the current baseline:</a:t>
+            </a:r>
+            <a:endParaRPr lang="en-US" altLang="zh-CN" sz="1400" b="1" dirty="0">
               <a:solidFill>
                 <a:srgbClr val="846749"/>
               </a:solidFill>
@@ -7823,122 +8840,16 @@
               <a:sym typeface="HarmonyOS Sans SC Medium" panose="00000600000000000000" charset="-122"/>
             </a:endParaRPr>
           </a:p>
-        </p:txBody>
-      </p:sp>
-      <p:sp>
-        <p:nvSpPr>
-          <p:cNvPr id="9" name="文本框 8"/>
-          <p:cNvSpPr txBox="1"/>
-          <p:nvPr/>
-        </p:nvSpPr>
-        <p:spPr>
-          <a:xfrm>
-            <a:off x="1854200" y="3692525"/>
-            <a:ext cx="3851275" cy="460375"/>
-          </a:xfrm>
-          <a:prstGeom prst="rect">
-            <a:avLst/>
-          </a:prstGeom>
-        </p:spPr>
-        <p:txBody>
-          <a:bodyPr wrap="square">
-            <a:spAutoFit/>
-          </a:bodyPr>
-          <a:p>
-            <a:pPr>
-              <a:spcAft>
-                <a:spcPct val="60000"/>
-              </a:spcAft>
-            </a:pPr>
-            <a:r>
-              <a:rPr lang="en-US" altLang="zh-CN" sz="2400">
-                <a:solidFill>
-                  <a:srgbClr val="846749"/>
-                </a:solidFill>
-                <a:latin typeface="HarmonyOS Sans SC Medium" panose="00000600000000000000" charset="-122"/>
-                <a:ea typeface="HarmonyOS Sans SC Medium" panose="00000600000000000000" charset="-122"/>
-                <a:cs typeface="HarmonyOS Sans SC Medium" panose="00000600000000000000" charset="-122"/>
-              </a:rPr>
-              <a:t>Editable Artefacts</a:t>
-            </a:r>
-            <a:endParaRPr lang="en-US" altLang="zh-CN" sz="2400">
-              <a:solidFill>
-                <a:srgbClr val="846749"/>
-              </a:solidFill>
-              <a:latin typeface="HarmonyOS Sans SC Medium" panose="00000600000000000000" charset="-122"/>
-              <a:ea typeface="HarmonyOS Sans SC Medium" panose="00000600000000000000" charset="-122"/>
-              <a:cs typeface="HarmonyOS Sans SC Medium" panose="00000600000000000000" charset="-122"/>
-            </a:endParaRPr>
-          </a:p>
-        </p:txBody>
-      </p:sp>
-      <p:sp>
-        <p:nvSpPr>
-          <p:cNvPr id="25" name="TextBox 11"/>
-          <p:cNvSpPr/>
-          <p:nvPr/>
-        </p:nvSpPr>
-        <p:spPr>
-          <a:xfrm>
-            <a:off x="1854200" y="4291965"/>
-            <a:ext cx="4580255" cy="1861185"/>
-          </a:xfrm>
-          <a:prstGeom prst="rect">
-            <a:avLst/>
-          </a:prstGeom>
-          <a:noFill/>
-          <a:ln w="9525">
-            <a:noFill/>
-          </a:ln>
-        </p:spPr>
-        <p:txBody>
-          <a:bodyPr wrap="square">
-            <a:spAutoFit/>
-          </a:bodyPr>
-          <a:p>
-            <a:pPr algn="l" fontAlgn="auto">
+          <a:p>
+            <a:pPr marL="285750" indent="-285750">
               <a:lnSpc>
-                <a:spcPct val="160000"/>
+                <a:spcPct val="170000"/>
               </a:lnSpc>
-              <a:buClrTx/>
-              <a:buSzTx/>
-              <a:buFontTx/>
-              <a:buNone/>
-            </a:pPr>
-            <a:r>
-              <a:rPr lang="en-US" altLang="zh-CN" sz="1200" dirty="0">
-                <a:solidFill>
-                  <a:srgbClr val="846749"/>
-                </a:solidFill>
-                <a:latin typeface="HarmonyOS Sans SC Medium" panose="00000600000000000000" charset="-122"/>
-                <a:ea typeface="HarmonyOS Sans SC Medium" panose="00000600000000000000" charset="-122"/>
-                <a:cs typeface="HarmonyOS Sans SC Medium" panose="00000600000000000000" charset="-122"/>
-                <a:sym typeface="HarmonyOS Sans SC Medium" panose="00000600000000000000" charset="-122"/>
-              </a:rPr>
-              <a:t>All generated artefacts support direct editing inside the interface:</a:t>
-            </a:r>
-            <a:endParaRPr lang="en-US" altLang="zh-CN" sz="1200" dirty="0">
-              <a:solidFill>
-                <a:srgbClr val="846749"/>
-              </a:solidFill>
-              <a:latin typeface="HarmonyOS Sans SC Medium" panose="00000600000000000000" charset="-122"/>
-              <a:ea typeface="HarmonyOS Sans SC Medium" panose="00000600000000000000" charset="-122"/>
-              <a:cs typeface="HarmonyOS Sans SC Medium" panose="00000600000000000000" charset="-122"/>
-              <a:sym typeface="HarmonyOS Sans SC Medium" panose="00000600000000000000" charset="-122"/>
-            </a:endParaRPr>
-          </a:p>
-          <a:p>
-            <a:pPr marL="171450" indent="-171450" algn="l" fontAlgn="auto">
-              <a:lnSpc>
-                <a:spcPct val="160000"/>
-              </a:lnSpc>
-              <a:buClrTx/>
-              <a:buSzTx/>
               <a:buFont typeface="Arial" panose="020B0604020202090204" pitchFamily="34" charset="0"/>
               <a:buChar char="•"/>
             </a:pPr>
             <a:r>
-              <a:rPr lang="en-US" altLang="zh-CN" sz="1200" dirty="0">
+              <a:rPr lang="en-US" altLang="zh-CN" sz="1400" dirty="0">
                 <a:solidFill>
                   <a:srgbClr val="846749"/>
                 </a:solidFill>
@@ -7947,9 +8858,9 @@
                 <a:cs typeface="HarmonyOS Sans SC Medium" panose="00000600000000000000" charset="-122"/>
                 <a:sym typeface="HarmonyOS Sans SC Medium" panose="00000600000000000000" charset="-122"/>
               </a:rPr>
-              <a:t>Add new rows</a:t>
-            </a:r>
-            <a:endParaRPr lang="en-US" altLang="zh-CN" sz="1200" dirty="0">
+              <a:t>12 requirements.</a:t>
+            </a:r>
+            <a:endParaRPr lang="en-US" altLang="zh-CN" sz="1400" dirty="0">
               <a:solidFill>
                 <a:srgbClr val="846749"/>
               </a:solidFill>
@@ -7960,17 +8871,15 @@
             </a:endParaRPr>
           </a:p>
           <a:p>
-            <a:pPr marL="171450" indent="-171450" algn="l" fontAlgn="auto">
+            <a:pPr marL="285750" indent="-285750">
               <a:lnSpc>
-                <a:spcPct val="160000"/>
+                <a:spcPct val="170000"/>
               </a:lnSpc>
-              <a:buClrTx/>
-              <a:buSzTx/>
               <a:buFont typeface="Arial" panose="020B0604020202090204" pitchFamily="34" charset="0"/>
               <a:buChar char="•"/>
             </a:pPr>
             <a:r>
-              <a:rPr lang="en-US" altLang="zh-CN" sz="1200" dirty="0">
+              <a:rPr lang="en-US" altLang="zh-CN" sz="1400" dirty="0">
                 <a:solidFill>
                   <a:srgbClr val="846749"/>
                 </a:solidFill>
@@ -7979,9 +8888,9 @@
                 <a:cs typeface="HarmonyOS Sans SC Medium" panose="00000600000000000000" charset="-122"/>
                 <a:sym typeface="HarmonyOS Sans SC Medium" panose="00000600000000000000" charset="-122"/>
               </a:rPr>
-              <a:t>Modify generated values</a:t>
-            </a:r>
-            <a:endParaRPr lang="en-US" altLang="zh-CN" sz="1200" dirty="0">
+              <a:t>65 generated test cases (61 black-box + 4 white-box ST).</a:t>
+            </a:r>
+            <a:endParaRPr lang="en-US" altLang="zh-CN" sz="1400" dirty="0">
               <a:solidFill>
                 <a:srgbClr val="846749"/>
               </a:solidFill>
@@ -7992,17 +8901,15 @@
             </a:endParaRPr>
           </a:p>
           <a:p>
-            <a:pPr marL="171450" indent="-171450" algn="l" fontAlgn="auto">
+            <a:pPr marL="285750" indent="-285750">
               <a:lnSpc>
-                <a:spcPct val="160000"/>
+                <a:spcPct val="170000"/>
               </a:lnSpc>
-              <a:buClrTx/>
-              <a:buSzTx/>
               <a:buFont typeface="Arial" panose="020B0604020202090204" pitchFamily="34" charset="0"/>
               <a:buChar char="•"/>
             </a:pPr>
             <a:r>
-              <a:rPr lang="en-US" altLang="zh-CN" sz="1200" dirty="0">
+              <a:rPr lang="en-US" altLang="zh-CN" sz="1400" dirty="0">
                 <a:solidFill>
                   <a:srgbClr val="846749"/>
                 </a:solidFill>
@@ -8011,9 +8918,9 @@
                 <a:cs typeface="HarmonyOS Sans SC Medium" panose="00000600000000000000" charset="-122"/>
                 <a:sym typeface="HarmonyOS Sans SC Medium" panose="00000600000000000000" charset="-122"/>
               </a:rPr>
-              <a:t>Delete unnecessary entries</a:t>
-            </a:r>
-            <a:endParaRPr lang="en-US" altLang="zh-CN" sz="1200" dirty="0">
+              <a:t>30 hand-written PyTest functions.</a:t>
+            </a:r>
+            <a:endParaRPr lang="en-US" altLang="zh-CN" sz="1400" dirty="0">
               <a:solidFill>
                 <a:srgbClr val="846749"/>
               </a:solidFill>
@@ -8024,17 +8931,15 @@
             </a:endParaRPr>
           </a:p>
           <a:p>
-            <a:pPr marL="171450" indent="-171450" algn="l" fontAlgn="auto">
+            <a:pPr marL="285750" indent="-285750">
               <a:lnSpc>
-                <a:spcPct val="160000"/>
+                <a:spcPct val="170000"/>
               </a:lnSpc>
-              <a:buClrTx/>
-              <a:buSzTx/>
               <a:buFont typeface="Arial" panose="020B0604020202090204" pitchFamily="34" charset="0"/>
               <a:buChar char="•"/>
             </a:pPr>
             <a:r>
-              <a:rPr lang="en-US" altLang="zh-CN" sz="1200" dirty="0">
+              <a:rPr lang="en-US" altLang="zh-CN" sz="1400" dirty="0">
                 <a:solidFill>
                   <a:srgbClr val="846749"/>
                 </a:solidFill>
@@ -8043,9 +8948,9 @@
                 <a:cs typeface="HarmonyOS Sans SC Medium" panose="00000600000000000000" charset="-122"/>
                 <a:sym typeface="HarmonyOS Sans SC Medium" panose="00000600000000000000" charset="-122"/>
               </a:rPr>
-              <a:t>Adjust coverage decisions manually</a:t>
-            </a:r>
-            <a:endParaRPr lang="en-US" altLang="zh-CN" sz="1200" dirty="0">
+              <a:t>37 coverage items.</a:t>
+            </a:r>
+            <a:endParaRPr lang="en-US" altLang="zh-CN" sz="1400" dirty="0">
               <a:solidFill>
                 <a:srgbClr val="846749"/>
               </a:solidFill>
@@ -8055,618 +8960,66 @@
               <a:sym typeface="HarmonyOS Sans SC Medium" panose="00000600000000000000" charset="-122"/>
             </a:endParaRPr>
           </a:p>
-        </p:txBody>
-      </p:sp>
-      <p:sp>
-        <p:nvSpPr>
-          <p:cNvPr id="26" name="文本框 25"/>
-          <p:cNvSpPr txBox="1"/>
-          <p:nvPr/>
-        </p:nvSpPr>
-        <p:spPr>
-          <a:xfrm>
-            <a:off x="7520940" y="1457960"/>
-            <a:ext cx="3951605" cy="460375"/>
-          </a:xfrm>
-          <a:prstGeom prst="rect">
-            <a:avLst/>
-          </a:prstGeom>
-        </p:spPr>
-        <p:txBody>
-          <a:bodyPr wrap="square">
-            <a:spAutoFit/>
-          </a:bodyPr>
-          <a:p>
-            <a:pPr algn="ctr">
-              <a:buClrTx/>
-              <a:buSzTx/>
-              <a:buFontTx/>
+          <a:p>
+            <a:pPr>
+              <a:lnSpc>
+                <a:spcPct val="170000"/>
+              </a:lnSpc>
             </a:pPr>
             <a:r>
-              <a:rPr lang="en-US" altLang="zh-CN" sz="2400">
-                <a:solidFill>
-                  <a:srgbClr val="846749"/>
-                </a:solidFill>
-                <a:latin typeface="HarmonyOS Sans SC Medium" panose="00000600000000000000" charset="-122"/>
-                <a:ea typeface="HarmonyOS Sans SC Medium" panose="00000600000000000000" charset="-122"/>
-                <a:cs typeface="HarmonyOS Sans SC Medium" panose="00000600000000000000" charset="-122"/>
-              </a:rPr>
-              <a:t>Automatic Re-Generation</a:t>
-            </a:r>
-            <a:endParaRPr lang="en-US" altLang="zh-CN" sz="2400">
+              <a:rPr lang="en-US" altLang="zh-CN" sz="1400" b="1" dirty="0">
+                <a:solidFill>
+                  <a:srgbClr val="846749"/>
+                </a:solidFill>
+                <a:latin typeface="HarmonyOS Sans SC Medium" panose="00000600000000000000" charset="-122"/>
+                <a:ea typeface="HarmonyOS Sans SC Medium" panose="00000600000000000000" charset="-122"/>
+                <a:cs typeface="HarmonyOS Sans SC Medium" panose="00000600000000000000" charset="-122"/>
+                <a:sym typeface="HarmonyOS Sans SC Medium" panose="00000600000000000000" charset="-122"/>
+              </a:rPr>
+              <a:t>Mechanism: </a:t>
+            </a:r>
+            <a:r>
+              <a:rPr lang="en-US" altLang="zh-CN" sz="1400" dirty="0">
+                <a:solidFill>
+                  <a:srgbClr val="846749"/>
+                </a:solidFill>
+                <a:latin typeface="HarmonyOS Sans SC Medium" panose="00000600000000000000" charset="-122"/>
+                <a:ea typeface="HarmonyOS Sans SC Medium" panose="00000600000000000000" charset="-122"/>
+                <a:cs typeface="HarmonyOS Sans SC Medium" panose="00000600000000000000" charset="-122"/>
+                <a:sym typeface="HarmonyOS Sans SC Medium" panose="00000600000000000000" charset="-122"/>
+              </a:rPr>
+              <a:t>scripts/build_traceability.py regenerates from three sources (the requirement set, the persisted baseline, and the test docstrings) — never maintained by hand.</a:t>
+            </a:r>
+            <a:endParaRPr lang="en-US" altLang="zh-CN" sz="1400" dirty="0">
               <a:solidFill>
                 <a:srgbClr val="846749"/>
               </a:solidFill>
               <a:latin typeface="HarmonyOS Sans SC Medium" panose="00000600000000000000" charset="-122"/>
               <a:ea typeface="HarmonyOS Sans SC Medium" panose="00000600000000000000" charset="-122"/>
               <a:cs typeface="HarmonyOS Sans SC Medium" panose="00000600000000000000" charset="-122"/>
-            </a:endParaRPr>
-          </a:p>
-        </p:txBody>
-      </p:sp>
-      <p:sp>
-        <p:nvSpPr>
-          <p:cNvPr id="27" name="文本框 26"/>
-          <p:cNvSpPr txBox="1"/>
-          <p:nvPr/>
-        </p:nvSpPr>
-        <p:spPr>
-          <a:xfrm>
-            <a:off x="7520940" y="2056130"/>
-            <a:ext cx="4173220" cy="1861185"/>
-          </a:xfrm>
-          <a:prstGeom prst="rect">
-            <a:avLst/>
-          </a:prstGeom>
-          <a:noFill/>
-        </p:spPr>
-        <p:txBody>
-          <a:bodyPr wrap="square" rtlCol="0" anchor="t">
-            <a:spAutoFit/>
-          </a:bodyPr>
-          <a:p>
-            <a:pPr indent="0">
-              <a:lnSpc>
-                <a:spcPct val="160000"/>
-              </a:lnSpc>
-              <a:buFont typeface="Arial" panose="020B0604020202090204" pitchFamily="34" charset="0"/>
-              <a:buNone/>
-            </a:pPr>
-            <a:r>
-              <a:rPr lang="en-US" altLang="zh-CN" sz="1200" dirty="0">
-                <a:solidFill>
-                  <a:srgbClr val="846749"/>
-                </a:solidFill>
-                <a:latin typeface="HarmonyOS Sans SC Medium" panose="00000600000000000000" charset="-122"/>
-                <a:ea typeface="HarmonyOS Sans SC Medium" panose="00000600000000000000" charset="-122"/>
-                <a:cs typeface="HarmonyOS Sans SC Medium" panose="00000600000000000000" charset="-122"/>
-                <a:sym typeface="HarmonyOS Sans SC Medium" panose="00000600000000000000" charset="-122"/>
-              </a:rPr>
-              <a:t>Changes propagate automatically through downstream stages:</a:t>
-            </a:r>
-            <a:endParaRPr lang="en-US" altLang="zh-CN" sz="1200" dirty="0">
-              <a:solidFill>
-                <a:srgbClr val="846749"/>
-              </a:solidFill>
-              <a:latin typeface="HarmonyOS Sans SC Medium" panose="00000600000000000000" charset="-122"/>
-              <a:ea typeface="HarmonyOS Sans SC Medium" panose="00000600000000000000" charset="-122"/>
-              <a:cs typeface="HarmonyOS Sans SC Medium" panose="00000600000000000000" charset="-122"/>
               <a:sym typeface="HarmonyOS Sans SC Medium" panose="00000600000000000000" charset="-122"/>
-            </a:endParaRPr>
-          </a:p>
-          <a:p>
-            <a:pPr marL="171450" indent="-171450" algn="l">
-              <a:lnSpc>
-                <a:spcPct val="160000"/>
-              </a:lnSpc>
-              <a:buClrTx/>
-              <a:buSzTx/>
-              <a:buFont typeface="Arial" panose="020B0604020202090204" pitchFamily="34" charset="0"/>
-              <a:buChar char="•"/>
-            </a:pPr>
-            <a:r>
-              <a:rPr lang="en-US" altLang="zh-CN" sz="1200" dirty="0">
-                <a:solidFill>
-                  <a:srgbClr val="846749"/>
-                </a:solidFill>
-                <a:latin typeface="HarmonyOS Sans SC Medium" panose="00000600000000000000" charset="-122"/>
-                <a:ea typeface="HarmonyOS Sans SC Medium" panose="00000600000000000000" charset="-122"/>
-                <a:cs typeface="HarmonyOS Sans SC Medium" panose="00000600000000000000" charset="-122"/>
-                <a:sym typeface="HarmonyOS Sans SC Medium" panose="00000600000000000000" charset="-122"/>
-              </a:rPr>
-              <a:t>Editing invalidates dependent artefacts</a:t>
-            </a:r>
-            <a:endParaRPr lang="en-US" altLang="zh-CN" sz="1200" dirty="0">
-              <a:solidFill>
-                <a:srgbClr val="846749"/>
-              </a:solidFill>
-              <a:latin typeface="HarmonyOS Sans SC Medium" panose="00000600000000000000" charset="-122"/>
-              <a:ea typeface="HarmonyOS Sans SC Medium" panose="00000600000000000000" charset="-122"/>
-              <a:cs typeface="HarmonyOS Sans SC Medium" panose="00000600000000000000" charset="-122"/>
-              <a:sym typeface="HarmonyOS Sans SC Medium" panose="00000600000000000000" charset="-122"/>
-            </a:endParaRPr>
-          </a:p>
-          <a:p>
-            <a:pPr marL="171450" indent="-171450" algn="l">
-              <a:lnSpc>
-                <a:spcPct val="160000"/>
-              </a:lnSpc>
-              <a:buClrTx/>
-              <a:buSzTx/>
-              <a:buFont typeface="Arial" panose="020B0604020202090204" pitchFamily="34" charset="0"/>
-              <a:buChar char="•"/>
-            </a:pPr>
-            <a:r>
-              <a:rPr lang="en-US" altLang="zh-CN" sz="1200" dirty="0">
-                <a:solidFill>
-                  <a:srgbClr val="846749"/>
-                </a:solidFill>
-                <a:latin typeface="HarmonyOS Sans SC Medium" panose="00000600000000000000" charset="-122"/>
-                <a:ea typeface="HarmonyOS Sans SC Medium" panose="00000600000000000000" charset="-122"/>
-                <a:cs typeface="HarmonyOS Sans SC Medium" panose="00000600000000000000" charset="-122"/>
-                <a:sym typeface="HarmonyOS Sans SC Medium" panose="00000600000000000000" charset="-122"/>
-              </a:rPr>
-              <a:t>Later workflow steps are automatically recomputed</a:t>
-            </a:r>
-            <a:endParaRPr lang="en-US" altLang="zh-CN" sz="1200" dirty="0">
-              <a:solidFill>
-                <a:srgbClr val="846749"/>
-              </a:solidFill>
-              <a:latin typeface="HarmonyOS Sans SC Medium" panose="00000600000000000000" charset="-122"/>
-              <a:ea typeface="HarmonyOS Sans SC Medium" panose="00000600000000000000" charset="-122"/>
-              <a:cs typeface="HarmonyOS Sans SC Medium" panose="00000600000000000000" charset="-122"/>
-              <a:sym typeface="HarmonyOS Sans SC Medium" panose="00000600000000000000" charset="-122"/>
-            </a:endParaRPr>
-          </a:p>
-          <a:p>
-            <a:pPr marL="171450" indent="-171450" algn="l">
-              <a:lnSpc>
-                <a:spcPct val="160000"/>
-              </a:lnSpc>
-              <a:buClrTx/>
-              <a:buSzTx/>
-              <a:buFont typeface="Arial" panose="020B0604020202090204" pitchFamily="34" charset="0"/>
-              <a:buChar char="•"/>
-            </a:pPr>
-            <a:r>
-              <a:rPr lang="en-US" altLang="zh-CN" sz="1200" dirty="0">
-                <a:solidFill>
-                  <a:srgbClr val="846749"/>
-                </a:solidFill>
-                <a:latin typeface="HarmonyOS Sans SC Medium" panose="00000600000000000000" charset="-122"/>
-                <a:ea typeface="HarmonyOS Sans SC Medium" panose="00000600000000000000" charset="-122"/>
-                <a:cs typeface="HarmonyOS Sans SC Medium" panose="00000600000000000000" charset="-122"/>
-                <a:sym typeface="HarmonyOS Sans SC Medium" panose="00000600000000000000" charset="-122"/>
-              </a:rPr>
-              <a:t>Users receive visual feedback when regeneration is required</a:t>
-            </a:r>
-            <a:endParaRPr lang="en-US" altLang="zh-CN" sz="1200" dirty="0">
-              <a:solidFill>
-                <a:srgbClr val="846749"/>
-              </a:solidFill>
-              <a:latin typeface="HarmonyOS Sans SC Medium" panose="00000600000000000000" charset="-122"/>
-              <a:ea typeface="HarmonyOS Sans SC Medium" panose="00000600000000000000" charset="-122"/>
-              <a:cs typeface="HarmonyOS Sans SC Medium" panose="00000600000000000000" charset="-122"/>
-              <a:sym typeface="HarmonyOS Sans SC Medium" panose="00000600000000000000" charset="-122"/>
-            </a:endParaRPr>
-          </a:p>
-        </p:txBody>
-      </p:sp>
-      <p:sp>
-        <p:nvSpPr>
-          <p:cNvPr id="7" name="椭圆 6"/>
-          <p:cNvSpPr/>
-          <p:nvPr/>
-        </p:nvSpPr>
-        <p:spPr>
-          <a:xfrm>
-            <a:off x="956310" y="1852295"/>
-            <a:ext cx="824230" cy="824230"/>
-          </a:xfrm>
-          <a:prstGeom prst="ellipse">
-            <a:avLst/>
-          </a:prstGeom>
-          <a:solidFill>
-            <a:srgbClr val="D36B0B"/>
-          </a:solidFill>
-          <a:ln>
-            <a:noFill/>
-          </a:ln>
-        </p:spPr>
-        <p:style>
-          <a:lnRef idx="2">
-            <a:schemeClr val="accent1">
-              <a:shade val="50000"/>
-            </a:schemeClr>
-          </a:lnRef>
-          <a:fillRef idx="1">
-            <a:schemeClr val="accent1"/>
-          </a:fillRef>
-          <a:effectRef idx="0">
-            <a:schemeClr val="accent1"/>
-          </a:effectRef>
-          <a:fontRef idx="minor">
-            <a:schemeClr val="lt1"/>
-          </a:fontRef>
-        </p:style>
-        <p:txBody>
-          <a:bodyPr rtlCol="0" anchor="ctr"/>
-          <a:p>
-            <a:pPr algn="ctr"/>
-            <a:endParaRPr lang="zh-CN" altLang="en-US">
-              <a:solidFill>
-                <a:srgbClr val="846749"/>
-              </a:solidFill>
-              <a:latin typeface="HarmonyOS Sans SC Medium" panose="00000600000000000000" charset="-122"/>
-              <a:ea typeface="HarmonyOS Sans SC Medium" panose="00000600000000000000" charset="-122"/>
-              <a:cs typeface="HarmonyOS Sans SC Medium" panose="00000600000000000000" charset="-122"/>
             </a:endParaRPr>
           </a:p>
         </p:txBody>
       </p:sp>
       <p:pic>
         <p:nvPicPr>
-          <p:cNvPr id="42" name="图片 41" descr="tongjiziliaoICO"/>
+          <p:cNvPr id="4" name="图片 3" descr="Traceability"/>
           <p:cNvPicPr>
             <a:picLocks noChangeAspect="1"/>
           </p:cNvPicPr>
           <p:nvPr/>
         </p:nvPicPr>
         <p:blipFill>
-          <a:blip r:embed="rId2">
-            <a:extLst>
-              <a:ext uri="{96DAC541-7B7A-43D3-8B79-37D633B846F1}">
-                <asvg:svgBlip xmlns:asvg="http://schemas.microsoft.com/office/drawing/2016/SVG/main" r:embed="rId3"/>
-              </a:ext>
-            </a:extLst>
-          </a:blip>
+          <a:blip r:embed="rId2"/>
           <a:stretch>
             <a:fillRect/>
           </a:stretch>
         </p:blipFill>
         <p:spPr>
           <a:xfrm>
-            <a:off x="1050925" y="1959610"/>
-            <a:ext cx="609600" cy="609600"/>
-          </a:xfrm>
-          <a:prstGeom prst="rect">
-            <a:avLst/>
-          </a:prstGeom>
-        </p:spPr>
-      </p:pic>
-      <p:sp>
-        <p:nvSpPr>
-          <p:cNvPr id="37" name="椭圆 36"/>
-          <p:cNvSpPr/>
-          <p:nvPr/>
-        </p:nvSpPr>
-        <p:spPr>
-          <a:xfrm>
-            <a:off x="956310" y="4183380"/>
-            <a:ext cx="824230" cy="824230"/>
-          </a:xfrm>
-          <a:prstGeom prst="ellipse">
-            <a:avLst/>
-          </a:prstGeom>
-          <a:solidFill>
-            <a:srgbClr val="D36B0B"/>
-          </a:solidFill>
-          <a:ln>
-            <a:noFill/>
-          </a:ln>
-        </p:spPr>
-        <p:style>
-          <a:lnRef idx="2">
-            <a:schemeClr val="accent1">
-              <a:shade val="50000"/>
-            </a:schemeClr>
-          </a:lnRef>
-          <a:fillRef idx="1">
-            <a:schemeClr val="accent1"/>
-          </a:fillRef>
-          <a:effectRef idx="0">
-            <a:schemeClr val="accent1"/>
-          </a:effectRef>
-          <a:fontRef idx="minor">
-            <a:schemeClr val="lt1"/>
-          </a:fontRef>
-        </p:style>
-        <p:txBody>
-          <a:bodyPr rtlCol="0" anchor="ctr"/>
-          <a:p>
-            <a:pPr algn="ctr"/>
-            <a:endParaRPr lang="zh-CN" altLang="en-US">
-              <a:solidFill>
-                <a:srgbClr val="846749"/>
-              </a:solidFill>
-              <a:latin typeface="HarmonyOS Sans SC Medium" panose="00000600000000000000" charset="-122"/>
-              <a:ea typeface="HarmonyOS Sans SC Medium" panose="00000600000000000000" charset="-122"/>
-              <a:cs typeface="HarmonyOS Sans SC Medium" panose="00000600000000000000" charset="-122"/>
-            </a:endParaRPr>
-          </a:p>
-        </p:txBody>
-      </p:sp>
-      <p:pic>
-        <p:nvPicPr>
-          <p:cNvPr id="38" name="图片 37" descr="shujubaobiaoICO"/>
-          <p:cNvPicPr>
-            <a:picLocks noChangeAspect="1"/>
-          </p:cNvPicPr>
-          <p:nvPr/>
-        </p:nvPicPr>
-        <p:blipFill>
-          <a:blip r:embed="rId4"/>
-          <a:stretch>
-            <a:fillRect/>
-          </a:stretch>
-        </p:blipFill>
-        <p:spPr>
-          <a:xfrm>
-            <a:off x="1063625" y="4291965"/>
-            <a:ext cx="609600" cy="609600"/>
-          </a:xfrm>
-          <a:prstGeom prst="rect">
-            <a:avLst/>
-          </a:prstGeom>
-        </p:spPr>
-      </p:pic>
-      <p:sp>
-        <p:nvSpPr>
-          <p:cNvPr id="8" name="椭圆 7"/>
-          <p:cNvSpPr/>
-          <p:nvPr/>
-        </p:nvSpPr>
-        <p:spPr>
-          <a:xfrm>
-            <a:off x="6643370" y="1852295"/>
-            <a:ext cx="824230" cy="824230"/>
-          </a:xfrm>
-          <a:prstGeom prst="ellipse">
-            <a:avLst/>
-          </a:prstGeom>
-          <a:solidFill>
-            <a:srgbClr val="846749"/>
-          </a:solidFill>
-          <a:ln>
-            <a:noFill/>
-          </a:ln>
-        </p:spPr>
-        <p:style>
-          <a:lnRef idx="2">
-            <a:schemeClr val="accent1">
-              <a:shade val="50000"/>
-            </a:schemeClr>
-          </a:lnRef>
-          <a:fillRef idx="1">
-            <a:schemeClr val="accent1"/>
-          </a:fillRef>
-          <a:effectRef idx="0">
-            <a:schemeClr val="accent1"/>
-          </a:effectRef>
-          <a:fontRef idx="minor">
-            <a:schemeClr val="lt1"/>
-          </a:fontRef>
-        </p:style>
-        <p:txBody>
-          <a:bodyPr rtlCol="0" anchor="ctr"/>
-          <a:p>
-            <a:pPr algn="ctr"/>
-            <a:endParaRPr lang="zh-CN" altLang="en-US">
-              <a:solidFill>
-                <a:srgbClr val="846749"/>
-              </a:solidFill>
-              <a:latin typeface="HarmonyOS Sans SC Medium" panose="00000600000000000000" charset="-122"/>
-              <a:ea typeface="HarmonyOS Sans SC Medium" panose="00000600000000000000" charset="-122"/>
-              <a:cs typeface="HarmonyOS Sans SC Medium" panose="00000600000000000000" charset="-122"/>
-            </a:endParaRPr>
-          </a:p>
-        </p:txBody>
-      </p:sp>
-      <p:pic>
-        <p:nvPicPr>
-          <p:cNvPr id="36" name="图片 35" descr="shurumimazhuangtaiICO"/>
-          <p:cNvPicPr>
-            <a:picLocks noChangeAspect="1"/>
-          </p:cNvPicPr>
-          <p:nvPr/>
-        </p:nvPicPr>
-        <p:blipFill>
-          <a:blip r:embed="rId5">
-            <a:extLst>
-              <a:ext uri="{96DAC541-7B7A-43D3-8B79-37D633B846F1}">
-                <asvg:svgBlip xmlns:asvg="http://schemas.microsoft.com/office/drawing/2016/SVG/main" r:embed="rId6"/>
-              </a:ext>
-            </a:extLst>
-          </a:blip>
-          <a:stretch>
-            <a:fillRect/>
-          </a:stretch>
-        </p:blipFill>
-        <p:spPr>
-          <a:xfrm>
-            <a:off x="6750685" y="1928495"/>
-            <a:ext cx="609600" cy="609600"/>
-          </a:xfrm>
-          <a:prstGeom prst="rect">
-            <a:avLst/>
-          </a:prstGeom>
-        </p:spPr>
-      </p:pic>
-      <p:sp>
-        <p:nvSpPr>
-          <p:cNvPr id="11" name="文本框 10"/>
-          <p:cNvSpPr txBox="1"/>
-          <p:nvPr/>
-        </p:nvSpPr>
-        <p:spPr>
-          <a:xfrm>
-            <a:off x="7520940" y="4055110"/>
-            <a:ext cx="3951605" cy="460375"/>
-          </a:xfrm>
-          <a:prstGeom prst="rect">
-            <a:avLst/>
-          </a:prstGeom>
-        </p:spPr>
-        <p:txBody>
-          <a:bodyPr wrap="square">
-            <a:spAutoFit/>
-          </a:bodyPr>
-          <a:p>
-            <a:pPr algn="l">
-              <a:buClrTx/>
-              <a:buSzTx/>
-              <a:buFontTx/>
-            </a:pPr>
-            <a:r>
-              <a:rPr lang="en-US" altLang="zh-CN" sz="2400">
-                <a:solidFill>
-                  <a:srgbClr val="846749"/>
-                </a:solidFill>
-                <a:latin typeface="HarmonyOS Sans SC Medium" panose="00000600000000000000" charset="-122"/>
-                <a:ea typeface="HarmonyOS Sans SC Medium" panose="00000600000000000000" charset="-122"/>
-                <a:cs typeface="HarmonyOS Sans SC Medium" panose="00000600000000000000" charset="-122"/>
-              </a:rPr>
-              <a:t>Why It Matters</a:t>
-            </a:r>
-            <a:endParaRPr lang="en-US" altLang="zh-CN" sz="2400">
-              <a:solidFill>
-                <a:srgbClr val="846749"/>
-              </a:solidFill>
-              <a:latin typeface="HarmonyOS Sans SC Medium" panose="00000600000000000000" charset="-122"/>
-              <a:ea typeface="HarmonyOS Sans SC Medium" panose="00000600000000000000" charset="-122"/>
-              <a:cs typeface="HarmonyOS Sans SC Medium" panose="00000600000000000000" charset="-122"/>
-            </a:endParaRPr>
-          </a:p>
-        </p:txBody>
-      </p:sp>
-      <p:sp>
-        <p:nvSpPr>
-          <p:cNvPr id="12" name="文本框 11"/>
-          <p:cNvSpPr txBox="1"/>
-          <p:nvPr/>
-        </p:nvSpPr>
-        <p:spPr>
-          <a:xfrm>
-            <a:off x="7520940" y="4653280"/>
-            <a:ext cx="4173220" cy="681355"/>
-          </a:xfrm>
-          <a:prstGeom prst="rect">
-            <a:avLst/>
-          </a:prstGeom>
-          <a:noFill/>
-        </p:spPr>
-        <p:txBody>
-          <a:bodyPr wrap="square" rtlCol="0" anchor="t">
-            <a:spAutoFit/>
-          </a:bodyPr>
-          <a:p>
-            <a:pPr indent="0">
-              <a:lnSpc>
-                <a:spcPct val="160000"/>
-              </a:lnSpc>
-              <a:buFont typeface="Arial" panose="020B0604020202090204" pitchFamily="34" charset="0"/>
-              <a:buNone/>
-            </a:pPr>
-            <a:r>
-              <a:rPr lang="en-US" altLang="zh-CN" sz="1200" dirty="0">
-                <a:solidFill>
-                  <a:srgbClr val="846749"/>
-                </a:solidFill>
-                <a:latin typeface="HarmonyOS Sans SC Medium" panose="00000600000000000000" charset="-122"/>
-                <a:ea typeface="HarmonyOS Sans SC Medium" panose="00000600000000000000" charset="-122"/>
-                <a:cs typeface="HarmonyOS Sans SC Medium" panose="00000600000000000000" charset="-122"/>
-                <a:sym typeface="HarmonyOS Sans SC Medium" panose="00000600000000000000" charset="-122"/>
-              </a:rPr>
-              <a:t>This design keeps the user in control while preserving automation.</a:t>
-            </a:r>
-            <a:endParaRPr lang="en-US" altLang="zh-CN" sz="1200" dirty="0">
-              <a:solidFill>
-                <a:srgbClr val="846749"/>
-              </a:solidFill>
-              <a:latin typeface="HarmonyOS Sans SC Medium" panose="00000600000000000000" charset="-122"/>
-              <a:ea typeface="HarmonyOS Sans SC Medium" panose="00000600000000000000" charset="-122"/>
-              <a:cs typeface="HarmonyOS Sans SC Medium" panose="00000600000000000000" charset="-122"/>
-              <a:sym typeface="HarmonyOS Sans SC Medium" panose="00000600000000000000" charset="-122"/>
-            </a:endParaRPr>
-          </a:p>
-        </p:txBody>
-      </p:sp>
-      <p:sp>
-        <p:nvSpPr>
-          <p:cNvPr id="14" name="椭圆 13"/>
-          <p:cNvSpPr/>
-          <p:nvPr/>
-        </p:nvSpPr>
-        <p:spPr>
-          <a:xfrm>
-            <a:off x="6615430" y="4152900"/>
-            <a:ext cx="824230" cy="824230"/>
-          </a:xfrm>
-          <a:prstGeom prst="ellipse">
-            <a:avLst/>
-          </a:prstGeom>
-          <a:solidFill>
-            <a:srgbClr val="846749"/>
-          </a:solidFill>
-          <a:ln>
-            <a:noFill/>
-          </a:ln>
-        </p:spPr>
-        <p:style>
-          <a:lnRef idx="2">
-            <a:schemeClr val="accent1">
-              <a:shade val="50000"/>
-            </a:schemeClr>
-          </a:lnRef>
-          <a:fillRef idx="1">
-            <a:schemeClr val="accent1"/>
-          </a:fillRef>
-          <a:effectRef idx="0">
-            <a:schemeClr val="accent1"/>
-          </a:effectRef>
-          <a:fontRef idx="minor">
-            <a:schemeClr val="lt1"/>
-          </a:fontRef>
-        </p:style>
-        <p:txBody>
-          <a:bodyPr rtlCol="0" anchor="ctr"/>
-          <a:p>
-            <a:pPr algn="ctr"/>
-            <a:endParaRPr lang="zh-CN" altLang="en-US">
-              <a:solidFill>
-                <a:srgbClr val="846749"/>
-              </a:solidFill>
-              <a:latin typeface="HarmonyOS Sans SC Medium" panose="00000600000000000000" charset="-122"/>
-              <a:ea typeface="HarmonyOS Sans SC Medium" panose="00000600000000000000" charset="-122"/>
-              <a:cs typeface="HarmonyOS Sans SC Medium" panose="00000600000000000000" charset="-122"/>
-            </a:endParaRPr>
-          </a:p>
-        </p:txBody>
-      </p:sp>
-      <p:pic>
-        <p:nvPicPr>
-          <p:cNvPr id="15" name="图片 14" descr="huodongguanliICO"/>
-          <p:cNvPicPr>
-            <a:picLocks noChangeAspect="1"/>
-          </p:cNvPicPr>
-          <p:nvPr/>
-        </p:nvPicPr>
-        <p:blipFill>
-          <a:blip r:embed="rId7">
-            <a:extLst>
-              <a:ext uri="{96DAC541-7B7A-43D3-8B79-37D633B846F1}">
-                <asvg:svgBlip xmlns:asvg="http://schemas.microsoft.com/office/drawing/2016/SVG/main" r:embed="rId8"/>
-              </a:ext>
-            </a:extLst>
-          </a:blip>
-          <a:stretch>
-            <a:fillRect/>
-          </a:stretch>
-        </p:blipFill>
-        <p:spPr>
-          <a:xfrm>
-            <a:off x="6722745" y="4260215"/>
-            <a:ext cx="609600" cy="609600"/>
+            <a:off x="545465" y="2653030"/>
+            <a:ext cx="3986530" cy="2242820"/>
           </a:xfrm>
           <a:prstGeom prst="rect">
             <a:avLst/>
@@ -8675,7 +9028,7 @@
       </p:pic>
     </p:spTree>
     <p:custDataLst>
-      <p:tags r:id="rId9"/>
+      <p:tags r:id="rId3"/>
     </p:custDataLst>
   </p:cSld>
   <p:clrMapOvr>
@@ -8709,601 +9062,6 @@
       <p:grpSpPr/>
       <p:pic>
         <p:nvPicPr>
-          <p:cNvPr id="2" name="图片 1" descr="q2"/>
-          <p:cNvPicPr>
-            <a:picLocks noChangeAspect="1"/>
-          </p:cNvPicPr>
-          <p:nvPr/>
-        </p:nvPicPr>
-        <p:blipFill>
-          <a:blip r:embed="rId1"/>
-          <a:stretch>
-            <a:fillRect/>
-          </a:stretch>
-        </p:blipFill>
-        <p:spPr>
-          <a:xfrm>
-            <a:off x="0" y="0"/>
-            <a:ext cx="12192000" cy="6858000"/>
-          </a:xfrm>
-          <a:prstGeom prst="rect">
-            <a:avLst/>
-          </a:prstGeom>
-        </p:spPr>
-      </p:pic>
-      <p:sp>
-        <p:nvSpPr>
-          <p:cNvPr id="32" name="稻壳夜秋https://www.docer.com/works?userid=555357443"/>
-          <p:cNvSpPr txBox="1"/>
-          <p:nvPr/>
-        </p:nvSpPr>
-        <p:spPr>
-          <a:xfrm>
-            <a:off x="1485900" y="516890"/>
-            <a:ext cx="7666990" cy="583565"/>
-          </a:xfrm>
-          <a:prstGeom prst="rect">
-            <a:avLst/>
-          </a:prstGeom>
-          <a:noFill/>
-        </p:spPr>
-        <p:txBody>
-          <a:bodyPr wrap="square" rtlCol="0">
-            <a:spAutoFit/>
-          </a:bodyPr>
-          <a:p>
-            <a:r>
-              <a:rPr lang="en-US" altLang="zh-CN" sz="3200">
-                <a:solidFill>
-                  <a:srgbClr val="846749"/>
-                </a:solidFill>
-                <a:latin typeface="HarmonyOS Sans SC Medium" panose="00000600000000000000" charset="-122"/>
-                <a:ea typeface="HarmonyOS Sans SC Medium" panose="00000600000000000000" charset="-122"/>
-                <a:cs typeface="HarmonyOS Sans SC Medium" panose="00000600000000000000" charset="-122"/>
-                <a:sym typeface="+mn-ea"/>
-              </a:rPr>
-              <a:t>Test Design —— </a:t>
-            </a:r>
-            <a:r>
-              <a:rPr lang="en-US" altLang="zh-CN" sz="3200">
-                <a:solidFill>
-                  <a:srgbClr val="846749"/>
-                </a:solidFill>
-                <a:latin typeface="HarmonyOS Sans SC Medium" panose="00000600000000000000" charset="-122"/>
-                <a:ea typeface="HarmonyOS Sans SC Medium" panose="00000600000000000000" charset="-122"/>
-                <a:cs typeface="HarmonyOS Sans SC Medium" panose="00000600000000000000" charset="-122"/>
-                <a:sym typeface="+mn-ea"/>
-              </a:rPr>
-              <a:t>Traceability</a:t>
-            </a:r>
-            <a:endParaRPr lang="en-US" altLang="zh-CN" sz="3200">
-              <a:solidFill>
-                <a:srgbClr val="846749"/>
-              </a:solidFill>
-              <a:latin typeface="HarmonyOS Sans SC Medium" panose="00000600000000000000" charset="-122"/>
-              <a:ea typeface="HarmonyOS Sans SC Medium" panose="00000600000000000000" charset="-122"/>
-              <a:cs typeface="HarmonyOS Sans SC Medium" panose="00000600000000000000" charset="-122"/>
-              <a:sym typeface="+mn-ea"/>
-            </a:endParaRPr>
-          </a:p>
-        </p:txBody>
-      </p:sp>
-      <p:sp>
-        <p:nvSpPr>
-          <p:cNvPr id="3" name="椭圆 2"/>
-          <p:cNvSpPr/>
-          <p:nvPr/>
-        </p:nvSpPr>
-        <p:spPr>
-          <a:xfrm>
-            <a:off x="704215" y="394335"/>
-            <a:ext cx="705485" cy="705485"/>
-          </a:xfrm>
-          <a:prstGeom prst="ellipse">
-            <a:avLst/>
-          </a:prstGeom>
-          <a:solidFill>
-            <a:srgbClr val="846749"/>
-          </a:solidFill>
-          <a:ln>
-            <a:noFill/>
-          </a:ln>
-        </p:spPr>
-        <p:style>
-          <a:lnRef idx="2">
-            <a:schemeClr val="accent1">
-              <a:shade val="50000"/>
-            </a:schemeClr>
-          </a:lnRef>
-          <a:fillRef idx="1">
-            <a:schemeClr val="accent1"/>
-          </a:fillRef>
-          <a:effectRef idx="0">
-            <a:schemeClr val="accent1"/>
-          </a:effectRef>
-          <a:fontRef idx="minor">
-            <a:schemeClr val="lt1"/>
-          </a:fontRef>
-        </p:style>
-        <p:txBody>
-          <a:bodyPr rtlCol="0" anchor="ctr"/>
-          <a:p>
-            <a:pPr algn="ctr"/>
-            <a:endParaRPr lang="en-US" altLang="zh-CN" sz="2000">
-              <a:latin typeface="HarmonyOS Sans SC Medium" panose="00000600000000000000" charset="-122"/>
-              <a:ea typeface="HarmonyOS Sans SC Medium" panose="00000600000000000000" charset="-122"/>
-              <a:cs typeface="HarmonyOS Sans SC Medium" panose="00000600000000000000" charset="-122"/>
-            </a:endParaRPr>
-          </a:p>
-        </p:txBody>
-      </p:sp>
-      <p:sp>
-        <p:nvSpPr>
-          <p:cNvPr id="30" name="文本框 29"/>
-          <p:cNvSpPr txBox="1"/>
-          <p:nvPr/>
-        </p:nvSpPr>
-        <p:spPr>
-          <a:xfrm>
-            <a:off x="704215" y="419735"/>
-            <a:ext cx="731520" cy="645160"/>
-          </a:xfrm>
-          <a:prstGeom prst="rect">
-            <a:avLst/>
-          </a:prstGeom>
-          <a:noFill/>
-        </p:spPr>
-        <p:txBody>
-          <a:bodyPr wrap="none" rtlCol="0">
-            <a:spAutoFit/>
-          </a:bodyPr>
-          <a:p>
-            <a:r>
-              <a:rPr lang="en-US" altLang="zh-CN" sz="3600">
-                <a:solidFill>
-                  <a:schemeClr val="bg1"/>
-                </a:solidFill>
-                <a:cs typeface="HarmonyOS Sans SC Medium" panose="00000600000000000000" charset="-122"/>
-              </a:rPr>
-              <a:t>03</a:t>
-            </a:r>
-            <a:endParaRPr lang="en-US" altLang="zh-CN" sz="3600">
-              <a:solidFill>
-                <a:schemeClr val="bg1"/>
-              </a:solidFill>
-              <a:cs typeface="HarmonyOS Sans SC Medium" panose="00000600000000000000" charset="-122"/>
-            </a:endParaRPr>
-          </a:p>
-        </p:txBody>
-      </p:sp>
-      <p:sp>
-        <p:nvSpPr>
-          <p:cNvPr id="7" name="文本框 6"/>
-          <p:cNvSpPr txBox="1"/>
-          <p:nvPr/>
-        </p:nvSpPr>
-        <p:spPr>
-          <a:xfrm>
-            <a:off x="4707255" y="1769745"/>
-            <a:ext cx="4768850" cy="583565"/>
-          </a:xfrm>
-          <a:prstGeom prst="rect">
-            <a:avLst/>
-          </a:prstGeom>
-          <a:noFill/>
-        </p:spPr>
-        <p:txBody>
-          <a:bodyPr wrap="square" rtlCol="0">
-            <a:spAutoFit/>
-          </a:bodyPr>
-          <a:p>
-            <a:r>
-              <a:rPr lang="en-US" altLang="zh-CN" sz="3200">
-                <a:solidFill>
-                  <a:srgbClr val="846749"/>
-                </a:solidFill>
-                <a:latin typeface="HarmonyOS Sans SC Medium" panose="00000600000000000000" charset="-122"/>
-                <a:ea typeface="HarmonyOS Sans SC Medium" panose="00000600000000000000" charset="-122"/>
-                <a:cs typeface="HarmonyOS Sans SC Medium" panose="00000600000000000000" charset="-122"/>
-              </a:rPr>
-              <a:t>Traceability Design</a:t>
-            </a:r>
-            <a:endParaRPr lang="en-US" altLang="zh-CN" sz="3200">
-              <a:solidFill>
-                <a:srgbClr val="846749"/>
-              </a:solidFill>
-              <a:latin typeface="HarmonyOS Sans SC Medium" panose="00000600000000000000" charset="-122"/>
-              <a:ea typeface="HarmonyOS Sans SC Medium" panose="00000600000000000000" charset="-122"/>
-              <a:cs typeface="HarmonyOS Sans SC Medium" panose="00000600000000000000" charset="-122"/>
-            </a:endParaRPr>
-          </a:p>
-        </p:txBody>
-      </p:sp>
-      <p:sp>
-        <p:nvSpPr>
-          <p:cNvPr id="8206" name="TextBox 11"/>
-          <p:cNvSpPr/>
-          <p:nvPr/>
-        </p:nvSpPr>
-        <p:spPr>
-          <a:xfrm>
-            <a:off x="4707255" y="2353310"/>
-            <a:ext cx="7484745" cy="3386455"/>
-          </a:xfrm>
-          <a:prstGeom prst="rect">
-            <a:avLst/>
-          </a:prstGeom>
-          <a:noFill/>
-          <a:ln w="9525">
-            <a:noFill/>
-          </a:ln>
-        </p:spPr>
-        <p:txBody>
-          <a:bodyPr wrap="square">
-            <a:spAutoFit/>
-          </a:bodyPr>
-          <a:p>
-            <a:pPr>
-              <a:lnSpc>
-                <a:spcPct val="170000"/>
-              </a:lnSpc>
-            </a:pPr>
-            <a:r>
-              <a:rPr lang="en-US" altLang="zh-CN" sz="1400" b="1" dirty="0">
-                <a:solidFill>
-                  <a:srgbClr val="846749"/>
-                </a:solidFill>
-                <a:latin typeface="HarmonyOS Sans SC Medium" panose="00000600000000000000" charset="-122"/>
-                <a:ea typeface="HarmonyOS Sans SC Medium" panose="00000600000000000000" charset="-122"/>
-                <a:cs typeface="HarmonyOS Sans SC Medium" panose="00000600000000000000" charset="-122"/>
-                <a:sym typeface="HarmonyOS Sans SC Medium" panose="00000600000000000000" charset="-122"/>
-              </a:rPr>
-              <a:t>Trace chain:</a:t>
-            </a:r>
-            <a:r>
-              <a:rPr lang="en-US" altLang="zh-CN" sz="1400" dirty="0">
-                <a:solidFill>
-                  <a:srgbClr val="846749"/>
-                </a:solidFill>
-                <a:latin typeface="HarmonyOS Sans SC Medium" panose="00000600000000000000" charset="-122"/>
-                <a:ea typeface="HarmonyOS Sans SC Medium" panose="00000600000000000000" charset="-122"/>
-                <a:cs typeface="HarmonyOS Sans SC Medium" panose="00000600000000000000" charset="-122"/>
-                <a:sym typeface="HarmonyOS Sans SC Medium" panose="00000600000000000000" charset="-122"/>
-              </a:rPr>
-              <a:t> requirement </a:t>
-            </a:r>
-            <a:r>
-              <a:rPr lang="en-US" altLang="en-US" sz="1400" dirty="0">
-                <a:solidFill>
-                  <a:srgbClr val="846749"/>
-                </a:solidFill>
-                <a:latin typeface="HarmonyOS Sans SC Medium" panose="00000600000000000000" charset="-122"/>
-                <a:ea typeface="HarmonyOS Sans SC Medium" panose="00000600000000000000" charset="-122"/>
-                <a:cs typeface="HarmonyOS Sans SC Medium" panose="00000600000000000000" charset="-122"/>
-                <a:sym typeface="HarmonyOS Sans SC Medium" panose="00000600000000000000" charset="-122"/>
-              </a:rPr>
-              <a:t>→</a:t>
-            </a:r>
-            <a:r>
-              <a:rPr lang="en-US" altLang="zh-CN" sz="1400" dirty="0">
-                <a:solidFill>
-                  <a:srgbClr val="846749"/>
-                </a:solidFill>
-                <a:latin typeface="HarmonyOS Sans SC Medium" panose="00000600000000000000" charset="-122"/>
-                <a:ea typeface="HarmonyOS Sans SC Medium" panose="00000600000000000000" charset="-122"/>
-                <a:cs typeface="HarmonyOS Sans SC Medium" panose="00000600000000000000" charset="-122"/>
-                <a:sym typeface="HarmonyOS Sans SC Medium" panose="00000600000000000000" charset="-122"/>
-              </a:rPr>
-              <a:t> coverage item </a:t>
-            </a:r>
-            <a:r>
-              <a:rPr lang="en-US" altLang="en-US" sz="1400" dirty="0">
-                <a:solidFill>
-                  <a:srgbClr val="846749"/>
-                </a:solidFill>
-                <a:latin typeface="HarmonyOS Sans SC Medium" panose="00000600000000000000" charset="-122"/>
-                <a:ea typeface="HarmonyOS Sans SC Medium" panose="00000600000000000000" charset="-122"/>
-                <a:cs typeface="HarmonyOS Sans SC Medium" panose="00000600000000000000" charset="-122"/>
-                <a:sym typeface="HarmonyOS Sans SC Medium" panose="00000600000000000000" charset="-122"/>
-              </a:rPr>
-              <a:t>→</a:t>
-            </a:r>
-            <a:r>
-              <a:rPr lang="en-US" altLang="zh-CN" sz="1400" dirty="0">
-                <a:solidFill>
-                  <a:srgbClr val="846749"/>
-                </a:solidFill>
-                <a:latin typeface="HarmonyOS Sans SC Medium" panose="00000600000000000000" charset="-122"/>
-                <a:ea typeface="HarmonyOS Sans SC Medium" panose="00000600000000000000" charset="-122"/>
-                <a:cs typeface="HarmonyOS Sans SC Medium" panose="00000600000000000000" charset="-122"/>
-                <a:sym typeface="HarmonyOS Sans SC Medium" panose="00000600000000000000" charset="-122"/>
-              </a:rPr>
-              <a:t> generated test case </a:t>
-            </a:r>
-            <a:r>
-              <a:rPr lang="en-US" altLang="en-US" sz="1400" dirty="0">
-                <a:solidFill>
-                  <a:srgbClr val="846749"/>
-                </a:solidFill>
-                <a:latin typeface="HarmonyOS Sans SC Medium" panose="00000600000000000000" charset="-122"/>
-                <a:ea typeface="HarmonyOS Sans SC Medium" panose="00000600000000000000" charset="-122"/>
-                <a:cs typeface="HarmonyOS Sans SC Medium" panose="00000600000000000000" charset="-122"/>
-                <a:sym typeface="HarmonyOS Sans SC Medium" panose="00000600000000000000" charset="-122"/>
-              </a:rPr>
-              <a:t>→ </a:t>
-            </a:r>
-            <a:r>
-              <a:rPr lang="en-US" altLang="zh-CN" sz="1400" dirty="0">
-                <a:solidFill>
-                  <a:srgbClr val="846749"/>
-                </a:solidFill>
-                <a:latin typeface="HarmonyOS Sans SC Medium" panose="00000600000000000000" charset="-122"/>
-                <a:ea typeface="HarmonyOS Sans SC Medium" panose="00000600000000000000" charset="-122"/>
-                <a:cs typeface="HarmonyOS Sans SC Medium" panose="00000600000000000000" charset="-122"/>
-                <a:sym typeface="HarmonyOS Sans SC Medium" panose="00000600000000000000" charset="-122"/>
-              </a:rPr>
-              <a:t>PyTest function.</a:t>
-            </a:r>
-            <a:endParaRPr lang="en-US" altLang="zh-CN" sz="1400" dirty="0">
-              <a:solidFill>
-                <a:srgbClr val="846749"/>
-              </a:solidFill>
-              <a:latin typeface="HarmonyOS Sans SC Medium" panose="00000600000000000000" charset="-122"/>
-              <a:ea typeface="HarmonyOS Sans SC Medium" panose="00000600000000000000" charset="-122"/>
-              <a:cs typeface="HarmonyOS Sans SC Medium" panose="00000600000000000000" charset="-122"/>
-              <a:sym typeface="HarmonyOS Sans SC Medium" panose="00000600000000000000" charset="-122"/>
-            </a:endParaRPr>
-          </a:p>
-          <a:p>
-            <a:pPr>
-              <a:lnSpc>
-                <a:spcPct val="170000"/>
-              </a:lnSpc>
-            </a:pPr>
-            <a:r>
-              <a:rPr lang="en-US" altLang="zh-CN" sz="1400" b="1" dirty="0">
-                <a:solidFill>
-                  <a:srgbClr val="846749"/>
-                </a:solidFill>
-                <a:latin typeface="HarmonyOS Sans SC Medium" panose="00000600000000000000" charset="-122"/>
-                <a:ea typeface="HarmonyOS Sans SC Medium" panose="00000600000000000000" charset="-122"/>
-                <a:cs typeface="HarmonyOS Sans SC Medium" panose="00000600000000000000" charset="-122"/>
-                <a:sym typeface="HarmonyOS Sans SC Medium" panose="00000600000000000000" charset="-122"/>
-              </a:rPr>
-              <a:t>Counts on the current baseline:</a:t>
-            </a:r>
-            <a:endParaRPr lang="en-US" altLang="zh-CN" sz="1400" b="1" dirty="0">
-              <a:solidFill>
-                <a:srgbClr val="846749"/>
-              </a:solidFill>
-              <a:latin typeface="HarmonyOS Sans SC Medium" panose="00000600000000000000" charset="-122"/>
-              <a:ea typeface="HarmonyOS Sans SC Medium" panose="00000600000000000000" charset="-122"/>
-              <a:cs typeface="HarmonyOS Sans SC Medium" panose="00000600000000000000" charset="-122"/>
-              <a:sym typeface="HarmonyOS Sans SC Medium" panose="00000600000000000000" charset="-122"/>
-            </a:endParaRPr>
-          </a:p>
-          <a:p>
-            <a:pPr marL="285750" indent="-285750">
-              <a:lnSpc>
-                <a:spcPct val="170000"/>
-              </a:lnSpc>
-              <a:buFont typeface="Arial" panose="020B0604020202090204" pitchFamily="34" charset="0"/>
-              <a:buChar char="•"/>
-            </a:pPr>
-            <a:r>
-              <a:rPr lang="en-US" altLang="zh-CN" sz="1400" dirty="0">
-                <a:solidFill>
-                  <a:srgbClr val="846749"/>
-                </a:solidFill>
-                <a:latin typeface="HarmonyOS Sans SC Medium" panose="00000600000000000000" charset="-122"/>
-                <a:ea typeface="HarmonyOS Sans SC Medium" panose="00000600000000000000" charset="-122"/>
-                <a:cs typeface="HarmonyOS Sans SC Medium" panose="00000600000000000000" charset="-122"/>
-                <a:sym typeface="HarmonyOS Sans SC Medium" panose="00000600000000000000" charset="-122"/>
-              </a:rPr>
-              <a:t>12 requirements.</a:t>
-            </a:r>
-            <a:endParaRPr lang="en-US" altLang="zh-CN" sz="1400" dirty="0">
-              <a:solidFill>
-                <a:srgbClr val="846749"/>
-              </a:solidFill>
-              <a:latin typeface="HarmonyOS Sans SC Medium" panose="00000600000000000000" charset="-122"/>
-              <a:ea typeface="HarmonyOS Sans SC Medium" panose="00000600000000000000" charset="-122"/>
-              <a:cs typeface="HarmonyOS Sans SC Medium" panose="00000600000000000000" charset="-122"/>
-              <a:sym typeface="HarmonyOS Sans SC Medium" panose="00000600000000000000" charset="-122"/>
-            </a:endParaRPr>
-          </a:p>
-          <a:p>
-            <a:pPr marL="285750" indent="-285750">
-              <a:lnSpc>
-                <a:spcPct val="170000"/>
-              </a:lnSpc>
-              <a:buFont typeface="Arial" panose="020B0604020202090204" pitchFamily="34" charset="0"/>
-              <a:buChar char="•"/>
-            </a:pPr>
-            <a:r>
-              <a:rPr lang="en-US" altLang="zh-CN" sz="1400" dirty="0">
-                <a:solidFill>
-                  <a:srgbClr val="846749"/>
-                </a:solidFill>
-                <a:latin typeface="HarmonyOS Sans SC Medium" panose="00000600000000000000" charset="-122"/>
-                <a:ea typeface="HarmonyOS Sans SC Medium" panose="00000600000000000000" charset="-122"/>
-                <a:cs typeface="HarmonyOS Sans SC Medium" panose="00000600000000000000" charset="-122"/>
-                <a:sym typeface="HarmonyOS Sans SC Medium" panose="00000600000000000000" charset="-122"/>
-              </a:rPr>
-              <a:t>65 generated test cases (61 black-box + 4 white-box ST).</a:t>
-            </a:r>
-            <a:endParaRPr lang="en-US" altLang="zh-CN" sz="1400" dirty="0">
-              <a:solidFill>
-                <a:srgbClr val="846749"/>
-              </a:solidFill>
-              <a:latin typeface="HarmonyOS Sans SC Medium" panose="00000600000000000000" charset="-122"/>
-              <a:ea typeface="HarmonyOS Sans SC Medium" panose="00000600000000000000" charset="-122"/>
-              <a:cs typeface="HarmonyOS Sans SC Medium" panose="00000600000000000000" charset="-122"/>
-              <a:sym typeface="HarmonyOS Sans SC Medium" panose="00000600000000000000" charset="-122"/>
-            </a:endParaRPr>
-          </a:p>
-          <a:p>
-            <a:pPr marL="285750" indent="-285750">
-              <a:lnSpc>
-                <a:spcPct val="170000"/>
-              </a:lnSpc>
-              <a:buFont typeface="Arial" panose="020B0604020202090204" pitchFamily="34" charset="0"/>
-              <a:buChar char="•"/>
-            </a:pPr>
-            <a:r>
-              <a:rPr lang="en-US" altLang="zh-CN" sz="1400" dirty="0">
-                <a:solidFill>
-                  <a:srgbClr val="846749"/>
-                </a:solidFill>
-                <a:latin typeface="HarmonyOS Sans SC Medium" panose="00000600000000000000" charset="-122"/>
-                <a:ea typeface="HarmonyOS Sans SC Medium" panose="00000600000000000000" charset="-122"/>
-                <a:cs typeface="HarmonyOS Sans SC Medium" panose="00000600000000000000" charset="-122"/>
-                <a:sym typeface="HarmonyOS Sans SC Medium" panose="00000600000000000000" charset="-122"/>
-              </a:rPr>
-              <a:t>30 hand-written PyTest functions.</a:t>
-            </a:r>
-            <a:endParaRPr lang="en-US" altLang="zh-CN" sz="1400" dirty="0">
-              <a:solidFill>
-                <a:srgbClr val="846749"/>
-              </a:solidFill>
-              <a:latin typeface="HarmonyOS Sans SC Medium" panose="00000600000000000000" charset="-122"/>
-              <a:ea typeface="HarmonyOS Sans SC Medium" panose="00000600000000000000" charset="-122"/>
-              <a:cs typeface="HarmonyOS Sans SC Medium" panose="00000600000000000000" charset="-122"/>
-              <a:sym typeface="HarmonyOS Sans SC Medium" panose="00000600000000000000" charset="-122"/>
-            </a:endParaRPr>
-          </a:p>
-          <a:p>
-            <a:pPr marL="285750" indent="-285750">
-              <a:lnSpc>
-                <a:spcPct val="170000"/>
-              </a:lnSpc>
-              <a:buFont typeface="Arial" panose="020B0604020202090204" pitchFamily="34" charset="0"/>
-              <a:buChar char="•"/>
-            </a:pPr>
-            <a:r>
-              <a:rPr lang="en-US" altLang="zh-CN" sz="1400" dirty="0">
-                <a:solidFill>
-                  <a:srgbClr val="846749"/>
-                </a:solidFill>
-                <a:latin typeface="HarmonyOS Sans SC Medium" panose="00000600000000000000" charset="-122"/>
-                <a:ea typeface="HarmonyOS Sans SC Medium" panose="00000600000000000000" charset="-122"/>
-                <a:cs typeface="HarmonyOS Sans SC Medium" panose="00000600000000000000" charset="-122"/>
-                <a:sym typeface="HarmonyOS Sans SC Medium" panose="00000600000000000000" charset="-122"/>
-              </a:rPr>
-              <a:t>37 coverage items.</a:t>
-            </a:r>
-            <a:endParaRPr lang="en-US" altLang="zh-CN" sz="1400" dirty="0">
-              <a:solidFill>
-                <a:srgbClr val="846749"/>
-              </a:solidFill>
-              <a:latin typeface="HarmonyOS Sans SC Medium" panose="00000600000000000000" charset="-122"/>
-              <a:ea typeface="HarmonyOS Sans SC Medium" panose="00000600000000000000" charset="-122"/>
-              <a:cs typeface="HarmonyOS Sans SC Medium" panose="00000600000000000000" charset="-122"/>
-              <a:sym typeface="HarmonyOS Sans SC Medium" panose="00000600000000000000" charset="-122"/>
-            </a:endParaRPr>
-          </a:p>
-          <a:p>
-            <a:pPr>
-              <a:lnSpc>
-                <a:spcPct val="170000"/>
-              </a:lnSpc>
-            </a:pPr>
-            <a:r>
-              <a:rPr lang="en-US" altLang="zh-CN" sz="1400" b="1" dirty="0">
-                <a:solidFill>
-                  <a:srgbClr val="846749"/>
-                </a:solidFill>
-                <a:latin typeface="HarmonyOS Sans SC Medium" panose="00000600000000000000" charset="-122"/>
-                <a:ea typeface="HarmonyOS Sans SC Medium" panose="00000600000000000000" charset="-122"/>
-                <a:cs typeface="HarmonyOS Sans SC Medium" panose="00000600000000000000" charset="-122"/>
-                <a:sym typeface="HarmonyOS Sans SC Medium" panose="00000600000000000000" charset="-122"/>
-              </a:rPr>
-              <a:t>Mechanism: </a:t>
-            </a:r>
-            <a:r>
-              <a:rPr lang="en-US" altLang="zh-CN" sz="1400" dirty="0">
-                <a:solidFill>
-                  <a:srgbClr val="846749"/>
-                </a:solidFill>
-                <a:latin typeface="HarmonyOS Sans SC Medium" panose="00000600000000000000" charset="-122"/>
-                <a:ea typeface="HarmonyOS Sans SC Medium" panose="00000600000000000000" charset="-122"/>
-                <a:cs typeface="HarmonyOS Sans SC Medium" panose="00000600000000000000" charset="-122"/>
-                <a:sym typeface="HarmonyOS Sans SC Medium" panose="00000600000000000000" charset="-122"/>
-              </a:rPr>
-              <a:t>scripts/build_traceability.py regenerates from three sources (the requirement set, the persisted baseline, and the test docstrings) — never maintained by hand.</a:t>
-            </a:r>
-            <a:endParaRPr lang="en-US" altLang="zh-CN" sz="1400" dirty="0">
-              <a:solidFill>
-                <a:srgbClr val="846749"/>
-              </a:solidFill>
-              <a:latin typeface="HarmonyOS Sans SC Medium" panose="00000600000000000000" charset="-122"/>
-              <a:ea typeface="HarmonyOS Sans SC Medium" panose="00000600000000000000" charset="-122"/>
-              <a:cs typeface="HarmonyOS Sans SC Medium" panose="00000600000000000000" charset="-122"/>
-              <a:sym typeface="HarmonyOS Sans SC Medium" panose="00000600000000000000" charset="-122"/>
-            </a:endParaRPr>
-          </a:p>
-        </p:txBody>
-      </p:sp>
-      <p:pic>
-        <p:nvPicPr>
-          <p:cNvPr id="4" name="图片 3" descr="Traceability"/>
-          <p:cNvPicPr>
-            <a:picLocks noChangeAspect="1"/>
-          </p:cNvPicPr>
-          <p:nvPr/>
-        </p:nvPicPr>
-        <p:blipFill>
-          <a:blip r:embed="rId2"/>
-          <a:stretch>
-            <a:fillRect/>
-          </a:stretch>
-        </p:blipFill>
-        <p:spPr>
-          <a:xfrm>
-            <a:off x="545465" y="2653030"/>
-            <a:ext cx="3986530" cy="2242820"/>
-          </a:xfrm>
-          <a:prstGeom prst="rect">
-            <a:avLst/>
-          </a:prstGeom>
-        </p:spPr>
-      </p:pic>
-    </p:spTree>
-    <p:custDataLst>
-      <p:tags r:id="rId3"/>
-    </p:custDataLst>
-  </p:cSld>
-  <p:clrMapOvr>
-    <a:masterClrMapping/>
-  </p:clrMapOvr>
-  <p:timing>
-    <p:tnLst>
-      <p:par>
-        <p:cTn id="1" dur="indefinite" restart="never" nodeType="tmRoot"/>
-      </p:par>
-    </p:tnLst>
-  </p:timing>
-</p:sld>
-</file>
-
-<file path=ppt/slides/slide18.xml><?xml version="1.0" encoding="utf-8"?>
-<p:sld xmlns:a="http://schemas.openxmlformats.org/drawingml/2006/main" xmlns:r="http://schemas.openxmlformats.org/officeDocument/2006/relationships" xmlns:p="http://schemas.openxmlformats.org/presentationml/2006/main">
-  <p:cSld>
-    <p:bg>
-      <p:bgPr>
-        <a:noFill/>
-        <a:effectLst/>
-      </p:bgPr>
-    </p:bg>
-    <p:spTree>
-      <p:nvGrpSpPr>
-        <p:cNvPr id="1" name=""/>
-        <p:cNvGrpSpPr/>
-        <p:nvPr/>
-      </p:nvGrpSpPr>
-      <p:grpSpPr/>
-      <p:pic>
-        <p:nvPicPr>
           <p:cNvPr id="6" name="图片 5" descr="q."/>
           <p:cNvPicPr>
             <a:picLocks noChangeAspect="1"/>
@@ -9495,7 +9253,7 @@
 </p:sld>
 </file>
 
-<file path=ppt/slides/slide19.xml><?xml version="1.0" encoding="utf-8"?>
+<file path=ppt/slides/slide18.xml><?xml version="1.0" encoding="utf-8"?>
 <p:sld xmlns:a="http://schemas.openxmlformats.org/drawingml/2006/main" xmlns:r="http://schemas.openxmlformats.org/officeDocument/2006/relationships" xmlns:p="http://schemas.openxmlformats.org/presentationml/2006/main">
   <p:cSld>
     <p:bg>
@@ -10229,694 +9987,7 @@
 </p:sld>
 </file>
 
-<file path=ppt/slides/slide2.xml><?xml version="1.0" encoding="utf-8"?>
-<p:sld xmlns:a="http://schemas.openxmlformats.org/drawingml/2006/main" xmlns:r="http://schemas.openxmlformats.org/officeDocument/2006/relationships" xmlns:p="http://schemas.openxmlformats.org/presentationml/2006/main">
-  <p:cSld>
-    <p:bg>
-      <p:bgPr>
-        <a:noFill/>
-        <a:effectLst/>
-      </p:bgPr>
-    </p:bg>
-    <p:spTree>
-      <p:nvGrpSpPr>
-        <p:cNvPr id="1" name=""/>
-        <p:cNvGrpSpPr/>
-        <p:nvPr/>
-      </p:nvGrpSpPr>
-      <p:grpSpPr/>
-      <p:pic>
-        <p:nvPicPr>
-          <p:cNvPr id="2" name="图片 1" descr="q2"/>
-          <p:cNvPicPr>
-            <a:picLocks noChangeAspect="1"/>
-          </p:cNvPicPr>
-          <p:nvPr/>
-        </p:nvPicPr>
-        <p:blipFill>
-          <a:blip r:embed="rId1"/>
-          <a:stretch>
-            <a:fillRect/>
-          </a:stretch>
-        </p:blipFill>
-        <p:spPr>
-          <a:xfrm>
-            <a:off x="0" y="0"/>
-            <a:ext cx="12192000" cy="6858000"/>
-          </a:xfrm>
-          <a:prstGeom prst="rect">
-            <a:avLst/>
-          </a:prstGeom>
-        </p:spPr>
-      </p:pic>
-      <p:sp>
-        <p:nvSpPr>
-          <p:cNvPr id="32" name="稻壳夜秋https://www.docer.com/works?userid=555357443"/>
-          <p:cNvSpPr txBox="1"/>
-          <p:nvPr>
-            <p:custDataLst>
-              <p:tags r:id="rId2"/>
-            </p:custDataLst>
-          </p:nvPr>
-        </p:nvSpPr>
-        <p:spPr>
-          <a:xfrm>
-            <a:off x="2976880" y="2861945"/>
-            <a:ext cx="3632835" cy="460375"/>
-          </a:xfrm>
-          <a:prstGeom prst="rect">
-            <a:avLst/>
-          </a:prstGeom>
-          <a:noFill/>
-        </p:spPr>
-        <p:txBody>
-          <a:bodyPr wrap="square" rtlCol="0">
-            <a:spAutoFit/>
-          </a:bodyPr>
-          <a:p>
-            <a:r>
-              <a:rPr lang="en-US" altLang="zh-CN" sz="2400">
-                <a:solidFill>
-                  <a:srgbClr val="846749"/>
-                </a:solidFill>
-                <a:latin typeface="HarmonyOS Sans SC Medium" panose="00000600000000000000" charset="-122"/>
-                <a:ea typeface="HarmonyOS Sans SC Medium" panose="00000600000000000000" charset="-122"/>
-                <a:cs typeface="HarmonyOS Sans SC Medium" panose="00000600000000000000" charset="-122"/>
-                <a:sym typeface="+mn-ea"/>
-              </a:rPr>
-              <a:t>The Problem &amp; Our Idea</a:t>
-            </a:r>
-            <a:endParaRPr lang="en-US" altLang="zh-CN" sz="2400">
-              <a:solidFill>
-                <a:srgbClr val="846749"/>
-              </a:solidFill>
-              <a:latin typeface="HarmonyOS Sans SC Medium" panose="00000600000000000000" charset="-122"/>
-              <a:ea typeface="HarmonyOS Sans SC Medium" panose="00000600000000000000" charset="-122"/>
-              <a:cs typeface="HarmonyOS Sans SC Medium" panose="00000600000000000000" charset="-122"/>
-              <a:sym typeface="+mn-ea"/>
-            </a:endParaRPr>
-          </a:p>
-        </p:txBody>
-      </p:sp>
-      <p:sp>
-        <p:nvSpPr>
-          <p:cNvPr id="3" name="椭圆 2"/>
-          <p:cNvSpPr/>
-          <p:nvPr>
-            <p:custDataLst>
-              <p:tags r:id="rId3"/>
-            </p:custDataLst>
-          </p:nvPr>
-        </p:nvSpPr>
-        <p:spPr>
-          <a:xfrm>
-            <a:off x="2190115" y="2743835"/>
-            <a:ext cx="705485" cy="705485"/>
-          </a:xfrm>
-          <a:prstGeom prst="ellipse">
-            <a:avLst/>
-          </a:prstGeom>
-          <a:solidFill>
-            <a:srgbClr val="846749"/>
-          </a:solidFill>
-          <a:ln>
-            <a:noFill/>
-          </a:ln>
-        </p:spPr>
-        <p:style>
-          <a:lnRef idx="2">
-            <a:schemeClr val="accent1">
-              <a:shade val="50000"/>
-            </a:schemeClr>
-          </a:lnRef>
-          <a:fillRef idx="1">
-            <a:schemeClr val="accent1"/>
-          </a:fillRef>
-          <a:effectRef idx="0">
-            <a:schemeClr val="accent1"/>
-          </a:effectRef>
-          <a:fontRef idx="minor">
-            <a:schemeClr val="lt1"/>
-          </a:fontRef>
-        </p:style>
-        <p:txBody>
-          <a:bodyPr rtlCol="0" anchor="ctr"/>
-          <a:p>
-            <a:pPr algn="ctr"/>
-            <a:endParaRPr lang="en-US" altLang="zh-CN" sz="2000">
-              <a:latin typeface="HarmonyOS Sans SC Medium" panose="00000600000000000000" charset="-122"/>
-              <a:ea typeface="HarmonyOS Sans SC Medium" panose="00000600000000000000" charset="-122"/>
-              <a:cs typeface="HarmonyOS Sans SC Medium" panose="00000600000000000000" charset="-122"/>
-            </a:endParaRPr>
-          </a:p>
-        </p:txBody>
-      </p:sp>
-      <p:sp>
-        <p:nvSpPr>
-          <p:cNvPr id="28" name="文本框 27"/>
-          <p:cNvSpPr txBox="1"/>
-          <p:nvPr/>
-        </p:nvSpPr>
-        <p:spPr>
-          <a:xfrm>
-            <a:off x="4535805" y="926465"/>
-            <a:ext cx="3121025" cy="829945"/>
-          </a:xfrm>
-          <a:prstGeom prst="rect">
-            <a:avLst/>
-          </a:prstGeom>
-          <a:noFill/>
-        </p:spPr>
-        <p:txBody>
-          <a:bodyPr wrap="none" rtlCol="0">
-            <a:spAutoFit/>
-          </a:bodyPr>
-          <a:p>
-            <a:pPr algn="l"/>
-            <a:r>
-              <a:rPr lang="en-US" sz="4800">
-                <a:ln>
-                  <a:noFill/>
-                </a:ln>
-                <a:solidFill>
-                  <a:srgbClr val="846749"/>
-                </a:solidFill>
-                <a:latin typeface="思源宋体 CN Heavy" panose="02020900000000000000" charset="-122"/>
-                <a:ea typeface="思源宋体 CN Heavy" panose="02020900000000000000" charset="-122"/>
-                <a:cs typeface="HarmonyOS Sans SC Medium" panose="00000600000000000000" charset="-122"/>
-                <a:sym typeface="+mn-ea"/>
-              </a:rPr>
-              <a:t>CONTENTS</a:t>
-            </a:r>
-            <a:endParaRPr lang="zh-CN" sz="4800">
-              <a:solidFill>
-                <a:srgbClr val="846749"/>
-              </a:solidFill>
-              <a:latin typeface="思源宋体 CN Heavy" panose="02020900000000000000" charset="-122"/>
-              <a:ea typeface="思源宋体 CN Heavy" panose="02020900000000000000" charset="-122"/>
-              <a:cs typeface="HarmonyOS Sans SC Medium" panose="00000600000000000000" charset="-122"/>
-            </a:endParaRPr>
-          </a:p>
-        </p:txBody>
-      </p:sp>
-      <p:sp>
-        <p:nvSpPr>
-          <p:cNvPr id="30" name="文本框 29"/>
-          <p:cNvSpPr txBox="1"/>
-          <p:nvPr>
-            <p:custDataLst>
-              <p:tags r:id="rId4"/>
-            </p:custDataLst>
-          </p:nvPr>
-        </p:nvSpPr>
-        <p:spPr>
-          <a:xfrm>
-            <a:off x="2209800" y="2769235"/>
-            <a:ext cx="690880" cy="645160"/>
-          </a:xfrm>
-          <a:prstGeom prst="rect">
-            <a:avLst/>
-          </a:prstGeom>
-          <a:noFill/>
-        </p:spPr>
-        <p:txBody>
-          <a:bodyPr wrap="none" rtlCol="0">
-            <a:spAutoFit/>
-          </a:bodyPr>
-          <a:p>
-            <a:r>
-              <a:rPr lang="en-US" altLang="zh-CN" sz="3600">
-                <a:solidFill>
-                  <a:schemeClr val="bg1"/>
-                </a:solidFill>
-                <a:cs typeface="HarmonyOS Sans SC Medium" panose="00000600000000000000" charset="-122"/>
-              </a:rPr>
-              <a:t>01</a:t>
-            </a:r>
-            <a:endParaRPr lang="en-US" altLang="zh-CN" sz="3600">
-              <a:solidFill>
-                <a:schemeClr val="bg1"/>
-              </a:solidFill>
-              <a:cs typeface="HarmonyOS Sans SC Medium" panose="00000600000000000000" charset="-122"/>
-            </a:endParaRPr>
-          </a:p>
-        </p:txBody>
-      </p:sp>
-      <p:sp>
-        <p:nvSpPr>
-          <p:cNvPr id="34" name="稻壳夜秋https://www.docer.com/works?userid=555357443"/>
-          <p:cNvSpPr txBox="1"/>
-          <p:nvPr>
-            <p:custDataLst>
-              <p:tags r:id="rId5"/>
-            </p:custDataLst>
-          </p:nvPr>
-        </p:nvSpPr>
-        <p:spPr>
-          <a:xfrm>
-            <a:off x="7497445" y="2861945"/>
-            <a:ext cx="3632835" cy="460375"/>
-          </a:xfrm>
-          <a:prstGeom prst="rect">
-            <a:avLst/>
-          </a:prstGeom>
-          <a:noFill/>
-        </p:spPr>
-        <p:txBody>
-          <a:bodyPr wrap="square" rtlCol="0">
-            <a:spAutoFit/>
-          </a:bodyPr>
-          <a:p>
-            <a:pPr algn="l"/>
-            <a:r>
-              <a:rPr lang="en-US" altLang="zh-CN" sz="2400">
-                <a:solidFill>
-                  <a:srgbClr val="846749"/>
-                </a:solidFill>
-                <a:latin typeface="HarmonyOS Sans SC Medium" panose="00000600000000000000" charset="-122"/>
-                <a:ea typeface="HarmonyOS Sans SC Medium" panose="00000600000000000000" charset="-122"/>
-                <a:cs typeface="HarmonyOS Sans SC Medium" panose="00000600000000000000" charset="-122"/>
-                <a:sym typeface="+mn-ea"/>
-              </a:rPr>
-              <a:t>System Design</a:t>
-            </a:r>
-            <a:endParaRPr lang="en-US" altLang="zh-CN" sz="2400">
-              <a:solidFill>
-                <a:srgbClr val="846749"/>
-              </a:solidFill>
-              <a:latin typeface="HarmonyOS Sans SC Medium" panose="00000600000000000000" charset="-122"/>
-              <a:ea typeface="HarmonyOS Sans SC Medium" panose="00000600000000000000" charset="-122"/>
-              <a:cs typeface="HarmonyOS Sans SC Medium" panose="00000600000000000000" charset="-122"/>
-              <a:sym typeface="+mn-ea"/>
-            </a:endParaRPr>
-          </a:p>
-        </p:txBody>
-      </p:sp>
-      <p:sp>
-        <p:nvSpPr>
-          <p:cNvPr id="36" name="椭圆 35"/>
-          <p:cNvSpPr/>
-          <p:nvPr>
-            <p:custDataLst>
-              <p:tags r:id="rId6"/>
-            </p:custDataLst>
-          </p:nvPr>
-        </p:nvSpPr>
-        <p:spPr>
-          <a:xfrm>
-            <a:off x="6685915" y="2743835"/>
-            <a:ext cx="705485" cy="705485"/>
-          </a:xfrm>
-          <a:prstGeom prst="ellipse">
-            <a:avLst/>
-          </a:prstGeom>
-          <a:solidFill>
-            <a:srgbClr val="846749"/>
-          </a:solidFill>
-          <a:ln>
-            <a:noFill/>
-          </a:ln>
-        </p:spPr>
-        <p:style>
-          <a:lnRef idx="2">
-            <a:schemeClr val="accent1">
-              <a:shade val="50000"/>
-            </a:schemeClr>
-          </a:lnRef>
-          <a:fillRef idx="1">
-            <a:schemeClr val="accent1"/>
-          </a:fillRef>
-          <a:effectRef idx="0">
-            <a:schemeClr val="accent1"/>
-          </a:effectRef>
-          <a:fontRef idx="minor">
-            <a:schemeClr val="lt1"/>
-          </a:fontRef>
-        </p:style>
-        <p:txBody>
-          <a:bodyPr rtlCol="0" anchor="ctr"/>
-          <a:p>
-            <a:pPr algn="ctr"/>
-            <a:endParaRPr lang="en-US" altLang="zh-CN" sz="2000">
-              <a:latin typeface="HarmonyOS Sans SC Medium" panose="00000600000000000000" charset="-122"/>
-              <a:ea typeface="HarmonyOS Sans SC Medium" panose="00000600000000000000" charset="-122"/>
-              <a:cs typeface="HarmonyOS Sans SC Medium" panose="00000600000000000000" charset="-122"/>
-            </a:endParaRPr>
-          </a:p>
-        </p:txBody>
-      </p:sp>
-      <p:sp>
-        <p:nvSpPr>
-          <p:cNvPr id="37" name="文本框 36"/>
-          <p:cNvSpPr txBox="1"/>
-          <p:nvPr>
-            <p:custDataLst>
-              <p:tags r:id="rId7"/>
-            </p:custDataLst>
-          </p:nvPr>
-        </p:nvSpPr>
-        <p:spPr>
-          <a:xfrm>
-            <a:off x="6705600" y="2769235"/>
-            <a:ext cx="690880" cy="645160"/>
-          </a:xfrm>
-          <a:prstGeom prst="rect">
-            <a:avLst/>
-          </a:prstGeom>
-          <a:noFill/>
-        </p:spPr>
-        <p:txBody>
-          <a:bodyPr wrap="none" rtlCol="0">
-            <a:spAutoFit/>
-          </a:bodyPr>
-          <a:p>
-            <a:r>
-              <a:rPr lang="en-US" altLang="zh-CN" sz="3600">
-                <a:solidFill>
-                  <a:schemeClr val="bg1"/>
-                </a:solidFill>
-                <a:cs typeface="HarmonyOS Sans SC Medium" panose="00000600000000000000" charset="-122"/>
-              </a:rPr>
-              <a:t>02</a:t>
-            </a:r>
-            <a:endParaRPr lang="en-US" altLang="zh-CN" sz="3600">
-              <a:solidFill>
-                <a:schemeClr val="bg1"/>
-              </a:solidFill>
-              <a:cs typeface="HarmonyOS Sans SC Medium" panose="00000600000000000000" charset="-122"/>
-            </a:endParaRPr>
-          </a:p>
-        </p:txBody>
-      </p:sp>
-      <p:sp>
-        <p:nvSpPr>
-          <p:cNvPr id="39" name="稻壳夜秋https://www.docer.com/works?userid=555357443"/>
-          <p:cNvSpPr txBox="1"/>
-          <p:nvPr>
-            <p:custDataLst>
-              <p:tags r:id="rId8"/>
-            </p:custDataLst>
-          </p:nvPr>
-        </p:nvSpPr>
-        <p:spPr>
-          <a:xfrm>
-            <a:off x="2971800" y="4309745"/>
-            <a:ext cx="3632835" cy="460375"/>
-          </a:xfrm>
-          <a:prstGeom prst="rect">
-            <a:avLst/>
-          </a:prstGeom>
-          <a:noFill/>
-        </p:spPr>
-        <p:txBody>
-          <a:bodyPr wrap="square" rtlCol="0">
-            <a:spAutoFit/>
-          </a:bodyPr>
-          <a:p>
-            <a:r>
-              <a:rPr lang="en-US" altLang="zh-CN" sz="2400">
-                <a:solidFill>
-                  <a:srgbClr val="846749"/>
-                </a:solidFill>
-                <a:latin typeface="HarmonyOS Sans SC Medium" panose="00000600000000000000" charset="-122"/>
-                <a:ea typeface="HarmonyOS Sans SC Medium" panose="00000600000000000000" charset="-122"/>
-                <a:cs typeface="HarmonyOS Sans SC Medium" panose="00000600000000000000" charset="-122"/>
-                <a:sym typeface="+mn-ea"/>
-              </a:rPr>
-              <a:t>Test Design</a:t>
-            </a:r>
-            <a:endParaRPr lang="en-US" altLang="zh-CN" sz="2400">
-              <a:solidFill>
-                <a:srgbClr val="846749"/>
-              </a:solidFill>
-              <a:latin typeface="HarmonyOS Sans SC Medium" panose="00000600000000000000" charset="-122"/>
-              <a:ea typeface="HarmonyOS Sans SC Medium" panose="00000600000000000000" charset="-122"/>
-              <a:cs typeface="HarmonyOS Sans SC Medium" panose="00000600000000000000" charset="-122"/>
-              <a:sym typeface="+mn-ea"/>
-            </a:endParaRPr>
-          </a:p>
-        </p:txBody>
-      </p:sp>
-      <p:sp>
-        <p:nvSpPr>
-          <p:cNvPr id="41" name="椭圆 40"/>
-          <p:cNvSpPr/>
-          <p:nvPr>
-            <p:custDataLst>
-              <p:tags r:id="rId9"/>
-            </p:custDataLst>
-          </p:nvPr>
-        </p:nvSpPr>
-        <p:spPr>
-          <a:xfrm>
-            <a:off x="2190115" y="4191635"/>
-            <a:ext cx="705485" cy="705485"/>
-          </a:xfrm>
-          <a:prstGeom prst="ellipse">
-            <a:avLst/>
-          </a:prstGeom>
-          <a:solidFill>
-            <a:srgbClr val="846749"/>
-          </a:solidFill>
-          <a:ln>
-            <a:noFill/>
-          </a:ln>
-        </p:spPr>
-        <p:style>
-          <a:lnRef idx="2">
-            <a:schemeClr val="accent1">
-              <a:shade val="50000"/>
-            </a:schemeClr>
-          </a:lnRef>
-          <a:fillRef idx="1">
-            <a:schemeClr val="accent1"/>
-          </a:fillRef>
-          <a:effectRef idx="0">
-            <a:schemeClr val="accent1"/>
-          </a:effectRef>
-          <a:fontRef idx="minor">
-            <a:schemeClr val="lt1"/>
-          </a:fontRef>
-        </p:style>
-        <p:txBody>
-          <a:bodyPr rtlCol="0" anchor="ctr"/>
-          <a:p>
-            <a:pPr algn="ctr"/>
-            <a:endParaRPr lang="en-US" altLang="zh-CN" sz="2000">
-              <a:latin typeface="HarmonyOS Sans SC Medium" panose="00000600000000000000" charset="-122"/>
-              <a:ea typeface="HarmonyOS Sans SC Medium" panose="00000600000000000000" charset="-122"/>
-              <a:cs typeface="HarmonyOS Sans SC Medium" panose="00000600000000000000" charset="-122"/>
-            </a:endParaRPr>
-          </a:p>
-        </p:txBody>
-      </p:sp>
-      <p:sp>
-        <p:nvSpPr>
-          <p:cNvPr id="42" name="文本框 41"/>
-          <p:cNvSpPr txBox="1"/>
-          <p:nvPr>
-            <p:custDataLst>
-              <p:tags r:id="rId10"/>
-            </p:custDataLst>
-          </p:nvPr>
-        </p:nvSpPr>
-        <p:spPr>
-          <a:xfrm>
-            <a:off x="2209800" y="4217035"/>
-            <a:ext cx="690880" cy="645160"/>
-          </a:xfrm>
-          <a:prstGeom prst="rect">
-            <a:avLst/>
-          </a:prstGeom>
-          <a:noFill/>
-        </p:spPr>
-        <p:txBody>
-          <a:bodyPr wrap="none" rtlCol="0">
-            <a:spAutoFit/>
-          </a:bodyPr>
-          <a:p>
-            <a:r>
-              <a:rPr lang="en-US" altLang="zh-CN" sz="3600">
-                <a:solidFill>
-                  <a:schemeClr val="bg1"/>
-                </a:solidFill>
-                <a:cs typeface="HarmonyOS Sans SC Medium" panose="00000600000000000000" charset="-122"/>
-              </a:rPr>
-              <a:t>03</a:t>
-            </a:r>
-            <a:endParaRPr lang="en-US" altLang="zh-CN" sz="3600">
-              <a:solidFill>
-                <a:schemeClr val="bg1"/>
-              </a:solidFill>
-              <a:cs typeface="HarmonyOS Sans SC Medium" panose="00000600000000000000" charset="-122"/>
-            </a:endParaRPr>
-          </a:p>
-        </p:txBody>
-      </p:sp>
-      <p:sp>
-        <p:nvSpPr>
-          <p:cNvPr id="44" name="稻壳夜秋https://www.docer.com/works?userid=555357443"/>
-          <p:cNvSpPr txBox="1"/>
-          <p:nvPr>
-            <p:custDataLst>
-              <p:tags r:id="rId11"/>
-            </p:custDataLst>
-          </p:nvPr>
-        </p:nvSpPr>
-        <p:spPr>
-          <a:xfrm>
-            <a:off x="7497445" y="4309745"/>
-            <a:ext cx="3632835" cy="460375"/>
-          </a:xfrm>
-          <a:prstGeom prst="rect">
-            <a:avLst/>
-          </a:prstGeom>
-          <a:noFill/>
-        </p:spPr>
-        <p:txBody>
-          <a:bodyPr wrap="square" rtlCol="0">
-            <a:spAutoFit/>
-          </a:bodyPr>
-          <a:p>
-            <a:r>
-              <a:rPr lang="en-US" altLang="zh-CN" sz="2400">
-                <a:solidFill>
-                  <a:srgbClr val="846749"/>
-                </a:solidFill>
-                <a:latin typeface="HarmonyOS Sans SC Medium" panose="00000600000000000000" charset="-122"/>
-                <a:ea typeface="HarmonyOS Sans SC Medium" panose="00000600000000000000" charset="-122"/>
-                <a:cs typeface="HarmonyOS Sans SC Medium" panose="00000600000000000000" charset="-122"/>
-                <a:sym typeface="+mn-ea"/>
-              </a:rPr>
-              <a:t>Result Analysis</a:t>
-            </a:r>
-            <a:endParaRPr lang="en-US" altLang="zh-CN" sz="2400">
-              <a:solidFill>
-                <a:srgbClr val="846749"/>
-              </a:solidFill>
-              <a:latin typeface="HarmonyOS Sans SC Medium" panose="00000600000000000000" charset="-122"/>
-              <a:ea typeface="HarmonyOS Sans SC Medium" panose="00000600000000000000" charset="-122"/>
-              <a:cs typeface="HarmonyOS Sans SC Medium" panose="00000600000000000000" charset="-122"/>
-              <a:sym typeface="+mn-ea"/>
-            </a:endParaRPr>
-          </a:p>
-        </p:txBody>
-      </p:sp>
-      <p:sp>
-        <p:nvSpPr>
-          <p:cNvPr id="46" name="椭圆 45"/>
-          <p:cNvSpPr/>
-          <p:nvPr>
-            <p:custDataLst>
-              <p:tags r:id="rId12"/>
-            </p:custDataLst>
-          </p:nvPr>
-        </p:nvSpPr>
-        <p:spPr>
-          <a:xfrm>
-            <a:off x="6685915" y="4191635"/>
-            <a:ext cx="705485" cy="705485"/>
-          </a:xfrm>
-          <a:prstGeom prst="ellipse">
-            <a:avLst/>
-          </a:prstGeom>
-          <a:solidFill>
-            <a:srgbClr val="846749"/>
-          </a:solidFill>
-          <a:ln>
-            <a:noFill/>
-          </a:ln>
-        </p:spPr>
-        <p:style>
-          <a:lnRef idx="2">
-            <a:schemeClr val="accent1">
-              <a:shade val="50000"/>
-            </a:schemeClr>
-          </a:lnRef>
-          <a:fillRef idx="1">
-            <a:schemeClr val="accent1"/>
-          </a:fillRef>
-          <a:effectRef idx="0">
-            <a:schemeClr val="accent1"/>
-          </a:effectRef>
-          <a:fontRef idx="minor">
-            <a:schemeClr val="lt1"/>
-          </a:fontRef>
-        </p:style>
-        <p:txBody>
-          <a:bodyPr rtlCol="0" anchor="ctr"/>
-          <a:p>
-            <a:pPr algn="ctr"/>
-            <a:endParaRPr lang="en-US" altLang="zh-CN" sz="2000">
-              <a:latin typeface="HarmonyOS Sans SC Medium" panose="00000600000000000000" charset="-122"/>
-              <a:ea typeface="HarmonyOS Sans SC Medium" panose="00000600000000000000" charset="-122"/>
-              <a:cs typeface="HarmonyOS Sans SC Medium" panose="00000600000000000000" charset="-122"/>
-            </a:endParaRPr>
-          </a:p>
-        </p:txBody>
-      </p:sp>
-      <p:sp>
-        <p:nvSpPr>
-          <p:cNvPr id="47" name="文本框 46"/>
-          <p:cNvSpPr txBox="1"/>
-          <p:nvPr>
-            <p:custDataLst>
-              <p:tags r:id="rId13"/>
-            </p:custDataLst>
-          </p:nvPr>
-        </p:nvSpPr>
-        <p:spPr>
-          <a:xfrm>
-            <a:off x="6705600" y="4217035"/>
-            <a:ext cx="690880" cy="645160"/>
-          </a:xfrm>
-          <a:prstGeom prst="rect">
-            <a:avLst/>
-          </a:prstGeom>
-          <a:noFill/>
-        </p:spPr>
-        <p:txBody>
-          <a:bodyPr wrap="none" rtlCol="0">
-            <a:spAutoFit/>
-          </a:bodyPr>
-          <a:p>
-            <a:r>
-              <a:rPr lang="en-US" altLang="zh-CN" sz="3600">
-                <a:solidFill>
-                  <a:schemeClr val="bg1"/>
-                </a:solidFill>
-                <a:cs typeface="HarmonyOS Sans SC Medium" panose="00000600000000000000" charset="-122"/>
-              </a:rPr>
-              <a:t>04</a:t>
-            </a:r>
-            <a:endParaRPr lang="en-US" altLang="zh-CN" sz="3600">
-              <a:solidFill>
-                <a:schemeClr val="bg1"/>
-              </a:solidFill>
-              <a:cs typeface="HarmonyOS Sans SC Medium" panose="00000600000000000000" charset="-122"/>
-            </a:endParaRPr>
-          </a:p>
-        </p:txBody>
-      </p:sp>
-    </p:spTree>
-    <p:custDataLst>
-      <p:tags r:id="rId14"/>
-    </p:custDataLst>
-  </p:cSld>
-  <p:clrMapOvr>
-    <a:masterClrMapping/>
-  </p:clrMapOvr>
-  <p:timing>
-    <p:tnLst>
-      <p:par>
-        <p:cTn id="1" dur="indefinite" restart="never" nodeType="tmRoot"/>
-      </p:par>
-    </p:tnLst>
-  </p:timing>
-</p:sld>
-</file>
-
-<file path=ppt/slides/slide20.xml><?xml version="1.0" encoding="utf-8"?>
+<file path=ppt/slides/slide19.xml><?xml version="1.0" encoding="utf-8"?>
 <p:sld xmlns:a="http://schemas.openxmlformats.org/drawingml/2006/main" xmlns:r="http://schemas.openxmlformats.org/officeDocument/2006/relationships" xmlns:p="http://schemas.openxmlformats.org/presentationml/2006/main">
   <p:cSld>
     <p:bg>
@@ -11985,6 +11056,17 @@
             <a:pPr>
               <a:buAutoNum type="arabicPeriod"/>
             </a:pPr>
+            <a:r>
+              <a:rPr lang="en-US" altLang="zh-CN" sz="1000" i="1" dirty="0">
+                <a:solidFill>
+                  <a:srgbClr val="846749"/>
+                </a:solidFill>
+                <a:latin typeface="HarmonyOS Sans SC Medium" panose="00000600000000000000" charset="-122"/>
+                <a:ea typeface="HarmonyOS Sans SC Medium" panose="00000600000000000000" charset="-122"/>
+                <a:cs typeface="HarmonyOS Sans SC Medium" panose="00000600000000000000" charset="-122"/>
+              </a:rPr>
+              <a:t>Benchmark measurements are generated using benchmark.py; token usage, latency, and runtime statistics may vary across execution environments and measurement times.</a:t>
+            </a:r>
             <a:endParaRPr lang="en-US" altLang="zh-CN" sz="1000" i="1" dirty="0">
               <a:solidFill>
                 <a:srgbClr val="846749"/>
@@ -12007,7 +11089,7 @@
                 <a:ea typeface="HarmonyOS Sans SC Medium" panose="00000600000000000000" charset="-122"/>
                 <a:cs typeface="HarmonyOS Sans SC Medium" panose="00000600000000000000" charset="-122"/>
               </a:rPr>
-              <a:t>Benchmark measurements are generated using benchmark.py; token usage, latency, and runtime statistics may vary across execution environments and measurement times.</a:t>
+              <a:t>Reported person-hour estimates (Manual: 20.0 h, AutoTestDesign: 2.55 h) are based on the Mini-E-Commerce case study and should not be interpreted as universal values for other projects or domains.</a:t>
             </a:r>
             <a:endParaRPr lang="en-US" altLang="zh-CN" sz="1000" i="1" dirty="0">
               <a:solidFill>
@@ -12022,19 +11104,6 @@
             <a:pPr>
               <a:buAutoNum type="arabicPeriod"/>
             </a:pPr>
-            <a:endParaRPr lang="en-US" altLang="zh-CN" sz="1000" i="1" dirty="0">
-              <a:solidFill>
-                <a:srgbClr val="846749"/>
-              </a:solidFill>
-              <a:latin typeface="HarmonyOS Sans SC Medium" panose="00000600000000000000" charset="-122"/>
-              <a:ea typeface="HarmonyOS Sans SC Medium" panose="00000600000000000000" charset="-122"/>
-              <a:cs typeface="HarmonyOS Sans SC Medium" panose="00000600000000000000" charset="-122"/>
-            </a:endParaRPr>
-          </a:p>
-          <a:p>
-            <a:pPr>
-              <a:buAutoNum type="arabicPeriod"/>
-            </a:pPr>
             <a:r>
               <a:rPr lang="en-US" altLang="zh-CN" sz="1000" i="1" dirty="0">
                 <a:solidFill>
@@ -12044,7 +11113,7 @@
                 <a:ea typeface="HarmonyOS Sans SC Medium" panose="00000600000000000000" charset="-122"/>
                 <a:cs typeface="HarmonyOS Sans SC Medium" panose="00000600000000000000" charset="-122"/>
               </a:rPr>
-              <a:t>Reported person-hour estimates (Manual: 20.0 h, AutoTestDesign: 2.55 h) are based on the Mini-E-Commerce case study and should not be interpreted as universal values for other projects or domains.</a:t>
+              <a:t>To inspect the cost of each pipeline execution, refer to the files under outputs/run_&lt;timestamp&gt;/docs/.</a:t>
             </a:r>
             <a:endParaRPr lang="en-US" altLang="zh-CN" sz="1000" i="1" dirty="0">
               <a:solidFill>
@@ -12075,7 +11144,694 @@
 </p:sld>
 </file>
 
-<file path=ppt/slides/slide21.xml><?xml version="1.0" encoding="utf-8"?>
+<file path=ppt/slides/slide2.xml><?xml version="1.0" encoding="utf-8"?>
+<p:sld xmlns:a="http://schemas.openxmlformats.org/drawingml/2006/main" xmlns:r="http://schemas.openxmlformats.org/officeDocument/2006/relationships" xmlns:p="http://schemas.openxmlformats.org/presentationml/2006/main">
+  <p:cSld>
+    <p:bg>
+      <p:bgPr>
+        <a:noFill/>
+        <a:effectLst/>
+      </p:bgPr>
+    </p:bg>
+    <p:spTree>
+      <p:nvGrpSpPr>
+        <p:cNvPr id="1" name=""/>
+        <p:cNvGrpSpPr/>
+        <p:nvPr/>
+      </p:nvGrpSpPr>
+      <p:grpSpPr/>
+      <p:pic>
+        <p:nvPicPr>
+          <p:cNvPr id="2" name="图片 1" descr="q2"/>
+          <p:cNvPicPr>
+            <a:picLocks noChangeAspect="1"/>
+          </p:cNvPicPr>
+          <p:nvPr/>
+        </p:nvPicPr>
+        <p:blipFill>
+          <a:blip r:embed="rId1"/>
+          <a:stretch>
+            <a:fillRect/>
+          </a:stretch>
+        </p:blipFill>
+        <p:spPr>
+          <a:xfrm>
+            <a:off x="0" y="0"/>
+            <a:ext cx="12192000" cy="6858000"/>
+          </a:xfrm>
+          <a:prstGeom prst="rect">
+            <a:avLst/>
+          </a:prstGeom>
+        </p:spPr>
+      </p:pic>
+      <p:sp>
+        <p:nvSpPr>
+          <p:cNvPr id="32" name="稻壳夜秋https://www.docer.com/works?userid=555357443"/>
+          <p:cNvSpPr txBox="1"/>
+          <p:nvPr>
+            <p:custDataLst>
+              <p:tags r:id="rId2"/>
+            </p:custDataLst>
+          </p:nvPr>
+        </p:nvSpPr>
+        <p:spPr>
+          <a:xfrm>
+            <a:off x="2976880" y="2861945"/>
+            <a:ext cx="3632835" cy="460375"/>
+          </a:xfrm>
+          <a:prstGeom prst="rect">
+            <a:avLst/>
+          </a:prstGeom>
+          <a:noFill/>
+        </p:spPr>
+        <p:txBody>
+          <a:bodyPr wrap="square" rtlCol="0">
+            <a:spAutoFit/>
+          </a:bodyPr>
+          <a:p>
+            <a:r>
+              <a:rPr lang="en-US" altLang="zh-CN" sz="2400">
+                <a:solidFill>
+                  <a:srgbClr val="846749"/>
+                </a:solidFill>
+                <a:latin typeface="HarmonyOS Sans SC Medium" panose="00000600000000000000" charset="-122"/>
+                <a:ea typeface="HarmonyOS Sans SC Medium" panose="00000600000000000000" charset="-122"/>
+                <a:cs typeface="HarmonyOS Sans SC Medium" panose="00000600000000000000" charset="-122"/>
+                <a:sym typeface="+mn-ea"/>
+              </a:rPr>
+              <a:t>The Problem &amp; Our Idea</a:t>
+            </a:r>
+            <a:endParaRPr lang="en-US" altLang="zh-CN" sz="2400">
+              <a:solidFill>
+                <a:srgbClr val="846749"/>
+              </a:solidFill>
+              <a:latin typeface="HarmonyOS Sans SC Medium" panose="00000600000000000000" charset="-122"/>
+              <a:ea typeface="HarmonyOS Sans SC Medium" panose="00000600000000000000" charset="-122"/>
+              <a:cs typeface="HarmonyOS Sans SC Medium" panose="00000600000000000000" charset="-122"/>
+              <a:sym typeface="+mn-ea"/>
+            </a:endParaRPr>
+          </a:p>
+        </p:txBody>
+      </p:sp>
+      <p:sp>
+        <p:nvSpPr>
+          <p:cNvPr id="3" name="椭圆 2"/>
+          <p:cNvSpPr/>
+          <p:nvPr>
+            <p:custDataLst>
+              <p:tags r:id="rId3"/>
+            </p:custDataLst>
+          </p:nvPr>
+        </p:nvSpPr>
+        <p:spPr>
+          <a:xfrm>
+            <a:off x="2190115" y="2743835"/>
+            <a:ext cx="705485" cy="705485"/>
+          </a:xfrm>
+          <a:prstGeom prst="ellipse">
+            <a:avLst/>
+          </a:prstGeom>
+          <a:solidFill>
+            <a:srgbClr val="846749"/>
+          </a:solidFill>
+          <a:ln>
+            <a:noFill/>
+          </a:ln>
+        </p:spPr>
+        <p:style>
+          <a:lnRef idx="2">
+            <a:schemeClr val="accent1">
+              <a:shade val="50000"/>
+            </a:schemeClr>
+          </a:lnRef>
+          <a:fillRef idx="1">
+            <a:schemeClr val="accent1"/>
+          </a:fillRef>
+          <a:effectRef idx="0">
+            <a:schemeClr val="accent1"/>
+          </a:effectRef>
+          <a:fontRef idx="minor">
+            <a:schemeClr val="lt1"/>
+          </a:fontRef>
+        </p:style>
+        <p:txBody>
+          <a:bodyPr rtlCol="0" anchor="ctr"/>
+          <a:p>
+            <a:pPr algn="ctr"/>
+            <a:endParaRPr lang="en-US" altLang="zh-CN" sz="2000">
+              <a:latin typeface="HarmonyOS Sans SC Medium" panose="00000600000000000000" charset="-122"/>
+              <a:ea typeface="HarmonyOS Sans SC Medium" panose="00000600000000000000" charset="-122"/>
+              <a:cs typeface="HarmonyOS Sans SC Medium" panose="00000600000000000000" charset="-122"/>
+            </a:endParaRPr>
+          </a:p>
+        </p:txBody>
+      </p:sp>
+      <p:sp>
+        <p:nvSpPr>
+          <p:cNvPr id="28" name="文本框 27"/>
+          <p:cNvSpPr txBox="1"/>
+          <p:nvPr/>
+        </p:nvSpPr>
+        <p:spPr>
+          <a:xfrm>
+            <a:off x="4535805" y="926465"/>
+            <a:ext cx="3121025" cy="829945"/>
+          </a:xfrm>
+          <a:prstGeom prst="rect">
+            <a:avLst/>
+          </a:prstGeom>
+          <a:noFill/>
+        </p:spPr>
+        <p:txBody>
+          <a:bodyPr wrap="none" rtlCol="0">
+            <a:spAutoFit/>
+          </a:bodyPr>
+          <a:p>
+            <a:pPr algn="l"/>
+            <a:r>
+              <a:rPr lang="en-US" sz="4800">
+                <a:ln>
+                  <a:noFill/>
+                </a:ln>
+                <a:solidFill>
+                  <a:srgbClr val="846749"/>
+                </a:solidFill>
+                <a:latin typeface="思源宋体 CN Heavy" panose="02020900000000000000" charset="-122"/>
+                <a:ea typeface="思源宋体 CN Heavy" panose="02020900000000000000" charset="-122"/>
+                <a:cs typeface="HarmonyOS Sans SC Medium" panose="00000600000000000000" charset="-122"/>
+                <a:sym typeface="+mn-ea"/>
+              </a:rPr>
+              <a:t>CONTENTS</a:t>
+            </a:r>
+            <a:endParaRPr lang="zh-CN" sz="4800">
+              <a:solidFill>
+                <a:srgbClr val="846749"/>
+              </a:solidFill>
+              <a:latin typeface="思源宋体 CN Heavy" panose="02020900000000000000" charset="-122"/>
+              <a:ea typeface="思源宋体 CN Heavy" panose="02020900000000000000" charset="-122"/>
+              <a:cs typeface="HarmonyOS Sans SC Medium" panose="00000600000000000000" charset="-122"/>
+            </a:endParaRPr>
+          </a:p>
+        </p:txBody>
+      </p:sp>
+      <p:sp>
+        <p:nvSpPr>
+          <p:cNvPr id="30" name="文本框 29"/>
+          <p:cNvSpPr txBox="1"/>
+          <p:nvPr>
+            <p:custDataLst>
+              <p:tags r:id="rId4"/>
+            </p:custDataLst>
+          </p:nvPr>
+        </p:nvSpPr>
+        <p:spPr>
+          <a:xfrm>
+            <a:off x="2209800" y="2769235"/>
+            <a:ext cx="690880" cy="645160"/>
+          </a:xfrm>
+          <a:prstGeom prst="rect">
+            <a:avLst/>
+          </a:prstGeom>
+          <a:noFill/>
+        </p:spPr>
+        <p:txBody>
+          <a:bodyPr wrap="none" rtlCol="0">
+            <a:spAutoFit/>
+          </a:bodyPr>
+          <a:p>
+            <a:r>
+              <a:rPr lang="en-US" altLang="zh-CN" sz="3600">
+                <a:solidFill>
+                  <a:schemeClr val="bg1"/>
+                </a:solidFill>
+                <a:cs typeface="HarmonyOS Sans SC Medium" panose="00000600000000000000" charset="-122"/>
+              </a:rPr>
+              <a:t>01</a:t>
+            </a:r>
+            <a:endParaRPr lang="en-US" altLang="zh-CN" sz="3600">
+              <a:solidFill>
+                <a:schemeClr val="bg1"/>
+              </a:solidFill>
+              <a:cs typeface="HarmonyOS Sans SC Medium" panose="00000600000000000000" charset="-122"/>
+            </a:endParaRPr>
+          </a:p>
+        </p:txBody>
+      </p:sp>
+      <p:sp>
+        <p:nvSpPr>
+          <p:cNvPr id="34" name="稻壳夜秋https://www.docer.com/works?userid=555357443"/>
+          <p:cNvSpPr txBox="1"/>
+          <p:nvPr>
+            <p:custDataLst>
+              <p:tags r:id="rId5"/>
+            </p:custDataLst>
+          </p:nvPr>
+        </p:nvSpPr>
+        <p:spPr>
+          <a:xfrm>
+            <a:off x="7497445" y="2861945"/>
+            <a:ext cx="3632835" cy="460375"/>
+          </a:xfrm>
+          <a:prstGeom prst="rect">
+            <a:avLst/>
+          </a:prstGeom>
+          <a:noFill/>
+        </p:spPr>
+        <p:txBody>
+          <a:bodyPr wrap="square" rtlCol="0">
+            <a:spAutoFit/>
+          </a:bodyPr>
+          <a:p>
+            <a:pPr algn="l"/>
+            <a:r>
+              <a:rPr lang="en-US" altLang="zh-CN" sz="2400">
+                <a:solidFill>
+                  <a:srgbClr val="846749"/>
+                </a:solidFill>
+                <a:latin typeface="HarmonyOS Sans SC Medium" panose="00000600000000000000" charset="-122"/>
+                <a:ea typeface="HarmonyOS Sans SC Medium" panose="00000600000000000000" charset="-122"/>
+                <a:cs typeface="HarmonyOS Sans SC Medium" panose="00000600000000000000" charset="-122"/>
+                <a:sym typeface="+mn-ea"/>
+              </a:rPr>
+              <a:t>System Design</a:t>
+            </a:r>
+            <a:endParaRPr lang="en-US" altLang="zh-CN" sz="2400">
+              <a:solidFill>
+                <a:srgbClr val="846749"/>
+              </a:solidFill>
+              <a:latin typeface="HarmonyOS Sans SC Medium" panose="00000600000000000000" charset="-122"/>
+              <a:ea typeface="HarmonyOS Sans SC Medium" panose="00000600000000000000" charset="-122"/>
+              <a:cs typeface="HarmonyOS Sans SC Medium" panose="00000600000000000000" charset="-122"/>
+              <a:sym typeface="+mn-ea"/>
+            </a:endParaRPr>
+          </a:p>
+        </p:txBody>
+      </p:sp>
+      <p:sp>
+        <p:nvSpPr>
+          <p:cNvPr id="36" name="椭圆 35"/>
+          <p:cNvSpPr/>
+          <p:nvPr>
+            <p:custDataLst>
+              <p:tags r:id="rId6"/>
+            </p:custDataLst>
+          </p:nvPr>
+        </p:nvSpPr>
+        <p:spPr>
+          <a:xfrm>
+            <a:off x="6685915" y="2743835"/>
+            <a:ext cx="705485" cy="705485"/>
+          </a:xfrm>
+          <a:prstGeom prst="ellipse">
+            <a:avLst/>
+          </a:prstGeom>
+          <a:solidFill>
+            <a:srgbClr val="846749"/>
+          </a:solidFill>
+          <a:ln>
+            <a:noFill/>
+          </a:ln>
+        </p:spPr>
+        <p:style>
+          <a:lnRef idx="2">
+            <a:schemeClr val="accent1">
+              <a:shade val="50000"/>
+            </a:schemeClr>
+          </a:lnRef>
+          <a:fillRef idx="1">
+            <a:schemeClr val="accent1"/>
+          </a:fillRef>
+          <a:effectRef idx="0">
+            <a:schemeClr val="accent1"/>
+          </a:effectRef>
+          <a:fontRef idx="minor">
+            <a:schemeClr val="lt1"/>
+          </a:fontRef>
+        </p:style>
+        <p:txBody>
+          <a:bodyPr rtlCol="0" anchor="ctr"/>
+          <a:p>
+            <a:pPr algn="ctr"/>
+            <a:endParaRPr lang="en-US" altLang="zh-CN" sz="2000">
+              <a:latin typeface="HarmonyOS Sans SC Medium" panose="00000600000000000000" charset="-122"/>
+              <a:ea typeface="HarmonyOS Sans SC Medium" panose="00000600000000000000" charset="-122"/>
+              <a:cs typeface="HarmonyOS Sans SC Medium" panose="00000600000000000000" charset="-122"/>
+            </a:endParaRPr>
+          </a:p>
+        </p:txBody>
+      </p:sp>
+      <p:sp>
+        <p:nvSpPr>
+          <p:cNvPr id="37" name="文本框 36"/>
+          <p:cNvSpPr txBox="1"/>
+          <p:nvPr>
+            <p:custDataLst>
+              <p:tags r:id="rId7"/>
+            </p:custDataLst>
+          </p:nvPr>
+        </p:nvSpPr>
+        <p:spPr>
+          <a:xfrm>
+            <a:off x="6705600" y="2769235"/>
+            <a:ext cx="690880" cy="645160"/>
+          </a:xfrm>
+          <a:prstGeom prst="rect">
+            <a:avLst/>
+          </a:prstGeom>
+          <a:noFill/>
+        </p:spPr>
+        <p:txBody>
+          <a:bodyPr wrap="none" rtlCol="0">
+            <a:spAutoFit/>
+          </a:bodyPr>
+          <a:p>
+            <a:r>
+              <a:rPr lang="en-US" altLang="zh-CN" sz="3600">
+                <a:solidFill>
+                  <a:schemeClr val="bg1"/>
+                </a:solidFill>
+                <a:cs typeface="HarmonyOS Sans SC Medium" panose="00000600000000000000" charset="-122"/>
+              </a:rPr>
+              <a:t>02</a:t>
+            </a:r>
+            <a:endParaRPr lang="en-US" altLang="zh-CN" sz="3600">
+              <a:solidFill>
+                <a:schemeClr val="bg1"/>
+              </a:solidFill>
+              <a:cs typeface="HarmonyOS Sans SC Medium" panose="00000600000000000000" charset="-122"/>
+            </a:endParaRPr>
+          </a:p>
+        </p:txBody>
+      </p:sp>
+      <p:sp>
+        <p:nvSpPr>
+          <p:cNvPr id="39" name="稻壳夜秋https://www.docer.com/works?userid=555357443"/>
+          <p:cNvSpPr txBox="1"/>
+          <p:nvPr>
+            <p:custDataLst>
+              <p:tags r:id="rId8"/>
+            </p:custDataLst>
+          </p:nvPr>
+        </p:nvSpPr>
+        <p:spPr>
+          <a:xfrm>
+            <a:off x="2971800" y="4309745"/>
+            <a:ext cx="3632835" cy="460375"/>
+          </a:xfrm>
+          <a:prstGeom prst="rect">
+            <a:avLst/>
+          </a:prstGeom>
+          <a:noFill/>
+        </p:spPr>
+        <p:txBody>
+          <a:bodyPr wrap="square" rtlCol="0">
+            <a:spAutoFit/>
+          </a:bodyPr>
+          <a:p>
+            <a:r>
+              <a:rPr lang="en-US" altLang="zh-CN" sz="2400">
+                <a:solidFill>
+                  <a:srgbClr val="846749"/>
+                </a:solidFill>
+                <a:latin typeface="HarmonyOS Sans SC Medium" panose="00000600000000000000" charset="-122"/>
+                <a:ea typeface="HarmonyOS Sans SC Medium" panose="00000600000000000000" charset="-122"/>
+                <a:cs typeface="HarmonyOS Sans SC Medium" panose="00000600000000000000" charset="-122"/>
+                <a:sym typeface="+mn-ea"/>
+              </a:rPr>
+              <a:t>Test Design</a:t>
+            </a:r>
+            <a:endParaRPr lang="en-US" altLang="zh-CN" sz="2400">
+              <a:solidFill>
+                <a:srgbClr val="846749"/>
+              </a:solidFill>
+              <a:latin typeface="HarmonyOS Sans SC Medium" panose="00000600000000000000" charset="-122"/>
+              <a:ea typeface="HarmonyOS Sans SC Medium" panose="00000600000000000000" charset="-122"/>
+              <a:cs typeface="HarmonyOS Sans SC Medium" panose="00000600000000000000" charset="-122"/>
+              <a:sym typeface="+mn-ea"/>
+            </a:endParaRPr>
+          </a:p>
+        </p:txBody>
+      </p:sp>
+      <p:sp>
+        <p:nvSpPr>
+          <p:cNvPr id="41" name="椭圆 40"/>
+          <p:cNvSpPr/>
+          <p:nvPr>
+            <p:custDataLst>
+              <p:tags r:id="rId9"/>
+            </p:custDataLst>
+          </p:nvPr>
+        </p:nvSpPr>
+        <p:spPr>
+          <a:xfrm>
+            <a:off x="2190115" y="4191635"/>
+            <a:ext cx="705485" cy="705485"/>
+          </a:xfrm>
+          <a:prstGeom prst="ellipse">
+            <a:avLst/>
+          </a:prstGeom>
+          <a:solidFill>
+            <a:srgbClr val="846749"/>
+          </a:solidFill>
+          <a:ln>
+            <a:noFill/>
+          </a:ln>
+        </p:spPr>
+        <p:style>
+          <a:lnRef idx="2">
+            <a:schemeClr val="accent1">
+              <a:shade val="50000"/>
+            </a:schemeClr>
+          </a:lnRef>
+          <a:fillRef idx="1">
+            <a:schemeClr val="accent1"/>
+          </a:fillRef>
+          <a:effectRef idx="0">
+            <a:schemeClr val="accent1"/>
+          </a:effectRef>
+          <a:fontRef idx="minor">
+            <a:schemeClr val="lt1"/>
+          </a:fontRef>
+        </p:style>
+        <p:txBody>
+          <a:bodyPr rtlCol="0" anchor="ctr"/>
+          <a:p>
+            <a:pPr algn="ctr"/>
+            <a:endParaRPr lang="en-US" altLang="zh-CN" sz="2000">
+              <a:latin typeface="HarmonyOS Sans SC Medium" panose="00000600000000000000" charset="-122"/>
+              <a:ea typeface="HarmonyOS Sans SC Medium" panose="00000600000000000000" charset="-122"/>
+              <a:cs typeface="HarmonyOS Sans SC Medium" panose="00000600000000000000" charset="-122"/>
+            </a:endParaRPr>
+          </a:p>
+        </p:txBody>
+      </p:sp>
+      <p:sp>
+        <p:nvSpPr>
+          <p:cNvPr id="42" name="文本框 41"/>
+          <p:cNvSpPr txBox="1"/>
+          <p:nvPr>
+            <p:custDataLst>
+              <p:tags r:id="rId10"/>
+            </p:custDataLst>
+          </p:nvPr>
+        </p:nvSpPr>
+        <p:spPr>
+          <a:xfrm>
+            <a:off x="2209800" y="4217035"/>
+            <a:ext cx="690880" cy="645160"/>
+          </a:xfrm>
+          <a:prstGeom prst="rect">
+            <a:avLst/>
+          </a:prstGeom>
+          <a:noFill/>
+        </p:spPr>
+        <p:txBody>
+          <a:bodyPr wrap="none" rtlCol="0">
+            <a:spAutoFit/>
+          </a:bodyPr>
+          <a:p>
+            <a:r>
+              <a:rPr lang="en-US" altLang="zh-CN" sz="3600">
+                <a:solidFill>
+                  <a:schemeClr val="bg1"/>
+                </a:solidFill>
+                <a:cs typeface="HarmonyOS Sans SC Medium" panose="00000600000000000000" charset="-122"/>
+              </a:rPr>
+              <a:t>03</a:t>
+            </a:r>
+            <a:endParaRPr lang="en-US" altLang="zh-CN" sz="3600">
+              <a:solidFill>
+                <a:schemeClr val="bg1"/>
+              </a:solidFill>
+              <a:cs typeface="HarmonyOS Sans SC Medium" panose="00000600000000000000" charset="-122"/>
+            </a:endParaRPr>
+          </a:p>
+        </p:txBody>
+      </p:sp>
+      <p:sp>
+        <p:nvSpPr>
+          <p:cNvPr id="44" name="稻壳夜秋https://www.docer.com/works?userid=555357443"/>
+          <p:cNvSpPr txBox="1"/>
+          <p:nvPr>
+            <p:custDataLst>
+              <p:tags r:id="rId11"/>
+            </p:custDataLst>
+          </p:nvPr>
+        </p:nvSpPr>
+        <p:spPr>
+          <a:xfrm>
+            <a:off x="7497445" y="4309745"/>
+            <a:ext cx="3632835" cy="460375"/>
+          </a:xfrm>
+          <a:prstGeom prst="rect">
+            <a:avLst/>
+          </a:prstGeom>
+          <a:noFill/>
+        </p:spPr>
+        <p:txBody>
+          <a:bodyPr wrap="square" rtlCol="0">
+            <a:spAutoFit/>
+          </a:bodyPr>
+          <a:p>
+            <a:r>
+              <a:rPr lang="en-US" altLang="zh-CN" sz="2400">
+                <a:solidFill>
+                  <a:srgbClr val="846749"/>
+                </a:solidFill>
+                <a:latin typeface="HarmonyOS Sans SC Medium" panose="00000600000000000000" charset="-122"/>
+                <a:ea typeface="HarmonyOS Sans SC Medium" panose="00000600000000000000" charset="-122"/>
+                <a:cs typeface="HarmonyOS Sans SC Medium" panose="00000600000000000000" charset="-122"/>
+                <a:sym typeface="+mn-ea"/>
+              </a:rPr>
+              <a:t>Result Analysis</a:t>
+            </a:r>
+            <a:endParaRPr lang="en-US" altLang="zh-CN" sz="2400">
+              <a:solidFill>
+                <a:srgbClr val="846749"/>
+              </a:solidFill>
+              <a:latin typeface="HarmonyOS Sans SC Medium" panose="00000600000000000000" charset="-122"/>
+              <a:ea typeface="HarmonyOS Sans SC Medium" panose="00000600000000000000" charset="-122"/>
+              <a:cs typeface="HarmonyOS Sans SC Medium" panose="00000600000000000000" charset="-122"/>
+              <a:sym typeface="+mn-ea"/>
+            </a:endParaRPr>
+          </a:p>
+        </p:txBody>
+      </p:sp>
+      <p:sp>
+        <p:nvSpPr>
+          <p:cNvPr id="46" name="椭圆 45"/>
+          <p:cNvSpPr/>
+          <p:nvPr>
+            <p:custDataLst>
+              <p:tags r:id="rId12"/>
+            </p:custDataLst>
+          </p:nvPr>
+        </p:nvSpPr>
+        <p:spPr>
+          <a:xfrm>
+            <a:off x="6685915" y="4191635"/>
+            <a:ext cx="705485" cy="705485"/>
+          </a:xfrm>
+          <a:prstGeom prst="ellipse">
+            <a:avLst/>
+          </a:prstGeom>
+          <a:solidFill>
+            <a:srgbClr val="846749"/>
+          </a:solidFill>
+          <a:ln>
+            <a:noFill/>
+          </a:ln>
+        </p:spPr>
+        <p:style>
+          <a:lnRef idx="2">
+            <a:schemeClr val="accent1">
+              <a:shade val="50000"/>
+            </a:schemeClr>
+          </a:lnRef>
+          <a:fillRef idx="1">
+            <a:schemeClr val="accent1"/>
+          </a:fillRef>
+          <a:effectRef idx="0">
+            <a:schemeClr val="accent1"/>
+          </a:effectRef>
+          <a:fontRef idx="minor">
+            <a:schemeClr val="lt1"/>
+          </a:fontRef>
+        </p:style>
+        <p:txBody>
+          <a:bodyPr rtlCol="0" anchor="ctr"/>
+          <a:p>
+            <a:pPr algn="ctr"/>
+            <a:endParaRPr lang="en-US" altLang="zh-CN" sz="2000">
+              <a:latin typeface="HarmonyOS Sans SC Medium" panose="00000600000000000000" charset="-122"/>
+              <a:ea typeface="HarmonyOS Sans SC Medium" panose="00000600000000000000" charset="-122"/>
+              <a:cs typeface="HarmonyOS Sans SC Medium" panose="00000600000000000000" charset="-122"/>
+            </a:endParaRPr>
+          </a:p>
+        </p:txBody>
+      </p:sp>
+      <p:sp>
+        <p:nvSpPr>
+          <p:cNvPr id="47" name="文本框 46"/>
+          <p:cNvSpPr txBox="1"/>
+          <p:nvPr>
+            <p:custDataLst>
+              <p:tags r:id="rId13"/>
+            </p:custDataLst>
+          </p:nvPr>
+        </p:nvSpPr>
+        <p:spPr>
+          <a:xfrm>
+            <a:off x="6705600" y="4217035"/>
+            <a:ext cx="690880" cy="645160"/>
+          </a:xfrm>
+          <a:prstGeom prst="rect">
+            <a:avLst/>
+          </a:prstGeom>
+          <a:noFill/>
+        </p:spPr>
+        <p:txBody>
+          <a:bodyPr wrap="none" rtlCol="0">
+            <a:spAutoFit/>
+          </a:bodyPr>
+          <a:p>
+            <a:r>
+              <a:rPr lang="en-US" altLang="zh-CN" sz="3600">
+                <a:solidFill>
+                  <a:schemeClr val="bg1"/>
+                </a:solidFill>
+                <a:cs typeface="HarmonyOS Sans SC Medium" panose="00000600000000000000" charset="-122"/>
+              </a:rPr>
+              <a:t>04</a:t>
+            </a:r>
+            <a:endParaRPr lang="en-US" altLang="zh-CN" sz="3600">
+              <a:solidFill>
+                <a:schemeClr val="bg1"/>
+              </a:solidFill>
+              <a:cs typeface="HarmonyOS Sans SC Medium" panose="00000600000000000000" charset="-122"/>
+            </a:endParaRPr>
+          </a:p>
+        </p:txBody>
+      </p:sp>
+    </p:spTree>
+    <p:custDataLst>
+      <p:tags r:id="rId14"/>
+    </p:custDataLst>
+  </p:cSld>
+  <p:clrMapOvr>
+    <a:masterClrMapping/>
+  </p:clrMapOvr>
+  <p:timing>
+    <p:tnLst>
+      <p:par>
+        <p:cTn id="1" dur="indefinite" restart="never" nodeType="tmRoot"/>
+      </p:par>
+    </p:tnLst>
+  </p:timing>
+</p:sld>
+</file>
+
+<file path=ppt/slides/slide20.xml><?xml version="1.0" encoding="utf-8"?>
 <p:sld xmlns:a="http://schemas.openxmlformats.org/drawingml/2006/main" xmlns:r="http://schemas.openxmlformats.org/officeDocument/2006/relationships" xmlns:p="http://schemas.openxmlformats.org/presentationml/2006/main">
   <p:cSld>
     <p:bg>
@@ -13219,7 +12975,7 @@
                 <a:cs typeface="HarmonyOS Sans SC Medium" panose="00000600000000000000" charset="-122"/>
                 <a:sym typeface="HarmonyOS Sans SC Medium" panose="00000600000000000000" charset="-122"/>
               </a:rPr>
-              <a:t>The system adopts an AI-assisted, technique-driven workflow in which an LLM structures requirements and assesses risk while deterministic rule engines apply EP, BVA, decision-table, and state-transition coverage. Human-in-the-loop interaction is preserved throughout the process: every intermediate artefact remains editable, and modifications automatically invalidate downstream outputs. Rather than generating documentation alone, the system emphasizes evidence generation by executing produced test cases against a real Django backend directly from the same interface. To ensure reproducibility, identical inputs always produce identical test suites byte-for-byte, while LLM-dependent components automatically fall back to rule-based execution when offline.</a:t>
+              <a:t>The system adopts an AI-assisted, technique-driven workflow in which an LLM structures requirements and assesses risk while deterministic rule engines apply EP, BVA, decision-table, and state-transition coverage. Human-in-the-loop interaction is preserved throughout the process: every intermediate artefact remains editable, and modifications automatically invalidate downstream outputs. The tool not only automatically generates deliverables compliant with IEEE 829, but also produces validation evidence by executing generated test cases against a real Django backend. To ensure reproducibility, identical inputs always produce identical test suites byte-for-byte, while LLM-dependent components automatically fall back to rule-based execution when offline.</a:t>
             </a:r>
             <a:endParaRPr lang="en-US" altLang="zh-CN" sz="1400" dirty="0">
               <a:solidFill>
@@ -14022,7 +13778,7 @@
       </p:sp>
       <p:pic>
         <p:nvPicPr>
-          <p:cNvPr id="3" name="图片 2"/>
+          <p:cNvPr id="4" name="图片 3" descr="截屏2026-06-02 15.59.48"/>
           <p:cNvPicPr>
             <a:picLocks noChangeAspect="1"/>
           </p:cNvPicPr>
@@ -14036,8 +13792,8 @@
         </p:blipFill>
         <p:spPr>
           <a:xfrm>
-            <a:off x="1770380" y="1315720"/>
-            <a:ext cx="3617595" cy="4883785"/>
+            <a:off x="1028700" y="1604645"/>
+            <a:ext cx="4037330" cy="4455160"/>
           </a:xfrm>
           <a:prstGeom prst="rect">
             <a:avLst/>
@@ -14209,7 +13965,7 @@
         <p:spPr>
           <a:xfrm>
             <a:off x="685165" y="4854575"/>
-            <a:ext cx="4025265" cy="583565"/>
+            <a:ext cx="4249420" cy="583565"/>
           </a:xfrm>
           <a:prstGeom prst="rect">
             <a:avLst/>
@@ -14230,7 +13986,7 @@
                 <a:ea typeface="HarmonyOS Sans SC Medium" panose="00000600000000000000" charset="-122"/>
                 <a:cs typeface="HarmonyOS Sans SC Medium" panose="00000600000000000000" charset="-122"/>
               </a:rPr>
-              <a:t>Two-layer model</a:t>
+              <a:t>Eight-Step Workflow</a:t>
             </a:r>
             <a:endParaRPr lang="en-US" altLang="zh-CN" sz="3200">
               <a:solidFill>
@@ -14243,519 +13999,13 @@
           </a:p>
         </p:txBody>
       </p:sp>
-      <p:sp>
-        <p:nvSpPr>
-          <p:cNvPr id="8206" name="TextBox 11"/>
-          <p:cNvSpPr/>
-          <p:nvPr/>
-        </p:nvSpPr>
-        <p:spPr>
-          <a:xfrm>
-            <a:off x="4352290" y="3740785"/>
-            <a:ext cx="7854950" cy="2654300"/>
-          </a:xfrm>
-          <a:prstGeom prst="rect">
-            <a:avLst/>
-          </a:prstGeom>
-          <a:noFill/>
-          <a:ln w="9525">
-            <a:noFill/>
-          </a:ln>
-        </p:spPr>
-        <p:txBody>
-          <a:bodyPr wrap="square">
-            <a:spAutoFit/>
-          </a:bodyPr>
-          <a:p>
-            <a:pPr marL="285750" indent="-285750">
-              <a:lnSpc>
-                <a:spcPct val="170000"/>
-              </a:lnSpc>
-              <a:buFont typeface="Arial" panose="020B0604020202090204" pitchFamily="34" charset="0"/>
-              <a:buChar char="•"/>
-            </a:pPr>
-            <a:r>
-              <a:rPr lang="en-US" altLang="zh-CN" sz="1400" b="1" dirty="0">
-                <a:solidFill>
-                  <a:srgbClr val="846749"/>
-                </a:solidFill>
-                <a:latin typeface="HarmonyOS Sans SC Medium" panose="00000600000000000000" charset="-122"/>
-                <a:ea typeface="HarmonyOS Sans SC Medium" panose="00000600000000000000" charset="-122"/>
-                <a:cs typeface="HarmonyOS Sans SC Medium" panose="00000600000000000000" charset="-122"/>
-                <a:sym typeface="HarmonyOS Sans SC Medium" panose="00000600000000000000" charset="-122"/>
-              </a:rPr>
-              <a:t>UI layer (app.py)</a:t>
-            </a:r>
-            <a:r>
-              <a:rPr lang="en-US" altLang="zh-CN" sz="1400" dirty="0">
-                <a:solidFill>
-                  <a:srgbClr val="846749"/>
-                </a:solidFill>
-                <a:latin typeface="HarmonyOS Sans SC Medium" panose="00000600000000000000" charset="-122"/>
-                <a:ea typeface="HarmonyOS Sans SC Medium" panose="00000600000000000000" charset="-122"/>
-                <a:cs typeface="HarmonyOS Sans SC Medium" panose="00000600000000000000" charset="-122"/>
-                <a:sym typeface="HarmonyOS Sans SC Medium" panose="00000600000000000000" charset="-122"/>
-              </a:rPr>
-              <a:t>: scheduler functions + st.data_editor tables for interactive review.</a:t>
-            </a:r>
-            <a:endParaRPr lang="en-US" altLang="zh-CN" sz="1400" dirty="0">
-              <a:solidFill>
-                <a:srgbClr val="846749"/>
-              </a:solidFill>
-              <a:latin typeface="HarmonyOS Sans SC Medium" panose="00000600000000000000" charset="-122"/>
-              <a:ea typeface="HarmonyOS Sans SC Medium" panose="00000600000000000000" charset="-122"/>
-              <a:cs typeface="HarmonyOS Sans SC Medium" panose="00000600000000000000" charset="-122"/>
-              <a:sym typeface="HarmonyOS Sans SC Medium" panose="00000600000000000000" charset="-122"/>
-            </a:endParaRPr>
-          </a:p>
-          <a:p>
-            <a:pPr marL="285750" indent="-285750">
-              <a:lnSpc>
-                <a:spcPct val="170000"/>
-              </a:lnSpc>
-              <a:buFont typeface="Arial" panose="020B0604020202090204" pitchFamily="34" charset="0"/>
-              <a:buChar char="•"/>
-            </a:pPr>
-            <a:r>
-              <a:rPr lang="en-US" altLang="zh-CN" sz="1400" b="1" dirty="0">
-                <a:solidFill>
-                  <a:srgbClr val="846749"/>
-                </a:solidFill>
-                <a:latin typeface="HarmonyOS Sans SC Medium" panose="00000600000000000000" charset="-122"/>
-                <a:ea typeface="HarmonyOS Sans SC Medium" panose="00000600000000000000" charset="-122"/>
-                <a:cs typeface="HarmonyOS Sans SC Medium" panose="00000600000000000000" charset="-122"/>
-                <a:sym typeface="HarmonyOS Sans SC Medium" panose="00000600000000000000" charset="-122"/>
-              </a:rPr>
-              <a:t>Engine layer (core/)</a:t>
-            </a:r>
-            <a:r>
-              <a:rPr lang="en-US" altLang="zh-CN" sz="1400" dirty="0">
-                <a:solidFill>
-                  <a:srgbClr val="846749"/>
-                </a:solidFill>
-                <a:latin typeface="HarmonyOS Sans SC Medium" panose="00000600000000000000" charset="-122"/>
-                <a:ea typeface="HarmonyOS Sans SC Medium" panose="00000600000000000000" charset="-122"/>
-                <a:cs typeface="HarmonyOS Sans SC Medium" panose="00000600000000000000" charset="-122"/>
-                <a:sym typeface="HarmonyOS Sans SC Medium" panose="00000600000000000000" charset="-122"/>
-              </a:rPr>
-              <a:t> parser, risk analyser, coverage, test-case generator, state model, oracle, optimiser, exporter, in-UI runner.</a:t>
-            </a:r>
-            <a:endParaRPr lang="en-US" altLang="zh-CN" sz="1400" dirty="0">
-              <a:solidFill>
-                <a:srgbClr val="846749"/>
-              </a:solidFill>
-              <a:latin typeface="HarmonyOS Sans SC Medium" panose="00000600000000000000" charset="-122"/>
-              <a:ea typeface="HarmonyOS Sans SC Medium" panose="00000600000000000000" charset="-122"/>
-              <a:cs typeface="HarmonyOS Sans SC Medium" panose="00000600000000000000" charset="-122"/>
-              <a:sym typeface="HarmonyOS Sans SC Medium" panose="00000600000000000000" charset="-122"/>
-            </a:endParaRPr>
-          </a:p>
-          <a:p>
-            <a:pPr marL="285750" indent="-285750">
-              <a:lnSpc>
-                <a:spcPct val="170000"/>
-              </a:lnSpc>
-              <a:buFont typeface="Arial" panose="020B0604020202090204" pitchFamily="34" charset="0"/>
-              <a:buChar char="•"/>
-            </a:pPr>
-            <a:r>
-              <a:rPr lang="en-US" altLang="zh-CN" sz="1400" b="1" dirty="0">
-                <a:solidFill>
-                  <a:srgbClr val="846749"/>
-                </a:solidFill>
-                <a:latin typeface="HarmonyOS Sans SC Medium" panose="00000600000000000000" charset="-122"/>
-                <a:ea typeface="HarmonyOS Sans SC Medium" panose="00000600000000000000" charset="-122"/>
-                <a:cs typeface="HarmonyOS Sans SC Medium" panose="00000600000000000000" charset="-122"/>
-                <a:sym typeface="HarmonyOS Sans SC Medium" panose="00000600000000000000" charset="-122"/>
-              </a:rPr>
-              <a:t>External</a:t>
-            </a:r>
-            <a:r>
-              <a:rPr lang="en-US" altLang="zh-CN" sz="1400" dirty="0">
-                <a:solidFill>
-                  <a:srgbClr val="846749"/>
-                </a:solidFill>
-                <a:latin typeface="HarmonyOS Sans SC Medium" panose="00000600000000000000" charset="-122"/>
-                <a:ea typeface="HarmonyOS Sans SC Medium" panose="00000600000000000000" charset="-122"/>
-                <a:cs typeface="HarmonyOS Sans SC Medium" panose="00000600000000000000" charset="-122"/>
-                <a:sym typeface="HarmonyOS Sans SC Medium" panose="00000600000000000000" charset="-122"/>
-              </a:rPr>
-              <a:t> Mini-E-Commerce backend (Django REST) + LLM endpoint.</a:t>
-            </a:r>
-            <a:endParaRPr lang="en-US" altLang="zh-CN" sz="1400" dirty="0">
-              <a:solidFill>
-                <a:srgbClr val="846749"/>
-              </a:solidFill>
-              <a:latin typeface="HarmonyOS Sans SC Medium" panose="00000600000000000000" charset="-122"/>
-              <a:ea typeface="HarmonyOS Sans SC Medium" panose="00000600000000000000" charset="-122"/>
-              <a:cs typeface="HarmonyOS Sans SC Medium" panose="00000600000000000000" charset="-122"/>
-              <a:sym typeface="HarmonyOS Sans SC Medium" panose="00000600000000000000" charset="-122"/>
-            </a:endParaRPr>
-          </a:p>
-          <a:p>
-            <a:pPr marL="285750" indent="-285750">
-              <a:lnSpc>
-                <a:spcPct val="170000"/>
-              </a:lnSpc>
-              <a:buFont typeface="Arial" panose="020B0604020202090204" pitchFamily="34" charset="0"/>
-              <a:buChar char="•"/>
-            </a:pPr>
-            <a:r>
-              <a:rPr lang="en-US" altLang="zh-CN" sz="1400" b="1" dirty="0">
-                <a:solidFill>
-                  <a:srgbClr val="846749"/>
-                </a:solidFill>
-                <a:latin typeface="HarmonyOS Sans SC Medium" panose="00000600000000000000" charset="-122"/>
-                <a:ea typeface="HarmonyOS Sans SC Medium" panose="00000600000000000000" charset="-122"/>
-                <a:cs typeface="HarmonyOS Sans SC Medium" panose="00000600000000000000" charset="-122"/>
-                <a:sym typeface="HarmonyOS Sans SC Medium" panose="00000600000000000000" charset="-122"/>
-              </a:rPr>
-              <a:t>Colour legend</a:t>
-            </a:r>
-            <a:r>
-              <a:rPr lang="en-US" altLang="zh-CN" sz="1400" b="1" dirty="0">
-                <a:solidFill>
-                  <a:srgbClr val="846749"/>
-                </a:solidFill>
-                <a:latin typeface="HarmonyOS Sans SC Medium" panose="00000600000000000000" charset="-122"/>
-                <a:ea typeface="HarmonyOS Sans SC Medium" panose="00000600000000000000" charset="-122"/>
-                <a:cs typeface="HarmonyOS Sans SC Medium" panose="00000600000000000000" charset="-122"/>
-                <a:sym typeface="HarmonyOS Sans SC Medium" panose="00000600000000000000" charset="-122"/>
-              </a:rPr>
-              <a:t>: </a:t>
-            </a:r>
-            <a:r>
-              <a:rPr lang="en-US" altLang="zh-CN" sz="1400" dirty="0">
-                <a:solidFill>
-                  <a:srgbClr val="846749"/>
-                </a:solidFill>
-                <a:latin typeface="HarmonyOS Sans SC Medium" panose="00000600000000000000" charset="-122"/>
-                <a:ea typeface="HarmonyOS Sans SC Medium" panose="00000600000000000000" charset="-122"/>
-                <a:cs typeface="HarmonyOS Sans SC Medium" panose="00000600000000000000" charset="-122"/>
-                <a:sym typeface="HarmonyOS Sans SC Medium" panose="00000600000000000000" charset="-122"/>
-              </a:rPr>
-              <a:t>blue = LLM-backed, green = deterministic rule engines, orange = UI, purple = external.</a:t>
-            </a:r>
-            <a:endParaRPr lang="en-US" altLang="zh-CN" sz="1400" dirty="0">
-              <a:solidFill>
-                <a:srgbClr val="846749"/>
-              </a:solidFill>
-              <a:latin typeface="HarmonyOS Sans SC Medium" panose="00000600000000000000" charset="-122"/>
-              <a:ea typeface="HarmonyOS Sans SC Medium" panose="00000600000000000000" charset="-122"/>
-              <a:cs typeface="HarmonyOS Sans SC Medium" panose="00000600000000000000" charset="-122"/>
-              <a:sym typeface="HarmonyOS Sans SC Medium" panose="00000600000000000000" charset="-122"/>
-            </a:endParaRPr>
-          </a:p>
-          <a:p>
-            <a:pPr marL="285750" indent="-285750">
-              <a:lnSpc>
-                <a:spcPct val="170000"/>
-              </a:lnSpc>
-              <a:buFont typeface="Arial" panose="020B0604020202090204" pitchFamily="34" charset="0"/>
-              <a:buChar char="•"/>
-            </a:pPr>
-            <a:r>
-              <a:rPr lang="en-US" altLang="zh-CN" sz="1400" dirty="0">
-                <a:solidFill>
-                  <a:srgbClr val="846749"/>
-                </a:solidFill>
-                <a:latin typeface="HarmonyOS Sans SC Medium" panose="00000600000000000000" charset="-122"/>
-                <a:ea typeface="HarmonyOS Sans SC Medium" panose="00000600000000000000" charset="-122"/>
-                <a:cs typeface="HarmonyOS Sans SC Medium" panose="00000600000000000000" charset="-122"/>
-                <a:sym typeface="HarmonyOS Sans SC Medium" panose="00000600000000000000" charset="-122"/>
-              </a:rPr>
-              <a:t>Only </a:t>
-            </a:r>
-            <a:r>
-              <a:rPr lang="en-US" altLang="zh-CN" sz="1400" b="1" dirty="0">
-                <a:solidFill>
-                  <a:srgbClr val="846749"/>
-                </a:solidFill>
-                <a:latin typeface="HarmonyOS Sans SC Medium" panose="00000600000000000000" charset="-122"/>
-                <a:ea typeface="HarmonyOS Sans SC Medium" panose="00000600000000000000" charset="-122"/>
-                <a:cs typeface="HarmonyOS Sans SC Medium" panose="00000600000000000000" charset="-122"/>
-                <a:sym typeface="HarmonyOS Sans SC Medium" panose="00000600000000000000" charset="-122"/>
-              </a:rPr>
-              <a:t>two stages</a:t>
-            </a:r>
-            <a:r>
-              <a:rPr lang="en-US" altLang="zh-CN" sz="1400" dirty="0">
-                <a:solidFill>
-                  <a:srgbClr val="846749"/>
-                </a:solidFill>
-                <a:latin typeface="HarmonyOS Sans SC Medium" panose="00000600000000000000" charset="-122"/>
-                <a:ea typeface="HarmonyOS Sans SC Medium" panose="00000600000000000000" charset="-122"/>
-                <a:cs typeface="HarmonyOS Sans SC Medium" panose="00000600000000000000" charset="-122"/>
-                <a:sym typeface="HarmonyOS Sans SC Medium" panose="00000600000000000000" charset="-122"/>
-              </a:rPr>
-              <a:t> use the LLM (parser, risk); everything else is reproducible rule code.</a:t>
-            </a:r>
-            <a:endParaRPr lang="en-US" altLang="zh-CN" sz="1400" dirty="0">
-              <a:solidFill>
-                <a:srgbClr val="846749"/>
-              </a:solidFill>
-              <a:latin typeface="HarmonyOS Sans SC Medium" panose="00000600000000000000" charset="-122"/>
-              <a:ea typeface="HarmonyOS Sans SC Medium" panose="00000600000000000000" charset="-122"/>
-              <a:cs typeface="HarmonyOS Sans SC Medium" panose="00000600000000000000" charset="-122"/>
-              <a:sym typeface="HarmonyOS Sans SC Medium" panose="00000600000000000000" charset="-122"/>
-            </a:endParaRPr>
-          </a:p>
-        </p:txBody>
-      </p:sp>
-      <p:pic>
-        <p:nvPicPr>
-          <p:cNvPr id="5" name="图片 4" descr="截屏2026-05-30 14.55.14"/>
-          <p:cNvPicPr>
-            <a:picLocks noChangeAspect="1"/>
-          </p:cNvPicPr>
-          <p:nvPr/>
-        </p:nvPicPr>
-        <p:blipFill>
-          <a:blip r:embed="rId2"/>
-          <a:stretch>
-            <a:fillRect/>
-          </a:stretch>
-        </p:blipFill>
-        <p:spPr>
-          <a:xfrm>
-            <a:off x="0" y="1499870"/>
-            <a:ext cx="12192000" cy="2121535"/>
-          </a:xfrm>
-          <a:prstGeom prst="rect">
-            <a:avLst/>
-          </a:prstGeom>
-        </p:spPr>
-      </p:pic>
-    </p:spTree>
-    <p:custDataLst>
-      <p:tags r:id="rId3"/>
-    </p:custDataLst>
-  </p:cSld>
-  <p:clrMapOvr>
-    <a:masterClrMapping/>
-  </p:clrMapOvr>
-  <p:timing>
-    <p:tnLst>
-      <p:par>
-        <p:cTn id="1" dur="indefinite" restart="never" nodeType="tmRoot"/>
-      </p:par>
-    </p:tnLst>
-  </p:timing>
-</p:sld>
-</file>
-
-<file path=ppt/slides/slide9.xml><?xml version="1.0" encoding="utf-8"?>
-<p:sld xmlns:a="http://schemas.openxmlformats.org/drawingml/2006/main" xmlns:r="http://schemas.openxmlformats.org/officeDocument/2006/relationships" xmlns:p="http://schemas.openxmlformats.org/presentationml/2006/main">
-  <p:cSld>
-    <p:bg>
-      <p:bgPr>
-        <a:noFill/>
-        <a:effectLst/>
-      </p:bgPr>
-    </p:bg>
-    <p:spTree>
-      <p:nvGrpSpPr>
-        <p:cNvPr id="1" name=""/>
-        <p:cNvGrpSpPr/>
-        <p:nvPr/>
-      </p:nvGrpSpPr>
-      <p:grpSpPr/>
-      <p:pic>
-        <p:nvPicPr>
-          <p:cNvPr id="2" name="图片 1" descr="q4"/>
-          <p:cNvPicPr>
-            <a:picLocks noChangeAspect="1"/>
-          </p:cNvPicPr>
-          <p:nvPr/>
-        </p:nvPicPr>
-        <p:blipFill>
-          <a:blip r:embed="rId1"/>
-          <a:stretch>
-            <a:fillRect/>
-          </a:stretch>
-        </p:blipFill>
-        <p:spPr>
-          <a:xfrm>
-            <a:off x="0" y="0"/>
-            <a:ext cx="12192000" cy="6858000"/>
-          </a:xfrm>
-          <a:prstGeom prst="rect">
-            <a:avLst/>
-          </a:prstGeom>
-        </p:spPr>
-      </p:pic>
-      <p:sp>
-        <p:nvSpPr>
-          <p:cNvPr id="32" name="稻壳夜秋https://www.docer.com/works?userid=555357443"/>
-          <p:cNvSpPr txBox="1"/>
-          <p:nvPr/>
-        </p:nvSpPr>
-        <p:spPr>
-          <a:xfrm>
-            <a:off x="1917700" y="539750"/>
-            <a:ext cx="3632835" cy="583565"/>
-          </a:xfrm>
-          <a:prstGeom prst="rect">
-            <a:avLst/>
-          </a:prstGeom>
-          <a:noFill/>
-        </p:spPr>
-        <p:txBody>
-          <a:bodyPr wrap="square" rtlCol="0">
-            <a:spAutoFit/>
-          </a:bodyPr>
-          <a:p>
-            <a:pPr algn="l">
-              <a:buClrTx/>
-              <a:buSzTx/>
-              <a:buFontTx/>
-            </a:pPr>
-            <a:r>
-              <a:rPr lang="en-US" altLang="zh-CN" sz="3200">
-                <a:solidFill>
-                  <a:srgbClr val="846749"/>
-                </a:solidFill>
-                <a:latin typeface="HarmonyOS Sans SC Medium" panose="00000600000000000000" charset="-122"/>
-                <a:ea typeface="HarmonyOS Sans SC Medium" panose="00000600000000000000" charset="-122"/>
-                <a:cs typeface="HarmonyOS Sans SC Medium" panose="00000600000000000000" charset="-122"/>
-                <a:sym typeface="+mn-ea"/>
-              </a:rPr>
-              <a:t>System Design</a:t>
-            </a:r>
-            <a:endParaRPr lang="en-US" altLang="zh-CN" sz="3200">
-              <a:solidFill>
-                <a:srgbClr val="846749"/>
-              </a:solidFill>
-              <a:latin typeface="HarmonyOS Sans SC Medium" panose="00000600000000000000" charset="-122"/>
-              <a:ea typeface="HarmonyOS Sans SC Medium" panose="00000600000000000000" charset="-122"/>
-              <a:cs typeface="HarmonyOS Sans SC Medium" panose="00000600000000000000" charset="-122"/>
-              <a:sym typeface="+mn-ea"/>
-            </a:endParaRPr>
-          </a:p>
-        </p:txBody>
-      </p:sp>
-      <p:sp>
-        <p:nvSpPr>
-          <p:cNvPr id="30" name="文本框 29"/>
-          <p:cNvSpPr txBox="1"/>
-          <p:nvPr/>
-        </p:nvSpPr>
-        <p:spPr>
-          <a:xfrm>
-            <a:off x="1028700" y="416560"/>
-            <a:ext cx="792480" cy="829945"/>
-          </a:xfrm>
-          <a:prstGeom prst="rect">
-            <a:avLst/>
-          </a:prstGeom>
-          <a:noFill/>
-        </p:spPr>
-        <p:txBody>
-          <a:bodyPr wrap="none" rtlCol="0">
-            <a:spAutoFit/>
-          </a:bodyPr>
-          <a:p>
-            <a:pPr algn="l">
-              <a:buClrTx/>
-              <a:buSzTx/>
-              <a:buFontTx/>
-            </a:pPr>
-            <a:r>
-              <a:rPr lang="en-US" altLang="zh-CN" sz="4800">
-                <a:solidFill>
-                  <a:srgbClr val="846749"/>
-                </a:solidFill>
-                <a:latin typeface="思源宋体 CN Heavy" panose="02020900000000000000" charset="-122"/>
-                <a:ea typeface="思源宋体 CN Heavy" panose="02020900000000000000" charset="-122"/>
-                <a:cs typeface="HarmonyOS Sans SC Medium" panose="00000600000000000000" charset="-122"/>
-              </a:rPr>
-              <a:t>02</a:t>
-            </a:r>
-            <a:endParaRPr lang="en-US" altLang="zh-CN" sz="4800">
-              <a:solidFill>
-                <a:srgbClr val="846749"/>
-              </a:solidFill>
-              <a:latin typeface="思源宋体 CN Heavy" panose="02020900000000000000" charset="-122"/>
-              <a:ea typeface="思源宋体 CN Heavy" panose="02020900000000000000" charset="-122"/>
-              <a:cs typeface="HarmonyOS Sans SC Medium" panose="00000600000000000000" charset="-122"/>
-            </a:endParaRPr>
-          </a:p>
-        </p:txBody>
-      </p:sp>
-      <p:sp>
-        <p:nvSpPr>
-          <p:cNvPr id="7" name="文本框 6"/>
-          <p:cNvSpPr txBox="1"/>
-          <p:nvPr/>
-        </p:nvSpPr>
-        <p:spPr>
-          <a:xfrm>
-            <a:off x="685165" y="4854575"/>
-            <a:ext cx="4249420" cy="583565"/>
-          </a:xfrm>
-          <a:prstGeom prst="rect">
-            <a:avLst/>
-          </a:prstGeom>
-          <a:noFill/>
-        </p:spPr>
-        <p:txBody>
-          <a:bodyPr wrap="square" rtlCol="0">
-            <a:spAutoFit/>
-          </a:bodyPr>
-          <a:p>
-            <a:r>
-              <a:rPr lang="en-US" altLang="zh-CN" sz="3200">
-                <a:solidFill>
-                  <a:srgbClr val="846749"/>
-                </a:solidFill>
-                <a:latin typeface="HarmonyOS Sans SC Medium" panose="00000600000000000000" charset="-122"/>
-                <a:ea typeface="HarmonyOS Sans SC Medium" panose="00000600000000000000" charset="-122"/>
-                <a:cs typeface="HarmonyOS Sans SC Medium" panose="00000600000000000000" charset="-122"/>
-              </a:rPr>
-              <a:t>Nine-Step Workflow</a:t>
-            </a:r>
-            <a:endParaRPr lang="en-US" altLang="zh-CN" sz="3200">
-              <a:solidFill>
-                <a:srgbClr val="846749"/>
-              </a:solidFill>
-              <a:latin typeface="HarmonyOS Sans SC Medium" panose="00000600000000000000" charset="-122"/>
-              <a:ea typeface="HarmonyOS Sans SC Medium" panose="00000600000000000000" charset="-122"/>
-              <a:cs typeface="HarmonyOS Sans SC Medium" panose="00000600000000000000" charset="-122"/>
-            </a:endParaRPr>
-          </a:p>
-        </p:txBody>
-      </p:sp>
-      <p:pic>
-        <p:nvPicPr>
-          <p:cNvPr id="3" name="图片 2" descr="截屏2026-05-30 14.54.23"/>
-          <p:cNvPicPr>
-            <a:picLocks noChangeAspect="1"/>
-          </p:cNvPicPr>
-          <p:nvPr/>
-        </p:nvPicPr>
-        <p:blipFill>
-          <a:blip r:embed="rId2"/>
-          <a:stretch>
-            <a:fillRect/>
-          </a:stretch>
-        </p:blipFill>
-        <p:spPr>
-          <a:xfrm>
-            <a:off x="15240" y="1586865"/>
-            <a:ext cx="12176125" cy="1751965"/>
-          </a:xfrm>
-          <a:prstGeom prst="rect">
-            <a:avLst/>
-          </a:prstGeom>
-        </p:spPr>
-      </p:pic>
       <p:graphicFrame>
         <p:nvGraphicFramePr>
           <p:cNvPr id="5" name="表格 4"/>
           <p:cNvGraphicFramePr/>
           <p:nvPr>
             <p:custDataLst>
-              <p:tags r:id="rId3"/>
+              <p:tags r:id="rId2"/>
             </p:custDataLst>
           </p:nvPr>
         </p:nvGraphicFramePr>
@@ -15200,7 +14450,11 @@
                       </a:pPr>
                       <a:r>
                         <a:rPr lang="en-US" altLang="zh-CN" sz="1400"/>
-                        <a:t>Run tests</a:t>
+                        <a:t>Run tests + Generate deliverable </a:t>
+                      </a:r>
+                      <a:r>
+                        <a:rPr lang="en-US" altLang="zh-CN" sz="1400"/>
+                        <a:t>docs</a:t>
                       </a:r>
                       <a:endParaRPr lang="en-US" altLang="zh-CN" sz="1400"/>
                     </a:p>
@@ -15228,9 +14482,230 @@
           </a:graphicData>
         </a:graphic>
       </p:graphicFrame>
+      <p:pic>
+        <p:nvPicPr>
+          <p:cNvPr id="4" name="图片 3" descr="截屏2026-06-02 16.03.01"/>
+          <p:cNvPicPr>
+            <a:picLocks noChangeAspect="1"/>
+          </p:cNvPicPr>
+          <p:nvPr/>
+        </p:nvPicPr>
+        <p:blipFill>
+          <a:blip r:embed="rId3"/>
+          <a:stretch>
+            <a:fillRect/>
+          </a:stretch>
+        </p:blipFill>
+        <p:spPr>
+          <a:xfrm>
+            <a:off x="0" y="1565275"/>
+            <a:ext cx="12192000" cy="1454785"/>
+          </a:xfrm>
+          <a:prstGeom prst="rect">
+            <a:avLst/>
+          </a:prstGeom>
+        </p:spPr>
+      </p:pic>
     </p:spTree>
     <p:custDataLst>
       <p:tags r:id="rId4"/>
+    </p:custDataLst>
+  </p:cSld>
+  <p:clrMapOvr>
+    <a:masterClrMapping/>
+  </p:clrMapOvr>
+  <p:timing>
+    <p:tnLst>
+      <p:par>
+        <p:cTn id="1" dur="indefinite" restart="never" nodeType="tmRoot"/>
+      </p:par>
+    </p:tnLst>
+  </p:timing>
+</p:sld>
+</file>
+
+<file path=ppt/slides/slide9.xml><?xml version="1.0" encoding="utf-8"?>
+<p:sld xmlns:a="http://schemas.openxmlformats.org/drawingml/2006/main" xmlns:r="http://schemas.openxmlformats.org/officeDocument/2006/relationships" xmlns:p="http://schemas.openxmlformats.org/presentationml/2006/main">
+  <p:cSld>
+    <p:bg>
+      <p:bgPr>
+        <a:noFill/>
+        <a:effectLst/>
+      </p:bgPr>
+    </p:bg>
+    <p:spTree>
+      <p:nvGrpSpPr>
+        <p:cNvPr id="1" name=""/>
+        <p:cNvGrpSpPr/>
+        <p:nvPr/>
+      </p:nvGrpSpPr>
+      <p:grpSpPr/>
+      <p:pic>
+        <p:nvPicPr>
+          <p:cNvPr id="6" name="图片 5" descr="q."/>
+          <p:cNvPicPr>
+            <a:picLocks noChangeAspect="1"/>
+          </p:cNvPicPr>
+          <p:nvPr/>
+        </p:nvPicPr>
+        <p:blipFill>
+          <a:blip r:embed="rId1"/>
+          <a:stretch>
+            <a:fillRect/>
+          </a:stretch>
+        </p:blipFill>
+        <p:spPr>
+          <a:xfrm>
+            <a:off x="635" y="0"/>
+            <a:ext cx="12192000" cy="6858000"/>
+          </a:xfrm>
+          <a:prstGeom prst="rect">
+            <a:avLst/>
+          </a:prstGeom>
+        </p:spPr>
+      </p:pic>
+      <p:sp>
+        <p:nvSpPr>
+          <p:cNvPr id="4" name="文本框 3"/>
+          <p:cNvSpPr txBox="1"/>
+          <p:nvPr/>
+        </p:nvSpPr>
+        <p:spPr>
+          <a:xfrm>
+            <a:off x="4610735" y="2623185"/>
+            <a:ext cx="3112770" cy="1014730"/>
+          </a:xfrm>
+          <a:prstGeom prst="rect">
+            <a:avLst/>
+          </a:prstGeom>
+          <a:noFill/>
+        </p:spPr>
+        <p:txBody>
+          <a:bodyPr wrap="none" rtlCol="0">
+            <a:spAutoFit/>
+          </a:bodyPr>
+          <a:p>
+            <a:pPr algn="l"/>
+            <a:r>
+              <a:rPr lang="en-US" altLang="zh-CN" sz="6000">
+                <a:solidFill>
+                  <a:srgbClr val="846749"/>
+                </a:solidFill>
+                <a:latin typeface="思源宋体 CN Heavy" panose="02020900000000000000" charset="-122"/>
+                <a:ea typeface="思源宋体 CN Heavy" panose="02020900000000000000" charset="-122"/>
+                <a:cs typeface="HarmonyOS Sans SC Medium" panose="00000600000000000000" charset="-122"/>
+              </a:rPr>
+              <a:t>Chapter 3</a:t>
+            </a:r>
+            <a:endParaRPr lang="en-US" altLang="zh-CN" sz="6000">
+              <a:solidFill>
+                <a:srgbClr val="846749"/>
+              </a:solidFill>
+              <a:latin typeface="思源宋体 CN Heavy" panose="02020900000000000000" charset="-122"/>
+              <a:ea typeface="思源宋体 CN Heavy" panose="02020900000000000000" charset="-122"/>
+              <a:cs typeface="HarmonyOS Sans SC Medium" panose="00000600000000000000" charset="-122"/>
+            </a:endParaRPr>
+          </a:p>
+        </p:txBody>
+      </p:sp>
+      <p:sp>
+        <p:nvSpPr>
+          <p:cNvPr id="32" name="稻壳夜秋https://www.docer.com/works?userid=555357443"/>
+          <p:cNvSpPr txBox="1"/>
+          <p:nvPr/>
+        </p:nvSpPr>
+        <p:spPr>
+          <a:xfrm>
+            <a:off x="4350385" y="3803650"/>
+            <a:ext cx="3632835" cy="460375"/>
+          </a:xfrm>
+          <a:prstGeom prst="rect">
+            <a:avLst/>
+          </a:prstGeom>
+          <a:noFill/>
+        </p:spPr>
+        <p:txBody>
+          <a:bodyPr wrap="square" rtlCol="0">
+            <a:spAutoFit/>
+          </a:bodyPr>
+          <a:p>
+            <a:pPr algn="ctr"/>
+            <a:r>
+              <a:rPr lang="en-US" altLang="zh-CN" sz="2400">
+                <a:solidFill>
+                  <a:srgbClr val="846749"/>
+                </a:solidFill>
+                <a:latin typeface="HarmonyOS Sans SC Medium" panose="00000600000000000000" charset="-122"/>
+                <a:ea typeface="HarmonyOS Sans SC Medium" panose="00000600000000000000" charset="-122"/>
+                <a:cs typeface="HarmonyOS Sans SC Medium" panose="00000600000000000000" charset="-122"/>
+                <a:sym typeface="+mn-ea"/>
+              </a:rPr>
+              <a:t>Test Design</a:t>
+            </a:r>
+            <a:endParaRPr lang="en-US" altLang="zh-CN" sz="2400">
+              <a:solidFill>
+                <a:srgbClr val="846749"/>
+              </a:solidFill>
+              <a:latin typeface="HarmonyOS Sans SC Medium" panose="00000600000000000000" charset="-122"/>
+              <a:ea typeface="HarmonyOS Sans SC Medium" panose="00000600000000000000" charset="-122"/>
+              <a:cs typeface="HarmonyOS Sans SC Medium" panose="00000600000000000000" charset="-122"/>
+              <a:sym typeface="+mn-ea"/>
+            </a:endParaRPr>
+          </a:p>
+        </p:txBody>
+      </p:sp>
+      <p:sp>
+        <p:nvSpPr>
+          <p:cNvPr id="7" name="椭圆 6"/>
+          <p:cNvSpPr/>
+          <p:nvPr/>
+        </p:nvSpPr>
+        <p:spPr>
+          <a:xfrm>
+            <a:off x="3713480" y="1079500"/>
+            <a:ext cx="4826000" cy="4826000"/>
+          </a:xfrm>
+          <a:prstGeom prst="ellipse">
+            <a:avLst/>
+          </a:prstGeom>
+          <a:noFill/>
+          <a:ln>
+            <a:solidFill>
+              <a:srgbClr val="846749">
+                <a:alpha val="14000"/>
+              </a:srgbClr>
+            </a:solidFill>
+          </a:ln>
+        </p:spPr>
+        <p:style>
+          <a:lnRef idx="2">
+            <a:schemeClr val="accent1">
+              <a:shade val="50000"/>
+            </a:schemeClr>
+          </a:lnRef>
+          <a:fillRef idx="1">
+            <a:schemeClr val="accent1"/>
+          </a:fillRef>
+          <a:effectRef idx="0">
+            <a:schemeClr val="accent1"/>
+          </a:effectRef>
+          <a:fontRef idx="minor">
+            <a:schemeClr val="lt1"/>
+          </a:fontRef>
+        </p:style>
+        <p:txBody>
+          <a:bodyPr rtlCol="0" anchor="ctr"/>
+          <a:p>
+            <a:pPr algn="ctr"/>
+            <a:endParaRPr lang="zh-CN" altLang="en-US">
+              <a:cs typeface="HarmonyOS Sans SC Medium" panose="00000600000000000000" charset="-122"/>
+            </a:endParaRPr>
+          </a:p>
+        </p:txBody>
+      </p:sp>
+    </p:spTree>
+    <p:custDataLst>
+      <p:tags r:id="rId2"/>
     </p:custDataLst>
   </p:cSld>
   <p:clrMapOvr>
@@ -15355,17 +14830,17 @@
 
 <file path=ppt/tags/tag21.xml><?xml version="1.0" encoding="utf-8"?>
 <p:tagLst xmlns:p="http://schemas.openxmlformats.org/presentationml/2006/main">
-  <p:tag name="KSO_WM_BEAUTIFY_FLAG" val="#wm#"/>
-  <p:tag name="KSO_WM_TEMPLATE_CATEGORY" val="custom"/>
-  <p:tag name="KSO_WM_TEMPLATE_INDEX" val="20205081"/>
-  <p:tag name="KSO_WM_SPECIAL_SOURCE" val="bdnull"/>
+  <p:tag name="TABLE_ENDDRAG_ORIGIN_RECT" val="548*240"/>
+  <p:tag name="TABLE_ENDDRAG_RECT" val="63*225*548*240"/>
 </p:tagLst>
 </file>
 
 <file path=ppt/tags/tag22.xml><?xml version="1.0" encoding="utf-8"?>
 <p:tagLst xmlns:p="http://schemas.openxmlformats.org/presentationml/2006/main">
-  <p:tag name="TABLE_ENDDRAG_ORIGIN_RECT" val="548*240"/>
-  <p:tag name="TABLE_ENDDRAG_RECT" val="63*225*548*240"/>
+  <p:tag name="KSO_WM_BEAUTIFY_FLAG" val="#wm#"/>
+  <p:tag name="KSO_WM_TEMPLATE_CATEGORY" val="custom"/>
+  <p:tag name="KSO_WM_TEMPLATE_INDEX" val="20205081"/>
+  <p:tag name="KSO_WM_SPECIAL_SOURCE" val="bdnull"/>
 </p:tagLst>
 </file>
 
@@ -15380,17 +14855,17 @@
 
 <file path=ppt/tags/tag24.xml><?xml version="1.0" encoding="utf-8"?>
 <p:tagLst xmlns:p="http://schemas.openxmlformats.org/presentationml/2006/main">
-  <p:tag name="KSO_WM_BEAUTIFY_FLAG" val="#wm#"/>
-  <p:tag name="KSO_WM_TEMPLATE_CATEGORY" val="custom"/>
-  <p:tag name="KSO_WM_TEMPLATE_INDEX" val="20205081"/>
-  <p:tag name="KSO_WM_SPECIAL_SOURCE" val="bdnull"/>
+  <p:tag name="TABLE_ENDDRAG_ORIGIN_RECT" val="377*169"/>
+  <p:tag name="TABLE_ENDDRAG_RECT" val="43*138*377*169"/>
 </p:tagLst>
 </file>
 
 <file path=ppt/tags/tag25.xml><?xml version="1.0" encoding="utf-8"?>
 <p:tagLst xmlns:p="http://schemas.openxmlformats.org/presentationml/2006/main">
-  <p:tag name="TABLE_ENDDRAG_ORIGIN_RECT" val="377*169"/>
-  <p:tag name="TABLE_ENDDRAG_RECT" val="43*138*377*169"/>
+  <p:tag name="KSO_WM_BEAUTIFY_FLAG" val="#wm#"/>
+  <p:tag name="KSO_WM_TEMPLATE_CATEGORY" val="custom"/>
+  <p:tag name="KSO_WM_TEMPLATE_INDEX" val="20205081"/>
+  <p:tag name="KSO_WM_SPECIAL_SOURCE" val="bdnull"/>
 </p:tagLst>
 </file>
 
@@ -15414,17 +14889,17 @@
 
 <file path=ppt/tags/tag28.xml><?xml version="1.0" encoding="utf-8"?>
 <p:tagLst xmlns:p="http://schemas.openxmlformats.org/presentationml/2006/main">
-  <p:tag name="KSO_WM_BEAUTIFY_FLAG" val="#wm#"/>
-  <p:tag name="KSO_WM_TEMPLATE_CATEGORY" val="custom"/>
-  <p:tag name="KSO_WM_TEMPLATE_INDEX" val="20205081"/>
-  <p:tag name="KSO_WM_SPECIAL_SOURCE" val="bdnull"/>
+  <p:tag name="TABLE_ENDDRAG_ORIGIN_RECT" val="340*162"/>
+  <p:tag name="TABLE_ENDDRAG_RECT" val="76*231*340*162"/>
 </p:tagLst>
 </file>
 
 <file path=ppt/tags/tag29.xml><?xml version="1.0" encoding="utf-8"?>
 <p:tagLst xmlns:p="http://schemas.openxmlformats.org/presentationml/2006/main">
-  <p:tag name="TABLE_ENDDRAG_ORIGIN_RECT" val="340*162"/>
-  <p:tag name="TABLE_ENDDRAG_RECT" val="76*231*340*162"/>
+  <p:tag name="KSO_WM_BEAUTIFY_FLAG" val="#wm#"/>
+  <p:tag name="KSO_WM_TEMPLATE_CATEGORY" val="custom"/>
+  <p:tag name="KSO_WM_TEMPLATE_INDEX" val="20205081"/>
+  <p:tag name="KSO_WM_SPECIAL_SOURCE" val="bdnull"/>
 </p:tagLst>
 </file>
 
@@ -15472,21 +14947,12 @@
 
 <file path=ppt/tags/tag34.xml><?xml version="1.0" encoding="utf-8"?>
 <p:tagLst xmlns:p="http://schemas.openxmlformats.org/presentationml/2006/main">
-  <p:tag name="KSO_WM_BEAUTIFY_FLAG" val="#wm#"/>
-  <p:tag name="KSO_WM_TEMPLATE_CATEGORY" val="custom"/>
-  <p:tag name="KSO_WM_TEMPLATE_INDEX" val="20205081"/>
-  <p:tag name="KSO_WM_SPECIAL_SOURCE" val="bdnull"/>
-</p:tagLst>
-</file>
-
-<file path=ppt/tags/tag35.xml><?xml version="1.0" encoding="utf-8"?>
-<p:tagLst xmlns:p="http://schemas.openxmlformats.org/presentationml/2006/main">
   <p:tag name="TABLE_ENDDRAG_ORIGIN_RECT" val="815*138"/>
   <p:tag name="TABLE_ENDDRAG_RECT" val="81*155*815*138"/>
 </p:tagLst>
 </file>
 
-<file path=ppt/tags/tag36.xml><?xml version="1.0" encoding="utf-8"?>
+<file path=ppt/tags/tag35.xml><?xml version="1.0" encoding="utf-8"?>
 <p:tagLst xmlns:p="http://schemas.openxmlformats.org/presentationml/2006/main">
   <p:tag name="KSO_WM_BEAUTIFY_FLAG" val="#wm#"/>
   <p:tag name="KSO_WM_TEMPLATE_CATEGORY" val="custom"/>
@@ -15495,10 +14961,19 @@
 </p:tagLst>
 </file>
 
-<file path=ppt/tags/tag37.xml><?xml version="1.0" encoding="utf-8"?>
+<file path=ppt/tags/tag36.xml><?xml version="1.0" encoding="utf-8"?>
 <p:tagLst xmlns:p="http://schemas.openxmlformats.org/presentationml/2006/main">
   <p:tag name="TABLE_ENDDRAG_ORIGIN_RECT" val="815*138"/>
   <p:tag name="TABLE_ENDDRAG_RECT" val="81*155*815*138"/>
+</p:tagLst>
+</file>
+
+<file path=ppt/tags/tag37.xml><?xml version="1.0" encoding="utf-8"?>
+<p:tagLst xmlns:p="http://schemas.openxmlformats.org/presentationml/2006/main">
+  <p:tag name="KSO_WM_BEAUTIFY_FLAG" val="#wm#"/>
+  <p:tag name="KSO_WM_TEMPLATE_CATEGORY" val="custom"/>
+  <p:tag name="KSO_WM_TEMPLATE_INDEX" val="20205081"/>
+  <p:tag name="KSO_WM_SPECIAL_SOURCE" val="bdnull"/>
 </p:tagLst>
 </file>
 
@@ -15513,23 +14988,14 @@
 
 <file path=ppt/tags/tag39.xml><?xml version="1.0" encoding="utf-8"?>
 <p:tagLst xmlns:p="http://schemas.openxmlformats.org/presentationml/2006/main">
-  <p:tag name="KSO_WM_BEAUTIFY_FLAG" val="#wm#"/>
-  <p:tag name="KSO_WM_TEMPLATE_CATEGORY" val="custom"/>
-  <p:tag name="KSO_WM_TEMPLATE_INDEX" val="20205081"/>
-  <p:tag name="KSO_WM_SPECIAL_SOURCE" val="bdnull"/>
+  <p:tag name="KSO_DOCER_TEMPLATE_OPEN_ONCE_MARK" val="1"/>
+  <p:tag name="COMMONDATA" val="eyJoZGlkIjoiMzU2NDgwNDU3MWM0NTY2NDhiZjM1YjVjY2QzYzVkZDAifQ=="/>
 </p:tagLst>
 </file>
 
 <file path=ppt/tags/tag4.xml><?xml version="1.0" encoding="utf-8"?>
 <p:tagLst xmlns:p="http://schemas.openxmlformats.org/presentationml/2006/main">
   <p:tag name="KSO_WM_DIAGRAM_VIRTUALLY_FRAME" val="{&quot;height&quot;:169.7,&quot;left&quot;:172.45,&quot;top&quot;:216.05,&quot;width&quot;:703.95}"/>
-</p:tagLst>
-</file>
-
-<file path=ppt/tags/tag40.xml><?xml version="1.0" encoding="utf-8"?>
-<p:tagLst xmlns:p="http://schemas.openxmlformats.org/presentationml/2006/main">
-  <p:tag name="KSO_DOCER_TEMPLATE_OPEN_ONCE_MARK" val="1"/>
-  <p:tag name="COMMONDATA" val="eyJoZGlkIjoiMzU2NDgwNDU3MWM0NTY2NDhiZjM1YjVjY2QzYzVkZDAifQ=="/>
 </p:tagLst>
 </file>
 
